--- a/docs/presentations/engineering-management/pixi-sbom-engineering.pptx
+++ b/docs/presentations/engineering-management/pixi-sbom-engineering.pptx
@@ -689,7 +689,7 @@
           <a:p>
             <a:r>
               <a:rPr lang="en-US" dirty="0"/>
-              <a:t>This slide is here to answer the question nobody says out loud: is this somebody's weekend project that we'll regret depending on. The stability promise is the strongest item for management, because it's an explicit commitment about what won't change without a major version — more than most of our internal tooling offers. If we'd be the ones maintaining it, say so directly. Being the maintainer is a strength here as long as you're honest about the bus factor when somebody asks.</a:t>
+              <a:t>This slide is here to answer the question nobody says out loud: is this somebody's weekend project that we'll regret depending on. The stability promise is the strongest item for management: it has held through eight minor releases since 1.0, and it's an explicit commitment about what won't change without a major version — more than most of our internal tooling offers. If we'd be the ones maintaining it, say so directly. Being the maintainer is a strength here as long as you're honest about the bus factor when somebody asks.</a:t>
             </a:r>
             <a:endParaRPr lang="en-US" dirty="0"/>
           </a:p>
@@ -953,7 +953,7 @@
           <a:p>
             <a:r>
               <a:rPr lang="en-US" dirty="0"/>
-              <a:t>Move fast here if the room already knows this. For the security and compliance side, the phrase that matters is "standard formats" — CycloneDX and SPDX are the two that show up in the regulations and in customer questionnaires, and we write both, so nobody has to take a format on our say-so. For the engineers: the input is the lockfile, which the resolver already produced. We're not re-solving anything or guessing at versions. We're writing down a decision that's already been made.</a:t>
+              <a:t>Move fast here if the room already knows this. For the security and compliance side, the phrase that matters is "standard formats" — CycloneDX and SPDX are the two that show up in the regulations and in customer questionnaires, and we write both, so nobody has to take a format on our say-so. For the engineers: the input is the lockfile, which the resolver already produced, whether pixi, uv, Poetry, PDM, conda-lock or a pinned pip file wrote it. We're not re-solving anything or guessing at versions. We're writing down a decision that's already been made.</a:t>
             </a:r>
             <a:endParaRPr lang="en-US" dirty="0"/>
           </a:p>
@@ -1041,7 +1041,7 @@
           <a:p>
             <a:r>
               <a:rPr lang="en-US" dirty="0"/>
-              <a:t>The compliance people in this room know these rules better than you do, so state them plainly and don't stretch them. What's actually settled is the direction, even where a specific deadline isn't. Check the current CRA timeline and anything sector-specific that applies to us, then delete the footer note. If someone asks whether we're in scope today, the honest answer is that the third card already applies no matter what: customers are asking us now.</a:t>
+              <a:t>The compliance people in this room know these rules better than you do, so state them plainly and don't stretch them. PCI DSS 4.0 Requirement 6.3.2: maintain an inventory of bespoke and custom software, and of the third-party software components built into it, to support vulnerability and patch management. It was a best practice until 31 March 2025 and is assessed from then on. It covers any organization that stores, processes or transmits cardholder data. DORA: Commission Delegated Regulation (EU) 2024/1774, Article 10(2)(d), requires financial entities to track the usage of third-party libraries, including open-source libraries, used by ICT services that support critical or important functions, and to monitor their versions and updates. It also covers software the entity develops itself. DORA has applied since 17 January 2025. Cyber Resilience Act, Regulation (EU) 2024/2847: vulnerability reporting applies from 11 September 2026; the SBOM and the other main obligations from 11 December 2027. Neither financial rule names SBOMs. Say that if asked: an SBOM is the auditable, machine-readable form of the inventory both require, not a separate obligation. Not on the slide on purpose: NYDFS Part 500.13 (asset inventory of information systems, from 1 November 2025) and the 2023 US interagency guidance on third-party risk. Both are relevant to a bank, but neither asks for a component-level inventory. If someone asks whether we're in scope today: for card data and EU financial entities, yes, already. Customers are asking either way.</a:t>
             </a:r>
             <a:endParaRPr lang="en-US" dirty="0"/>
           </a:p>
@@ -1305,7 +1305,7 @@
           <a:p>
             <a:r>
               <a:rPr lang="en-US" dirty="0"/>
-              <a:t>Don't read the tiles out. Pick the two that matter to this room and let the rest sit there showing there's depth behind the pitch. For security and compliance, spend your time on provenance: the document records which sources were consulted and which returned nothing, so an auditor can tell "we checked and found nothing" from "we never checked". For engineering, the diff is usually the one that gets a reaction, because it turns "what changed in this release" from an afternoon of digging into a command.</a:t>
+              <a:t>Don't read the tiles out. Pick the two that matter to this room and let the rest sit there showing there's depth behind the pitch. For security and compliance, spend your time on provenance: the document records which sources were consulted and which returned nothing, so an auditor can tell "we checked and found nothing" from "we never checked". For engineering, "any Python project" is usually the one that gets a reaction: it does not care which tool locked the environment. If the room buys software from suppliers, supplier SBOMs is the tile for them: a vendor's document is graded and checked before anyone relies on it, instead of accepted on faith.</a:t>
             </a:r>
             <a:endParaRPr lang="en-US" dirty="0"/>
           </a:p>
@@ -1553,9 +1553,16 @@
 </p:sldLayout>
 </file>
 
-<file path=ppt/slideMasters/slideMaster1.xml><?xml version="1.0" encoding="utf-8"?>
-<p:sldMaster xmlns:a="http://schemas.openxmlformats.org/drawingml/2006/main" xmlns:r="http://schemas.openxmlformats.org/officeDocument/2006/relationships" xmlns:p="http://schemas.openxmlformats.org/presentationml/2006/main">
-  <p:cSld>
+<file path=ppt/slideLayouts/slideLayout2.xml><?xml version="1.0" encoding="utf-8"?>
+<p:sldLayout xmlns:a="http://schemas.openxmlformats.org/drawingml/2006/main" xmlns:r="http://schemas.openxmlformats.org/officeDocument/2006/relationships" xmlns:p="http://schemas.openxmlformats.org/presentationml/2006/main" preserve="1">
+  <p:cSld name="Title and body">
+    <p:bg>
+      <p:bgPr>
+        <a:solidFill>
+          <a:srgbClr val="F7F8F6"/>
+        </a:solidFill>
+      </p:bgPr>
+    </p:bg>
     <p:spTree>
       <p:nvGrpSpPr>
         <p:cNvPr id="1" name=""/>
@@ -1570,11 +1577,236 @@
           <a:chExt cx="0" cy="0"/>
         </a:xfrm>
       </p:grpSpPr>
+      <p:sp>
+        <p:nvSpPr>
+          <p:cNvPr id="2" name="Title Placeholder 1"/>
+          <p:cNvSpPr/>
+          <p:nvPr>
+            <p:ph type="title"/>
+          </p:nvPr>
+        </p:nvSpPr>
+        <p:spPr>
+          <a:xfrm>
+            <a:off x="812800" y="812800"/>
+            <a:ext cx="10566400" cy="502890"/>
+          </a:xfrm>
+          <a:prstGeom prst="rect">
+            <a:avLst/>
+          </a:prstGeom>
+          <a:noFill/>
+          <a:ln/>
+        </p:spPr>
+        <p:txBody>
+          <a:bodyPr wrap="square" lIns="0" tIns="0" rIns="0" bIns="0" rtlCol="0" anchor="t"/>
+          <a:lstStyle>
+            <a:lvl1pPr algn="l" indent="0" marL="0">
+              <a:lnSpc>
+                <a:spcPct val="115000"/>
+              </a:lnSpc>
+              <a:buNone/>
+              <a:defRPr lang="en-US" sz="3600" dirty="0">
+                <a:solidFill>
+                  <a:srgbClr val="10212B"/>
+                </a:solidFill>
+                <a:latin typeface="Verdana" pitchFamily="34" charset="0"/>
+                <a:ea typeface="Verdana" pitchFamily="34" charset="-122"/>
+                <a:cs typeface="Verdana" pitchFamily="34" charset="-120"/>
+              </a:defRPr>
+            </a:lvl1pPr>
+          </a:lstStyle>
+          <a:p>
+            <a:pPr algn="l" indent="0" marL="0">
+              <a:lnSpc>
+                <a:spcPct val="115000"/>
+              </a:lnSpc>
+              <a:buNone/>
+            </a:pPr>
+            <a:endParaRPr lang="en-US" sz="3600" dirty="0"/>
+          </a:p>
+        </p:txBody>
+      </p:sp>
+      <p:sp>
+        <p:nvSpPr>
+          <p:cNvPr id="3" name="Text Placeholder 2"/>
+          <p:cNvSpPr/>
+          <p:nvPr>
+            <p:ph idx="101" type="body"/>
+          </p:nvPr>
+        </p:nvSpPr>
+        <p:spPr>
+          <a:xfrm>
+            <a:off x="812800" y="1620490"/>
+            <a:ext cx="10566400" cy="4424710"/>
+          </a:xfrm>
+          <a:prstGeom prst="rect">
+            <a:avLst/>
+          </a:prstGeom>
+          <a:noFill/>
+          <a:ln/>
+        </p:spPr>
+        <p:txBody>
+          <a:bodyPr wrap="square" lIns="0" tIns="0" rIns="0" bIns="0" rtlCol="0" anchor="t"/>
+          <a:lstStyle>
+            <a:lvl1pPr algn="l" indent="0" marL="0">
+              <a:lnSpc>
+                <a:spcPct val="140000"/>
+              </a:lnSpc>
+              <a:buNone/>
+              <a:defRPr lang="en-US" sz="1600" dirty="0">
+                <a:solidFill>
+                  <a:srgbClr val="10212B"/>
+                </a:solidFill>
+                <a:latin typeface="Verdana" pitchFamily="34" charset="0"/>
+                <a:ea typeface="Verdana" pitchFamily="34" charset="-122"/>
+                <a:cs typeface="Verdana" pitchFamily="34" charset="-120"/>
+              </a:defRPr>
+            </a:lvl1pPr>
+          </a:lstStyle>
+          <a:p>
+            <a:pPr algn="l" indent="0" marL="0">
+              <a:lnSpc>
+                <a:spcPct val="140000"/>
+              </a:lnSpc>
+              <a:buNone/>
+            </a:pPr>
+            <a:endParaRPr lang="en-US" sz="1600" dirty="0"/>
+          </a:p>
+        </p:txBody>
+      </p:sp>
+    </p:spTree>
+  </p:cSld>
+  <p:clrMapOvr>
+    <a:masterClrMapping/>
+  </p:clrMapOvr>
+</p:sldLayout>
+</file>
+
+<file path=ppt/slideMasters/slideMaster1.xml><?xml version="1.0" encoding="utf-8"?>
+<p:sldMaster xmlns:a="http://schemas.openxmlformats.org/drawingml/2006/main" xmlns:r="http://schemas.openxmlformats.org/officeDocument/2006/relationships" xmlns:p="http://schemas.openxmlformats.org/presentationml/2006/main">
+  <p:cSld>
+    <p:bg>
+      <p:bgPr>
+        <a:solidFill>
+          <a:srgbClr val="F7F8F6"/>
+        </a:solidFill>
+      </p:bgPr>
+    </p:bg>
+    <p:spTree>
+      <p:nvGrpSpPr>
+        <p:cNvPr id="1" name=""/>
+        <p:cNvGrpSpPr/>
+        <p:nvPr/>
+      </p:nvGrpSpPr>
+      <p:grpSpPr>
+        <a:xfrm>
+          <a:off x="0" y="0"/>
+          <a:ext cx="0" cy="0"/>
+          <a:chOff x="0" y="0"/>
+          <a:chExt cx="0" cy="0"/>
+        </a:xfrm>
+      </p:grpSpPr>
+      <p:sp>
+        <p:nvSpPr>
+          <p:cNvPr id="2" name="Title Placeholder 1"/>
+          <p:cNvSpPr/>
+          <p:nvPr>
+            <p:ph type="title"/>
+          </p:nvPr>
+        </p:nvSpPr>
+        <p:spPr>
+          <a:xfrm>
+            <a:off x="812800" y="812800"/>
+            <a:ext cx="10566400" cy="502890"/>
+          </a:xfrm>
+          <a:prstGeom prst="rect">
+            <a:avLst/>
+          </a:prstGeom>
+          <a:noFill/>
+          <a:ln/>
+        </p:spPr>
+        <p:txBody>
+          <a:bodyPr wrap="square" lIns="0" tIns="0" rIns="0" bIns="0" rtlCol="0" anchor="t"/>
+          <a:lstStyle>
+            <a:lvl1pPr algn="l" indent="0" marL="0">
+              <a:lnSpc>
+                <a:spcPct val="115000"/>
+              </a:lnSpc>
+              <a:buNone/>
+              <a:defRPr lang="en-US" sz="3600" dirty="0">
+                <a:solidFill>
+                  <a:srgbClr val="10212B"/>
+                </a:solidFill>
+                <a:latin typeface="Verdana" pitchFamily="34" charset="0"/>
+                <a:ea typeface="Verdana" pitchFamily="34" charset="-122"/>
+                <a:cs typeface="Verdana" pitchFamily="34" charset="-120"/>
+              </a:defRPr>
+            </a:lvl1pPr>
+          </a:lstStyle>
+          <a:p>
+            <a:pPr algn="l" indent="0" marL="0">
+              <a:lnSpc>
+                <a:spcPct val="115000"/>
+              </a:lnSpc>
+              <a:buNone/>
+            </a:pPr>
+            <a:endParaRPr lang="en-US" sz="3600" dirty="0"/>
+          </a:p>
+        </p:txBody>
+      </p:sp>
+      <p:sp>
+        <p:nvSpPr>
+          <p:cNvPr id="3" name="Text Placeholder 2"/>
+          <p:cNvSpPr/>
+          <p:nvPr>
+            <p:ph idx="101" type="body"/>
+          </p:nvPr>
+        </p:nvSpPr>
+        <p:spPr>
+          <a:xfrm>
+            <a:off x="812800" y="1620490"/>
+            <a:ext cx="10566400" cy="4424710"/>
+          </a:xfrm>
+          <a:prstGeom prst="rect">
+            <a:avLst/>
+          </a:prstGeom>
+          <a:noFill/>
+          <a:ln/>
+        </p:spPr>
+        <p:txBody>
+          <a:bodyPr wrap="square" lIns="0" tIns="0" rIns="0" bIns="0" rtlCol="0" anchor="t"/>
+          <a:lstStyle>
+            <a:lvl1pPr algn="l" indent="0" marL="0">
+              <a:lnSpc>
+                <a:spcPct val="140000"/>
+              </a:lnSpc>
+              <a:buNone/>
+              <a:defRPr lang="en-US" sz="1600" dirty="0">
+                <a:solidFill>
+                  <a:srgbClr val="10212B"/>
+                </a:solidFill>
+                <a:latin typeface="Verdana" pitchFamily="34" charset="0"/>
+                <a:ea typeface="Verdana" pitchFamily="34" charset="-122"/>
+                <a:cs typeface="Verdana" pitchFamily="34" charset="-120"/>
+              </a:defRPr>
+            </a:lvl1pPr>
+          </a:lstStyle>
+          <a:p>
+            <a:pPr algn="l" indent="0" marL="0">
+              <a:lnSpc>
+                <a:spcPct val="140000"/>
+              </a:lnSpc>
+              <a:buNone/>
+            </a:pPr>
+            <a:endParaRPr lang="en-US" sz="1600" dirty="0"/>
+          </a:p>
+        </p:txBody>
+      </p:sp>
     </p:spTree>
   </p:cSld>
   <p:clrMap bg1="lt1" tx1="dk1" bg2="lt2" tx2="dk2" accent1="accent1" accent2="accent2" accent3="accent3" accent4="accent4" accent5="accent5" accent6="accent6" hlink="hlink" folHlink="folHlink"/>
   <p:sldLayoutIdLst>
     <p:sldLayoutId id="2147483649" r:id="rId1"/>
+    <p:sldLayoutId id="2147483650" r:id="rId2"/>
   </p:sldLayoutIdLst>
   <p:hf sldNum="0" hdr="0" ftr="0" dt="0"/>
   <p:txStyles>
@@ -1862,7 +2094,7 @@
         </p:nvSpPr>
         <p:spPr>
           <a:xfrm>
-            <a:off x="812800" y="1789460"/>
+            <a:off x="812800" y="1600845"/>
             <a:ext cx="10883392" cy="238720"/>
           </a:xfrm>
           <a:prstGeom prst="rect">
@@ -1888,9 +2120,9 @@
                 <a:solidFill>
                   <a:srgbClr val="6FBFAE"/>
                 </a:solidFill>
-                <a:latin typeface="JetBrains Mono" pitchFamily="34" charset="0"/>
-                <a:ea typeface="JetBrains Mono" pitchFamily="34" charset="-122"/>
-                <a:cs typeface="JetBrains Mono" pitchFamily="34" charset="-120"/>
+                <a:latin typeface="Courier New" pitchFamily="49" charset="0"/>
+                <a:ea typeface="Courier New" pitchFamily="49" charset="-122"/>
+                <a:cs typeface="Courier New" pitchFamily="49" charset="-120"/>
               </a:rPr>
               <a:t>A PROPOSAL</a:t>
             </a:r>
@@ -1902,11 +2134,13 @@
         <p:nvSpPr>
           <p:cNvPr id="3" name="Text 1"/>
           <p:cNvSpPr/>
-          <p:nvPr/>
-        </p:nvSpPr>
-        <p:spPr>
-          <a:xfrm>
-            <a:off x="812800" y="2256780"/>
+          <p:nvPr>
+            <p:ph type="title"/>
+          </p:nvPr>
+        </p:nvSpPr>
+        <p:spPr>
+          <a:xfrm>
+            <a:off x="812800" y="2068165"/>
             <a:ext cx="9810750" cy="1625600"/>
           </a:xfrm>
           <a:prstGeom prst="rect">
@@ -1928,13 +2162,13 @@
               <a:buNone/>
             </a:pPr>
             <a:r>
-              <a:rPr lang="en-US" sz="6000" b="1" dirty="0">
+              <a:rPr lang="en-US" sz="6000" b="1" i="0" dirty="0">
                 <a:solidFill>
                   <a:srgbClr val="F7F8F6"/>
                 </a:solidFill>
-                <a:latin typeface="IBM Plex Sans" pitchFamily="34" charset="0"/>
-                <a:ea typeface="IBM Plex Sans" pitchFamily="34" charset="-122"/>
-                <a:cs typeface="IBM Plex Sans" pitchFamily="34" charset="-120"/>
+                <a:latin typeface="Verdana" pitchFamily="34" charset="0"/>
+                <a:ea typeface="Verdana" pitchFamily="34" charset="-122"/>
+                <a:cs typeface="Verdana" pitchFamily="34" charset="-120"/>
               </a:rPr>
               <a:t>Know what's in what we ship</a:t>
             </a:r>
@@ -1950,8 +2184,8 @@
         </p:nvSpPr>
         <p:spPr>
           <a:xfrm>
-            <a:off x="812800" y="4110980"/>
-            <a:ext cx="9156700" cy="779760"/>
+            <a:off x="812800" y="3922365"/>
+            <a:ext cx="9156700" cy="1156940"/>
           </a:xfrm>
           <a:prstGeom prst="rect">
             <a:avLst/>
@@ -1976,9 +2210,9 @@
                 <a:solidFill>
                   <a:srgbClr val="B5C4CA"/>
                 </a:solidFill>
-                <a:latin typeface="IBM Plex Sans" pitchFamily="34" charset="0"/>
-                <a:ea typeface="IBM Plex Sans" pitchFamily="34" charset="-122"/>
-                <a:cs typeface="IBM Plex Sans" pitchFamily="34" charset="-120"/>
+                <a:latin typeface="Verdana" pitchFamily="34" charset="0"/>
+                <a:ea typeface="Verdana" pitchFamily="34" charset="-122"/>
+                <a:cs typeface="Verdana" pitchFamily="34" charset="-120"/>
               </a:rPr>
               <a:t>pixi-sbom writes a software bill of materials for every environment we build. One job in CI, and we can answer the question.</a:t>
             </a:r>
@@ -1995,7 +2229,7 @@
         <p:spPr>
           <a:xfrm>
             <a:off x="812800" y="6238280"/>
-            <a:ext cx="2669342" cy="238720"/>
+            <a:ext cx="3480256" cy="238720"/>
           </a:xfrm>
           <a:prstGeom prst="rect">
             <a:avLst/>
@@ -2020,11 +2254,11 @@
                 <a:solidFill>
                   <a:srgbClr val="7A8C93"/>
                 </a:solidFill>
-                <a:latin typeface="IBM Plex Sans" pitchFamily="34" charset="0"/>
-                <a:ea typeface="IBM Plex Sans" pitchFamily="34" charset="-122"/>
-                <a:cs typeface="IBM Plex Sans" pitchFamily="34" charset="-120"/>
+                <a:latin typeface="Verdana" pitchFamily="34" charset="0"/>
+                <a:ea typeface="Verdana" pitchFamily="34" charset="-122"/>
+                <a:cs typeface="Verdana" pitchFamily="34" charset="-120"/>
               </a:rPr>
-              <a:t>[Presenter] · [Date] · pixi-sbom 0.10.1</a:t>
+              <a:t>[Presenter] · [Date] · pixi-sbom 1.8.1</a:t>
             </a:r>
             <a:endParaRPr lang="en-US" sz="1200" dirty="0"/>
           </a:p>
@@ -2066,7 +2300,9 @@
         <p:nvSpPr>
           <p:cNvPr id="2" name="Text 0"/>
           <p:cNvSpPr/>
-          <p:nvPr/>
+          <p:nvPr>
+            <p:ph type="title"/>
+          </p:nvPr>
         </p:nvSpPr>
         <p:spPr>
           <a:xfrm>
@@ -2092,13 +2328,13 @@
               <a:buNone/>
             </a:pPr>
             <a:r>
-              <a:rPr lang="en-US" sz="3600" b="1" dirty="0">
+              <a:rPr lang="en-US" sz="3600" b="1" i="0" dirty="0">
                 <a:solidFill>
                   <a:srgbClr val="10212B"/>
                 </a:solidFill>
-                <a:latin typeface="IBM Plex Sans" pitchFamily="34" charset="0"/>
-                <a:ea typeface="IBM Plex Sans" pitchFamily="34" charset="-122"/>
-                <a:cs typeface="IBM Plex Sans" pitchFamily="34" charset="-120"/>
+                <a:latin typeface="Verdana" pitchFamily="34" charset="0"/>
+                <a:ea typeface="Verdana" pitchFamily="34" charset="-122"/>
+                <a:cs typeface="Verdana" pitchFamily="34" charset="-120"/>
               </a:rPr>
               <a:t>What it costs us</a:t>
             </a:r>
@@ -2167,9 +2403,9 @@
                 <a:solidFill>
                   <a:srgbClr val="1F7A6C"/>
                 </a:solidFill>
-                <a:latin typeface="IBM Plex Sans" pitchFamily="34" charset="0"/>
-                <a:ea typeface="IBM Plex Sans" pitchFamily="34" charset="-122"/>
-                <a:cs typeface="IBM Plex Sans" pitchFamily="34" charset="-120"/>
+                <a:latin typeface="Verdana" pitchFamily="34" charset="0"/>
+                <a:ea typeface="Verdana" pitchFamily="34" charset="-122"/>
+                <a:cs typeface="Verdana" pitchFamily="34" charset="-120"/>
               </a:rPr>
               <a:t>1 file</a:t>
             </a:r>
@@ -2211,9 +2447,9 @@
                 <a:solidFill>
                   <a:srgbClr val="4A5568"/>
                 </a:solidFill>
-                <a:latin typeface="IBM Plex Sans" pitchFamily="34" charset="0"/>
-                <a:ea typeface="IBM Plex Sans" pitchFamily="34" charset="-122"/>
-                <a:cs typeface="IBM Plex Sans" pitchFamily="34" charset="-120"/>
+                <a:latin typeface="Verdana" pitchFamily="34" charset="0"/>
+                <a:ea typeface="Verdana" pitchFamily="34" charset="-122"/>
+                <a:cs typeface="Verdana" pitchFamily="34" charset="-120"/>
               </a:rPr>
               <a:t>A step in a workflow. Nothing to host or keep running.</a:t>
             </a:r>
@@ -2282,9 +2518,9 @@
                 <a:solidFill>
                   <a:srgbClr val="1F7A6C"/>
                 </a:solidFill>
-                <a:latin typeface="IBM Plex Sans" pitchFamily="34" charset="0"/>
-                <a:ea typeface="IBM Plex Sans" pitchFamily="34" charset="-122"/>
-                <a:cs typeface="IBM Plex Sans" pitchFamily="34" charset="-120"/>
+                <a:latin typeface="Verdana" pitchFamily="34" charset="0"/>
+                <a:ea typeface="Verdana" pitchFamily="34" charset="-122"/>
+                <a:cs typeface="Verdana" pitchFamily="34" charset="-120"/>
               </a:rPr>
               <a:t>&lt; 1 s</a:t>
             </a:r>
@@ -2326,9 +2562,9 @@
                 <a:solidFill>
                   <a:srgbClr val="4A5568"/>
                 </a:solidFill>
-                <a:latin typeface="IBM Plex Sans" pitchFamily="34" charset="0"/>
-                <a:ea typeface="IBM Plex Sans" pitchFamily="34" charset="-122"/>
-                <a:cs typeface="IBM Plex Sans" pitchFamily="34" charset="-120"/>
+                <a:latin typeface="Verdana" pitchFamily="34" charset="0"/>
+                <a:ea typeface="Verdana" pitchFamily="34" charset="-122"/>
+                <a:cs typeface="Verdana" pitchFamily="34" charset="-120"/>
               </a:rPr>
               <a:t>Added to a build, on a 72-package environment, offline.</a:t>
             </a:r>
@@ -2397,9 +2633,9 @@
                 <a:solidFill>
                   <a:srgbClr val="1F7A6C"/>
                 </a:solidFill>
-                <a:latin typeface="IBM Plex Sans" pitchFamily="34" charset="0"/>
-                <a:ea typeface="IBM Plex Sans" pitchFamily="34" charset="-122"/>
-                <a:cs typeface="IBM Plex Sans" pitchFamily="34" charset="-120"/>
+                <a:latin typeface="Verdana" pitchFamily="34" charset="0"/>
+                <a:ea typeface="Verdana" pitchFamily="34" charset="-122"/>
+                <a:cs typeface="Verdana" pitchFamily="34" charset="-120"/>
               </a:rPr>
               <a:t>$0</a:t>
             </a:r>
@@ -2441,9 +2677,9 @@
                 <a:solidFill>
                   <a:srgbClr val="4A5568"/>
                 </a:solidFill>
-                <a:latin typeface="IBM Plex Sans" pitchFamily="34" charset="0"/>
-                <a:ea typeface="IBM Plex Sans" pitchFamily="34" charset="-122"/>
-                <a:cs typeface="IBM Plex Sans" pitchFamily="34" charset="-120"/>
+                <a:latin typeface="Verdana" pitchFamily="34" charset="0"/>
+                <a:ea typeface="Verdana" pitchFamily="34" charset="-122"/>
+                <a:cs typeface="Verdana" pitchFamily="34" charset="-120"/>
               </a:rPr>
               <a:t>Apache-2.0. No seats, no tiers, nothing to renew.</a:t>
             </a:r>
@@ -2460,7 +2696,7 @@
         <p:spPr>
           <a:xfrm>
             <a:off x="812800" y="3633440"/>
-            <a:ext cx="10595610" cy="309860"/>
+            <a:ext cx="10595610" cy="594320"/>
           </a:xfrm>
           <a:prstGeom prst="rect">
             <a:avLst/>
@@ -2485,9 +2721,9 @@
                 <a:solidFill>
                   <a:srgbClr val="10212B"/>
                 </a:solidFill>
-                <a:latin typeface="IBM Plex Sans" pitchFamily="34" charset="0"/>
-                <a:ea typeface="IBM Plex Sans" pitchFamily="34" charset="-122"/>
-                <a:cs typeface="IBM Plex Sans" pitchFamily="34" charset="-120"/>
+                <a:latin typeface="Verdana" pitchFamily="34" charset="0"/>
+                <a:ea typeface="Verdana" pitchFamily="34" charset="-122"/>
+                <a:cs typeface="Verdana" pitchFamily="34" charset="-120"/>
               </a:rPr>
               <a:t>The real cost is somebody reading the output now and then, and that's work we're already being asked to do.</a:t>
             </a:r>
@@ -2504,7 +2740,7 @@
         <p:spPr>
           <a:xfrm>
             <a:off x="812800" y="6238280"/>
-            <a:ext cx="6881679" cy="238720"/>
+            <a:ext cx="9097030" cy="238720"/>
           </a:xfrm>
           <a:prstGeom prst="rect">
             <a:avLst/>
@@ -2529,9 +2765,9 @@
                 <a:solidFill>
                   <a:srgbClr val="6A7179"/>
                 </a:solidFill>
-                <a:latin typeface="IBM Plex Sans" pitchFamily="34" charset="0"/>
-                <a:ea typeface="IBM Plex Sans" pitchFamily="34" charset="-122"/>
-                <a:cs typeface="IBM Plex Sans" pitchFamily="34" charset="-120"/>
+                <a:latin typeface="Verdana" pitchFamily="34" charset="0"/>
+                <a:ea typeface="Verdana" pitchFamily="34" charset="-122"/>
+                <a:cs typeface="Verdana" pitchFamily="34" charset="-120"/>
               </a:rPr>
               <a:t>Timings from the project's published benchmarks, measured on all five platforms at every release.</a:t>
             </a:r>
@@ -2575,7 +2811,9 @@
         <p:nvSpPr>
           <p:cNvPr id="2" name="Text 0"/>
           <p:cNvSpPr/>
-          <p:nvPr/>
+          <p:nvPr>
+            <p:ph type="title"/>
+          </p:nvPr>
         </p:nvSpPr>
         <p:spPr>
           <a:xfrm>
@@ -2601,13 +2839,13 @@
               <a:buNone/>
             </a:pPr>
             <a:r>
-              <a:rPr lang="en-US" sz="3600" b="1" dirty="0">
+              <a:rPr lang="en-US" sz="3600" b="1" i="0" dirty="0">
                 <a:solidFill>
                   <a:srgbClr val="10212B"/>
                 </a:solidFill>
-                <a:latin typeface="IBM Plex Sans" pitchFamily="34" charset="0"/>
-                <a:ea typeface="IBM Plex Sans" pitchFamily="34" charset="-122"/>
-                <a:cs typeface="IBM Plex Sans" pitchFamily="34" charset="-120"/>
+                <a:latin typeface="Verdana" pitchFamily="34" charset="0"/>
+                <a:ea typeface="Verdana" pitchFamily="34" charset="-122"/>
+                <a:cs typeface="Verdana" pitchFamily="34" charset="-120"/>
               </a:rPr>
               <a:t>Where the project is</a:t>
             </a:r>
@@ -2625,13 +2863,13 @@
         </p:nvPicPr>
         <p:blipFill>
           <a:blip r:embed="rId1"/>
-          <a:srcRect l="-25" r="-25" t="0" b="0"/>
+          <a:srcRect l="-781" r="-781" t="0" b="0"/>
           <a:stretch/>
         </p:blipFill>
         <p:spPr>
           <a:xfrm>
             <a:off x="812800" y="1595090"/>
-            <a:ext cx="196949" cy="254000"/>
+            <a:ext cx="161230" cy="254000"/>
           </a:xfrm>
           <a:prstGeom prst="rect">
             <a:avLst/>
@@ -2646,8 +2884,8 @@
         </p:nvSpPr>
         <p:spPr>
           <a:xfrm>
-            <a:off x="1124049" y="1595090"/>
-            <a:ext cx="5016461" cy="573980"/>
+            <a:off x="1088330" y="1595090"/>
+            <a:ext cx="5053252" cy="573980"/>
           </a:xfrm>
           <a:prstGeom prst="rect">
             <a:avLst/>
@@ -2672,11 +2910,11 @@
                 <a:solidFill>
                   <a:srgbClr val="10212B"/>
                 </a:solidFill>
-                <a:latin typeface="IBM Plex Sans" pitchFamily="34" charset="0"/>
-                <a:ea typeface="IBM Plex Sans" pitchFamily="34" charset="-122"/>
-                <a:cs typeface="IBM Plex Sans" pitchFamily="34" charset="-120"/>
+                <a:latin typeface="Verdana" pitchFamily="34" charset="0"/>
+                <a:ea typeface="Verdana" pitchFamily="34" charset="-122"/>
+                <a:cs typeface="Verdana" pitchFamily="34" charset="-120"/>
               </a:rPr>
-              <a:t>Version 0.10.1, with a changelog and release builds for five platforms</a:t>
+              <a:t>Version 1.8.1, with a changelog and signed release builds for five platforms</a:t>
             </a:r>
             <a:endParaRPr lang="en-US" sz="1600" dirty="0"/>
           </a:p>
@@ -2692,13 +2930,13 @@
         </p:nvPicPr>
         <p:blipFill>
           <a:blip r:embed="rId2"/>
-          <a:srcRect l="-46" r="-46" t="0" b="0"/>
+          <a:srcRect l="0" r="0" t="-95" b="-95"/>
           <a:stretch/>
         </p:blipFill>
         <p:spPr>
           <a:xfrm>
             <a:off x="812800" y="2283371"/>
-            <a:ext cx="216098" cy="254000"/>
+            <a:ext cx="209153" cy="254000"/>
           </a:xfrm>
           <a:prstGeom prst="rect">
             <a:avLst/>
@@ -2713,8 +2951,8 @@
         </p:nvSpPr>
         <p:spPr>
           <a:xfrm>
-            <a:off x="1143198" y="2283371"/>
-            <a:ext cx="4996738" cy="573980"/>
+            <a:off x="1136253" y="2283371"/>
+            <a:ext cx="5003891" cy="573980"/>
           </a:xfrm>
           <a:prstGeom prst="rect">
             <a:avLst/>
@@ -2739,9 +2977,9 @@
                 <a:solidFill>
                   <a:srgbClr val="10212B"/>
                 </a:solidFill>
-                <a:latin typeface="IBM Plex Sans" pitchFamily="34" charset="0"/>
-                <a:ea typeface="IBM Plex Sans" pitchFamily="34" charset="-122"/>
-                <a:cs typeface="IBM Plex Sans" pitchFamily="34" charset="-120"/>
+                <a:latin typeface="Verdana" pitchFamily="34" charset="0"/>
+                <a:ea typeface="Verdana" pitchFamily="34" charset="-122"/>
+                <a:cs typeface="Verdana" pitchFamily="34" charset="-120"/>
               </a:rPr>
               <a:t>Installs the way our other tools do: </a:t>
             </a:r>
@@ -2750,11 +2988,55 @@
                 <a:solidFill>
                   <a:srgbClr val="1F7A6C"/>
                 </a:solidFill>
-                <a:latin typeface="IBM Plex Sans" pitchFamily="34" charset="0"/>
-                <a:ea typeface="IBM Plex Sans" pitchFamily="34" charset="-122"/>
-                <a:cs typeface="IBM Plex Sans" pitchFamily="34" charset="-120"/>
+                <a:latin typeface="Verdana" pitchFamily="34" charset="0"/>
+                <a:ea typeface="Verdana" pitchFamily="34" charset="-122"/>
+                <a:cs typeface="Verdana" pitchFamily="34" charset="-120"/>
               </a:rPr>
-              <a:t>pixi global install pixi-sbom</a:t>
+              <a:t>pixi global</a:t>
+            </a:r>
+            <a:r>
+              <a:rPr lang="en-US" sz="1600" dirty="0">
+                <a:solidFill>
+                  <a:srgbClr val="10212B"/>
+                </a:solidFill>
+                <a:latin typeface="Verdana" pitchFamily="34" charset="0"/>
+                <a:ea typeface="Verdana" pitchFamily="34" charset="-122"/>
+                <a:cs typeface="Verdana" pitchFamily="34" charset="-120"/>
+              </a:rPr>
+              <a:t>, </a:t>
+            </a:r>
+            <a:r>
+              <a:rPr lang="en-US" sz="1600" dirty="0">
+                <a:solidFill>
+                  <a:srgbClr val="1F7A6C"/>
+                </a:solidFill>
+                <a:latin typeface="Verdana" pitchFamily="34" charset="0"/>
+                <a:ea typeface="Verdana" pitchFamily="34" charset="-122"/>
+                <a:cs typeface="Verdana" pitchFamily="34" charset="-120"/>
+              </a:rPr>
+              <a:t>pip</a:t>
+            </a:r>
+            <a:r>
+              <a:rPr lang="en-US" sz="1600" dirty="0">
+                <a:solidFill>
+                  <a:srgbClr val="10212B"/>
+                </a:solidFill>
+                <a:latin typeface="Verdana" pitchFamily="34" charset="0"/>
+                <a:ea typeface="Verdana" pitchFamily="34" charset="-122"/>
+                <a:cs typeface="Verdana" pitchFamily="34" charset="-120"/>
+              </a:rPr>
+              <a:t> or </a:t>
+            </a:r>
+            <a:r>
+              <a:rPr lang="en-US" sz="1600" dirty="0">
+                <a:solidFill>
+                  <a:srgbClr val="1F7A6C"/>
+                </a:solidFill>
+                <a:latin typeface="Verdana" pitchFamily="34" charset="0"/>
+                <a:ea typeface="Verdana" pitchFamily="34" charset="-122"/>
+                <a:cs typeface="Verdana" pitchFamily="34" charset="-120"/>
+              </a:rPr>
+              <a:t>uvx</a:t>
             </a:r>
             <a:endParaRPr lang="en-US" sz="1600" dirty="0"/>
           </a:p>
@@ -2770,13 +3052,13 @@
         </p:nvPicPr>
         <p:blipFill>
           <a:blip r:embed="rId3"/>
-          <a:srcRect l="-188" r="-188" t="0" b="0"/>
+          <a:srcRect l="-1172" r="-1172" t="0" b="0"/>
           <a:stretch/>
         </p:blipFill>
         <p:spPr>
           <a:xfrm>
             <a:off x="812800" y="2971651"/>
-            <a:ext cx="159345" cy="254000"/>
+            <a:ext cx="123478" cy="254000"/>
           </a:xfrm>
           <a:prstGeom prst="rect">
             <a:avLst/>
@@ -2791,8 +3073,8 @@
         </p:nvSpPr>
         <p:spPr>
           <a:xfrm>
-            <a:off x="1086445" y="2971651"/>
-            <a:ext cx="5055193" cy="573980"/>
+            <a:off x="1050578" y="2971651"/>
+            <a:ext cx="5092137" cy="848271"/>
           </a:xfrm>
           <a:prstGeom prst="rect">
             <a:avLst/>
@@ -2817,11 +3099,11 @@
                 <a:solidFill>
                   <a:srgbClr val="10212B"/>
                 </a:solidFill>
-                <a:latin typeface="IBM Plex Sans" pitchFamily="34" charset="0"/>
-                <a:ea typeface="IBM Plex Sans" pitchFamily="34" charset="-122"/>
-                <a:cs typeface="IBM Plex Sans" pitchFamily="34" charset="-120"/>
+                <a:latin typeface="Verdana" pitchFamily="34" charset="0"/>
+                <a:ea typeface="Verdana" pitchFamily="34" charset="-122"/>
+                <a:cs typeface="Verdana" pitchFamily="34" charset="-120"/>
               </a:rPr>
-              <a:t>A docs site, a troubleshooting guide, and a diagnostic mode for locked-down networks</a:t>
+              <a:t>A docs site with a field manual and a training lab, and a diagnostic mode for locked-down networks</a:t>
             </a:r>
             <a:endParaRPr lang="en-US" sz="1600" dirty="0"/>
           </a:p>
@@ -2837,13 +3119,13 @@
         </p:nvPicPr>
         <p:blipFill>
           <a:blip r:embed="rId4"/>
-          <a:srcRect l="0" r="0" t="-489" b="-489"/>
+          <a:srcRect l="0" r="0" t="-196" b="-196"/>
           <a:stretch/>
         </p:blipFill>
         <p:spPr>
           <a:xfrm>
             <a:off x="6197600" y="1595090"/>
-            <a:ext cx="157212" cy="254000"/>
+            <a:ext cx="139154" cy="254000"/>
           </a:xfrm>
           <a:prstGeom prst="rect">
             <a:avLst/>
@@ -2858,8 +3140,8 @@
         </p:nvSpPr>
         <p:spPr>
           <a:xfrm>
-            <a:off x="6469112" y="1595090"/>
-            <a:ext cx="5057391" cy="573980"/>
+            <a:off x="6451054" y="1595090"/>
+            <a:ext cx="5075990" cy="573980"/>
           </a:xfrm>
           <a:prstGeom prst="rect">
             <a:avLst/>
@@ -2884,9 +3166,9 @@
                 <a:solidFill>
                   <a:srgbClr val="10212B"/>
                 </a:solidFill>
-                <a:latin typeface="IBM Plex Sans" pitchFamily="34" charset="0"/>
-                <a:ea typeface="IBM Plex Sans" pitchFamily="34" charset="-122"/>
-                <a:cs typeface="IBM Plex Sans" pitchFamily="34" charset="-120"/>
+                <a:latin typeface="Verdana" pitchFamily="34" charset="0"/>
+                <a:ea typeface="Verdana" pitchFamily="34" charset="-122"/>
+                <a:cs typeface="Verdana" pitchFamily="34" charset="-120"/>
               </a:rPr>
               <a:t>Speed and memory measured on all five platforms at every release, numbers published</a:t>
             </a:r>
@@ -2904,13 +3186,13 @@
         </p:nvPicPr>
         <p:blipFill>
           <a:blip r:embed="rId5"/>
-          <a:srcRect l="0" r="0" t="-30" b="-30"/>
+          <a:srcRect l="0" r="0" t="-741" b="-741"/>
           <a:stretch/>
         </p:blipFill>
         <p:spPr>
           <a:xfrm>
             <a:off x="6197600" y="2283371"/>
-            <a:ext cx="165001" cy="254000"/>
+            <a:ext cx="143917" cy="254000"/>
           </a:xfrm>
           <a:prstGeom prst="rect">
             <a:avLst/>
@@ -2925,8 +3207,8 @@
         </p:nvSpPr>
         <p:spPr>
           <a:xfrm>
-            <a:off x="6476901" y="2283371"/>
-            <a:ext cx="5049368" cy="573980"/>
+            <a:off x="6455817" y="2283371"/>
+            <a:ext cx="5071085" cy="573980"/>
           </a:xfrm>
           <a:prstGeom prst="rect">
             <a:avLst/>
@@ -2951,11 +3233,11 @@
                 <a:solidFill>
                   <a:srgbClr val="10212B"/>
                 </a:solidFill>
-                <a:latin typeface="IBM Plex Sans" pitchFamily="34" charset="0"/>
-                <a:ea typeface="IBM Plex Sans" pitchFamily="34" charset="-122"/>
-                <a:cs typeface="IBM Plex Sans" pitchFamily="34" charset="-120"/>
+                <a:latin typeface="Verdana" pitchFamily="34" charset="0"/>
+                <a:ea typeface="Verdana" pitchFamily="34" charset="-122"/>
+                <a:cs typeface="Verdana" pitchFamily="34" charset="-120"/>
               </a:rPr>
-              <a:t>At 1.0 the flags, exit codes and output fields come under a written stability promise</a:t>
+              <a:t>Since 1.0 the flags, exit codes and output fields are under a written stability promise</a:t>
             </a:r>
             <a:endParaRPr lang="en-US" sz="1600" dirty="0"/>
           </a:p>
@@ -2971,13 +3253,13 @@
         </p:nvPicPr>
         <p:blipFill>
           <a:blip r:embed="rId6"/>
-          <a:srcRect l="0" r="0" t="-434" b="-434"/>
+          <a:srcRect l="0" r="0" t="-254" b="-254"/>
           <a:stretch/>
         </p:blipFill>
         <p:spPr>
           <a:xfrm>
             <a:off x="6197600" y="2971651"/>
-            <a:ext cx="245517" cy="254000"/>
+            <a:ext cx="214809" cy="254000"/>
           </a:xfrm>
           <a:prstGeom prst="rect">
             <a:avLst/>
@@ -2992,8 +3274,8 @@
         </p:nvSpPr>
         <p:spPr>
           <a:xfrm>
-            <a:off x="6557417" y="2971651"/>
-            <a:ext cx="4966437" cy="573980"/>
+            <a:off x="6526709" y="2971651"/>
+            <a:ext cx="4998066" cy="573980"/>
           </a:xfrm>
           <a:prstGeom prst="rect">
             <a:avLst/>
@@ -3018,9 +3300,9 @@
                 <a:solidFill>
                   <a:srgbClr val="10212B"/>
                 </a:solidFill>
-                <a:latin typeface="IBM Plex Sans" pitchFamily="34" charset="0"/>
-                <a:ea typeface="IBM Plex Sans" pitchFamily="34" charset="-122"/>
-                <a:cs typeface="IBM Plex Sans" pitchFamily="34" charset="-120"/>
+                <a:latin typeface="Verdana" pitchFamily="34" charset="0"/>
+                <a:ea typeface="Verdana" pitchFamily="34" charset="-122"/>
+                <a:cs typeface="Verdana" pitchFamily="34" charset="-120"/>
               </a:rPr>
               <a:t>Apache-2.0, so we can read it, fork it, or fix it ourselves</a:t>
             </a:r>
@@ -3068,7 +3350,7 @@
         </p:nvSpPr>
         <p:spPr>
           <a:xfrm>
-            <a:off x="812800" y="2303810"/>
+            <a:off x="812800" y="2126010"/>
             <a:ext cx="10883392" cy="238720"/>
           </a:xfrm>
           <a:prstGeom prst="rect">
@@ -3094,9 +3376,9 @@
                 <a:solidFill>
                   <a:srgbClr val="CDEDE5"/>
                 </a:solidFill>
-                <a:latin typeface="JetBrains Mono" pitchFamily="34" charset="0"/>
-                <a:ea typeface="JetBrains Mono" pitchFamily="34" charset="-122"/>
-                <a:cs typeface="JetBrains Mono" pitchFamily="34" charset="-120"/>
+                <a:latin typeface="Courier New" pitchFamily="49" charset="0"/>
+                <a:ea typeface="Courier New" pitchFamily="49" charset="-122"/>
+                <a:cs typeface="Courier New" pitchFamily="49" charset="-120"/>
               </a:rPr>
               <a:t>WHAT HAPPENS NEXT</a:t>
             </a:r>
@@ -3108,12 +3390,14 @@
         <p:nvSpPr>
           <p:cNvPr id="3" name="Text 1"/>
           <p:cNvSpPr/>
-          <p:nvPr/>
-        </p:nvSpPr>
-        <p:spPr>
-          <a:xfrm>
-            <a:off x="812800" y="2771130"/>
-            <a:ext cx="10203180" cy="640060"/>
+          <p:nvPr>
+            <p:ph type="title"/>
+          </p:nvPr>
+        </p:nvSpPr>
+        <p:spPr>
+          <a:xfrm>
+            <a:off x="812800" y="2593330"/>
+            <a:ext cx="11379200" cy="640060"/>
           </a:xfrm>
           <a:prstGeom prst="rect">
             <a:avLst/>
@@ -3134,13 +3418,13 @@
               <a:buNone/>
             </a:pPr>
             <a:r>
-              <a:rPr lang="en-US" sz="4400" b="1" dirty="0">
+              <a:rPr lang="en-US" sz="4400" b="1" i="0" dirty="0">
                 <a:solidFill>
                   <a:srgbClr val="F7F8F6"/>
                 </a:solidFill>
-                <a:latin typeface="IBM Plex Sans" pitchFamily="34" charset="0"/>
-                <a:ea typeface="IBM Plex Sans" pitchFamily="34" charset="-122"/>
-                <a:cs typeface="IBM Plex Sans" pitchFamily="34" charset="-120"/>
+                <a:latin typeface="Verdana" pitchFamily="34" charset="0"/>
+                <a:ea typeface="Verdana" pitchFamily="34" charset="-122"/>
+                <a:cs typeface="Verdana" pitchFamily="34" charset="-120"/>
               </a:rPr>
               <a:t>One repo. One job. Two weeks.</a:t>
             </a:r>
@@ -3156,8 +3440,8 @@
         </p:nvSpPr>
         <p:spPr>
           <a:xfrm>
-            <a:off x="812800" y="3639790"/>
-            <a:ext cx="9941560" cy="736600"/>
+            <a:off x="812800" y="3461990"/>
+            <a:ext cx="9941560" cy="1092200"/>
           </a:xfrm>
           <a:prstGeom prst="rect">
             <a:avLst/>
@@ -3182,9 +3466,9 @@
                 <a:solidFill>
                   <a:srgbClr val="E4F4F0"/>
                 </a:solidFill>
-                <a:latin typeface="IBM Plex Sans" pitchFamily="34" charset="0"/>
-                <a:ea typeface="IBM Plex Sans" pitchFamily="34" charset="-122"/>
-                <a:cs typeface="IBM Plex Sans" pitchFamily="34" charset="-120"/>
+                <a:latin typeface="Verdana" pitchFamily="34" charset="0"/>
+                <a:ea typeface="Verdana" pitchFamily="34" charset="-122"/>
+                <a:cs typeface="Verdana" pitchFamily="34" charset="-120"/>
               </a:rPr>
               <a:t>I'll come back with the documents it produced, what the gates would have caught if they'd been switched on, and whether I think it's worth doing anywhere else.</a:t>
             </a:r>
@@ -3201,7 +3485,7 @@
         <p:spPr>
           <a:xfrm>
             <a:off x="812800" y="6238280"/>
-            <a:ext cx="1913658" cy="238720"/>
+            <a:ext cx="2487990" cy="238720"/>
           </a:xfrm>
           <a:prstGeom prst="rect">
             <a:avLst/>
@@ -3226,9 +3510,9 @@
                 <a:solidFill>
                   <a:srgbClr val="CDEDE5"/>
                 </a:solidFill>
-                <a:latin typeface="IBM Plex Sans" pitchFamily="34" charset="0"/>
-                <a:ea typeface="IBM Plex Sans" pitchFamily="34" charset="-122"/>
-                <a:cs typeface="IBM Plex Sans" pitchFamily="34" charset="-120"/>
+                <a:latin typeface="Verdana" pitchFamily="34" charset="0"/>
+                <a:ea typeface="Verdana" pitchFamily="34" charset="-122"/>
+                <a:cs typeface="Verdana" pitchFamily="34" charset="-120"/>
               </a:rPr>
               <a:t>millsks.github.io/pixi-sbom</a:t>
             </a:r>
@@ -3272,7 +3556,9 @@
         <p:nvSpPr>
           <p:cNvPr id="2" name="Text 0"/>
           <p:cNvSpPr/>
-          <p:nvPr/>
+          <p:nvPr>
+            <p:ph type="title"/>
+          </p:nvPr>
         </p:nvSpPr>
         <p:spPr>
           <a:xfrm>
@@ -3298,13 +3584,13 @@
               <a:buNone/>
             </a:pPr>
             <a:r>
-              <a:rPr lang="en-US" sz="3600" b="1" dirty="0">
+              <a:rPr lang="en-US" sz="3600" b="1" i="0" dirty="0">
                 <a:solidFill>
                   <a:srgbClr val="10212B"/>
                 </a:solidFill>
-                <a:latin typeface="IBM Plex Sans" pitchFamily="34" charset="0"/>
-                <a:ea typeface="IBM Plex Sans" pitchFamily="34" charset="-122"/>
-                <a:cs typeface="IBM Plex Sans" pitchFamily="34" charset="-120"/>
+                <a:latin typeface="Verdana" pitchFamily="34" charset="0"/>
+                <a:ea typeface="Verdana" pitchFamily="34" charset="-122"/>
+                <a:cs typeface="Verdana" pitchFamily="34" charset="-120"/>
               </a:rPr>
               <a:t>What I'm asking for</a:t>
             </a:r>
@@ -3346,9 +3632,9 @@
                 <a:solidFill>
                   <a:srgbClr val="10212B"/>
                 </a:solidFill>
-                <a:latin typeface="IBM Plex Sans" pitchFamily="34" charset="0"/>
-                <a:ea typeface="IBM Plex Sans" pitchFamily="34" charset="-122"/>
-                <a:cs typeface="IBM Plex Sans" pitchFamily="34" charset="-120"/>
+                <a:latin typeface="Verdana" pitchFamily="34" charset="0"/>
+                <a:ea typeface="Verdana" pitchFamily="34" charset="-122"/>
+                <a:cs typeface="Verdana" pitchFamily="34" charset="-120"/>
               </a:rPr>
               <a:t>Let me add one job to one repo's CI. Two weeks later I'll show you what came out of it, and we decide from there.</a:t>
             </a:r>
@@ -3417,9 +3703,9 @@
                 <a:solidFill>
                   <a:srgbClr val="1F7A6C"/>
                 </a:solidFill>
-                <a:latin typeface="IBM Plex Sans" pitchFamily="34" charset="0"/>
-                <a:ea typeface="IBM Plex Sans" pitchFamily="34" charset="-122"/>
-                <a:cs typeface="IBM Plex Sans" pitchFamily="34" charset="-120"/>
+                <a:latin typeface="Verdana" pitchFamily="34" charset="0"/>
+                <a:ea typeface="Verdana" pitchFamily="34" charset="-122"/>
+                <a:cs typeface="Verdana" pitchFamily="34" charset="-120"/>
               </a:rPr>
               <a:t>Effort</a:t>
             </a:r>
@@ -3436,7 +3722,7 @@
         <p:spPr>
           <a:xfrm>
             <a:off x="1073150" y="3389511"/>
-            <a:ext cx="2951912" cy="573980"/>
+            <a:ext cx="2951912" cy="848271"/>
           </a:xfrm>
           <a:prstGeom prst="rect">
             <a:avLst/>
@@ -3461,9 +3747,9 @@
                 <a:solidFill>
                   <a:srgbClr val="4A5568"/>
                 </a:solidFill>
-                <a:latin typeface="IBM Plex Sans" pitchFamily="34" charset="0"/>
-                <a:ea typeface="IBM Plex Sans" pitchFamily="34" charset="-122"/>
-                <a:cs typeface="IBM Plex Sans" pitchFamily="34" charset="-120"/>
+                <a:latin typeface="Verdana" pitchFamily="34" charset="0"/>
+                <a:ea typeface="Verdana" pitchFamily="34" charset="-122"/>
+                <a:cs typeface="Verdana" pitchFamily="34" charset="-120"/>
               </a:rPr>
               <a:t>One workflow file. Nothing to host and nothing to operate.</a:t>
             </a:r>
@@ -3532,9 +3818,9 @@
                 <a:solidFill>
                   <a:srgbClr val="1F7A6C"/>
                 </a:solidFill>
-                <a:latin typeface="IBM Plex Sans" pitchFamily="34" charset="0"/>
-                <a:ea typeface="IBM Plex Sans" pitchFamily="34" charset="-122"/>
-                <a:cs typeface="IBM Plex Sans" pitchFamily="34" charset="-120"/>
+                <a:latin typeface="Verdana" pitchFamily="34" charset="0"/>
+                <a:ea typeface="Verdana" pitchFamily="34" charset="-122"/>
+                <a:cs typeface="Verdana" pitchFamily="34" charset="-120"/>
               </a:rPr>
               <a:t>Cost</a:t>
             </a:r>
@@ -3551,7 +3837,7 @@
         <p:spPr>
           <a:xfrm>
             <a:off x="4662984" y="3389511"/>
-            <a:ext cx="2951963" cy="573980"/>
+            <a:ext cx="2951963" cy="848271"/>
           </a:xfrm>
           <a:prstGeom prst="rect">
             <a:avLst/>
@@ -3576,9 +3862,9 @@
                 <a:solidFill>
                   <a:srgbClr val="4A5568"/>
                 </a:solidFill>
-                <a:latin typeface="IBM Plex Sans" pitchFamily="34" charset="0"/>
-                <a:ea typeface="IBM Plex Sans" pitchFamily="34" charset="-122"/>
-                <a:cs typeface="IBM Plex Sans" pitchFamily="34" charset="-120"/>
+                <a:latin typeface="Verdana" pitchFamily="34" charset="0"/>
+                <a:ea typeface="Verdana" pitchFamily="34" charset="-122"/>
+                <a:cs typeface="Verdana" pitchFamily="34" charset="-120"/>
               </a:rPr>
               <a:t>No license fee, no service, no account. It's Apache-2.0.</a:t>
             </a:r>
@@ -3647,9 +3933,9 @@
                 <a:solidFill>
                   <a:srgbClr val="1F7A6C"/>
                 </a:solidFill>
-                <a:latin typeface="IBM Plex Sans" pitchFamily="34" charset="0"/>
-                <a:ea typeface="IBM Plex Sans" pitchFamily="34" charset="-122"/>
-                <a:cs typeface="IBM Plex Sans" pitchFamily="34" charset="-120"/>
+                <a:latin typeface="Verdana" pitchFamily="34" charset="0"/>
+                <a:ea typeface="Verdana" pitchFamily="34" charset="-122"/>
+                <a:cs typeface="Verdana" pitchFamily="34" charset="-120"/>
               </a:rPr>
               <a:t>Risk</a:t>
             </a:r>
@@ -3691,9 +3977,9 @@
                 <a:solidFill>
                   <a:srgbClr val="4A5568"/>
                 </a:solidFill>
-                <a:latin typeface="IBM Plex Sans" pitchFamily="34" charset="0"/>
-                <a:ea typeface="IBM Plex Sans" pitchFamily="34" charset="-122"/>
-                <a:cs typeface="IBM Plex Sans" pitchFamily="34" charset="-120"/>
+                <a:latin typeface="Verdana" pitchFamily="34" charset="0"/>
+                <a:ea typeface="Verdana" pitchFamily="34" charset="-122"/>
+                <a:cs typeface="Verdana" pitchFamily="34" charset="-120"/>
               </a:rPr>
               <a:t>It reads the lockfile and writes a file. It can't break a build unless we ask it to.</a:t>
             </a:r>
@@ -3737,7 +4023,9 @@
         <p:nvSpPr>
           <p:cNvPr id="2" name="Text 0"/>
           <p:cNvSpPr/>
-          <p:nvPr/>
+          <p:nvPr>
+            <p:ph type="title"/>
+          </p:nvPr>
         </p:nvSpPr>
         <p:spPr>
           <a:xfrm>
@@ -3763,13 +4051,13 @@
               <a:buNone/>
             </a:pPr>
             <a:r>
-              <a:rPr lang="en-US" sz="3600" b="1" dirty="0">
+              <a:rPr lang="en-US" sz="3600" b="1" i="0" dirty="0">
                 <a:solidFill>
                   <a:srgbClr val="10212B"/>
                 </a:solidFill>
-                <a:latin typeface="IBM Plex Sans" pitchFamily="34" charset="0"/>
-                <a:ea typeface="IBM Plex Sans" pitchFamily="34" charset="-122"/>
-                <a:cs typeface="IBM Plex Sans" pitchFamily="34" charset="-120"/>
+                <a:latin typeface="Verdana" pitchFamily="34" charset="0"/>
+                <a:ea typeface="Verdana" pitchFamily="34" charset="-122"/>
+                <a:cs typeface="Verdana" pitchFamily="34" charset="-120"/>
               </a:rPr>
               <a:t>What a software bill of materials is</a:t>
             </a:r>
@@ -3811,9 +4099,9 @@
                 <a:solidFill>
                   <a:srgbClr val="4A5568"/>
                 </a:solidFill>
-                <a:latin typeface="IBM Plex Sans" pitchFamily="34" charset="0"/>
-                <a:ea typeface="IBM Plex Sans" pitchFamily="34" charset="-122"/>
-                <a:cs typeface="IBM Plex Sans" pitchFamily="34" charset="-120"/>
+                <a:latin typeface="Verdana" pitchFamily="34" charset="0"/>
+                <a:ea typeface="Verdana" pitchFamily="34" charset="-122"/>
+                <a:cs typeface="Verdana" pitchFamily="34" charset="-120"/>
               </a:rPr>
               <a:t>A machine-readable list of everything in a build: names, versions, licenses, who supplied each piece, and what depends on what. The ingredients label for software.</a:t>
             </a:r>
@@ -3830,11 +4118,11 @@
         <p:spPr>
           <a:xfrm>
             <a:off x="815975" y="2568525"/>
-            <a:ext cx="2851150" cy="1469330"/>
+            <a:ext cx="2851150" cy="1700461"/>
           </a:xfrm>
           <a:prstGeom prst="roundRect">
             <a:avLst>
-              <a:gd name="adj" fmla="val 6699"/>
+              <a:gd name="adj" fmla="val 5788"/>
             </a:avLst>
           </a:prstGeom>
           <a:solidFill>
@@ -3882,11 +4170,11 @@
                 <a:solidFill>
                   <a:srgbClr val="10212B"/>
                 </a:solidFill>
-                <a:latin typeface="JetBrains Mono" pitchFamily="34" charset="0"/>
-                <a:ea typeface="JetBrains Mono" pitchFamily="34" charset="-122"/>
-                <a:cs typeface="JetBrains Mono" pitchFamily="34" charset="-120"/>
+                <a:latin typeface="Courier New" pitchFamily="49" charset="0"/>
+                <a:ea typeface="Courier New" pitchFamily="49" charset="-122"/>
+                <a:cs typeface="Courier New" pitchFamily="49" charset="-120"/>
               </a:rPr>
-              <a:t>pixi.lock</a:t>
+              <a:t>The lockfile</a:t>
             </a:r>
             <a:endParaRPr lang="en-US" sz="1400" dirty="0"/>
           </a:p>
@@ -3901,7 +4189,7 @@
         <p:spPr>
           <a:xfrm>
             <a:off x="1047750" y="3112691"/>
-            <a:ext cx="2459228" cy="718790"/>
+            <a:ext cx="2459228" cy="949920"/>
           </a:xfrm>
           <a:prstGeom prst="rect">
             <a:avLst/>
@@ -3926,11 +4214,11 @@
                 <a:solidFill>
                   <a:srgbClr val="4A5568"/>
                 </a:solidFill>
-                <a:latin typeface="IBM Plex Sans" pitchFamily="34" charset="0"/>
-                <a:ea typeface="IBM Plex Sans" pitchFamily="34" charset="-122"/>
-                <a:cs typeface="IBM Plex Sans" pitchFamily="34" charset="-120"/>
+                <a:latin typeface="Verdana" pitchFamily="34" charset="0"/>
+                <a:ea typeface="Verdana" pitchFamily="34" charset="-122"/>
+                <a:cs typeface="Verdana" pitchFamily="34" charset="-120"/>
               </a:rPr>
-              <a:t>What the resolver already picked: exact versions, hashes, channels</a:t>
+              <a:t>pixi, uv, Poetry and the rest: the exact versions and hashes the resolver already picked</a:t>
             </a:r>
             <a:endParaRPr lang="en-US" sz="1400" dirty="0"/>
           </a:p>
@@ -3951,7 +4239,7 @@
         </p:blipFill>
         <p:spPr>
           <a:xfrm>
-            <a:off x="3822700" y="3125391"/>
+            <a:off x="3822700" y="3240931"/>
             <a:ext cx="698500" cy="355600"/>
           </a:xfrm>
           <a:prstGeom prst="rect">
@@ -3967,7 +4255,7 @@
         </p:nvSpPr>
         <p:spPr>
           <a:xfrm>
-            <a:off x="4673600" y="2571700"/>
+            <a:off x="4673600" y="2687241"/>
             <a:ext cx="2844800" cy="1462980"/>
           </a:xfrm>
           <a:prstGeom prst="roundRect">
@@ -3989,7 +4277,7 @@
         </p:nvSpPr>
         <p:spPr>
           <a:xfrm>
-            <a:off x="4902200" y="2800300"/>
+            <a:off x="4902200" y="2915841"/>
             <a:ext cx="2459228" cy="274290"/>
           </a:xfrm>
           <a:prstGeom prst="rect">
@@ -4015,9 +4303,9 @@
                 <a:solidFill>
                   <a:srgbClr val="6FBFAE"/>
                 </a:solidFill>
-                <a:latin typeface="JetBrains Mono" pitchFamily="34" charset="0"/>
-                <a:ea typeface="JetBrains Mono" pitchFamily="34" charset="-122"/>
-                <a:cs typeface="JetBrains Mono" pitchFamily="34" charset="-120"/>
+                <a:latin typeface="Courier New" pitchFamily="49" charset="0"/>
+                <a:ea typeface="Courier New" pitchFamily="49" charset="-122"/>
+                <a:cs typeface="Courier New" pitchFamily="49" charset="-120"/>
               </a:rPr>
               <a:t>pixi-sbom</a:t>
             </a:r>
@@ -4033,7 +4321,7 @@
         </p:nvSpPr>
         <p:spPr>
           <a:xfrm>
-            <a:off x="4902200" y="3112691"/>
+            <a:off x="4902200" y="3228231"/>
             <a:ext cx="2459228" cy="718790"/>
           </a:xfrm>
           <a:prstGeom prst="rect">
@@ -4059,9 +4347,9 @@
                 <a:solidFill>
                   <a:srgbClr val="B5C4CA"/>
                 </a:solidFill>
-                <a:latin typeface="IBM Plex Sans" pitchFamily="34" charset="0"/>
-                <a:ea typeface="IBM Plex Sans" pitchFamily="34" charset="-122"/>
-                <a:cs typeface="IBM Plex Sans" pitchFamily="34" charset="-120"/>
+                <a:latin typeface="Verdana" pitchFamily="34" charset="0"/>
+                <a:ea typeface="Verdana" pitchFamily="34" charset="-122"/>
+                <a:cs typeface="Verdana" pitchFamily="34" charset="-120"/>
               </a:rPr>
               <a:t>Reads it, fills in licenses and identity, looks up known vulnerabilities</a:t>
             </a:r>
@@ -4084,7 +4372,7 @@
         </p:blipFill>
         <p:spPr>
           <a:xfrm>
-            <a:off x="7670800" y="3125391"/>
+            <a:off x="7670800" y="3240931"/>
             <a:ext cx="698500" cy="355600"/>
           </a:xfrm>
           <a:prstGeom prst="rect">
@@ -4100,7 +4388,7 @@
         </p:nvSpPr>
         <p:spPr>
           <a:xfrm>
-            <a:off x="8524875" y="2568525"/>
+            <a:off x="8524875" y="2684066"/>
             <a:ext cx="2851150" cy="1469330"/>
           </a:xfrm>
           <a:prstGeom prst="roundRect">
@@ -4127,7 +4415,7 @@
         </p:nvSpPr>
         <p:spPr>
           <a:xfrm>
-            <a:off x="8756650" y="2800300"/>
+            <a:off x="8756650" y="2915841"/>
             <a:ext cx="2459228" cy="274290"/>
           </a:xfrm>
           <a:prstGeom prst="rect">
@@ -4153,9 +4441,9 @@
                 <a:solidFill>
                   <a:srgbClr val="10212B"/>
                 </a:solidFill>
-                <a:latin typeface="JetBrains Mono" pitchFamily="34" charset="0"/>
-                <a:ea typeface="JetBrains Mono" pitchFamily="34" charset="-122"/>
-                <a:cs typeface="JetBrains Mono" pitchFamily="34" charset="-120"/>
+                <a:latin typeface="Courier New" pitchFamily="49" charset="0"/>
+                <a:ea typeface="Courier New" pitchFamily="49" charset="-122"/>
+                <a:cs typeface="Courier New" pitchFamily="49" charset="-120"/>
               </a:rPr>
               <a:t>CycloneDX / SPDX</a:t>
             </a:r>
@@ -4171,7 +4459,7 @@
         </p:nvSpPr>
         <p:spPr>
           <a:xfrm>
-            <a:off x="8756650" y="3112691"/>
+            <a:off x="8756650" y="3228231"/>
             <a:ext cx="2459228" cy="718790"/>
           </a:xfrm>
           <a:prstGeom prst="rect">
@@ -4197,9 +4485,9 @@
                 <a:solidFill>
                   <a:srgbClr val="4A5568"/>
                 </a:solidFill>
-                <a:latin typeface="IBM Plex Sans" pitchFamily="34" charset="0"/>
-                <a:ea typeface="IBM Plex Sans" pitchFamily="34" charset="-122"/>
-                <a:cs typeface="IBM Plex Sans" pitchFamily="34" charset="-120"/>
+                <a:latin typeface="Verdana" pitchFamily="34" charset="0"/>
+                <a:ea typeface="Verdana" pitchFamily="34" charset="-122"/>
+                <a:cs typeface="Verdana" pitchFamily="34" charset="-120"/>
               </a:rPr>
               <a:t>The two standard formats auditors, customers and scanners already read</a:t>
             </a:r>
@@ -4243,12 +4531,14 @@
         <p:nvSpPr>
           <p:cNvPr id="2" name="Text 0"/>
           <p:cNvSpPr/>
-          <p:nvPr/>
+          <p:nvPr>
+            <p:ph type="title"/>
+          </p:nvPr>
         </p:nvSpPr>
         <p:spPr>
           <a:xfrm>
             <a:off x="812800" y="812800"/>
-            <a:ext cx="10883392" cy="528290"/>
+            <a:ext cx="10883392" cy="507603"/>
           </a:xfrm>
           <a:prstGeom prst="rect">
             <a:avLst/>
@@ -4264,62 +4554,1767 @@
           <a:p>
             <a:pPr algn="l" indent="0" marL="0">
               <a:lnSpc>
-                <a:spcPts val="3960"/>
+                <a:spcPts val="3824"/>
               </a:lnSpc>
               <a:buNone/>
             </a:pPr>
             <a:r>
-              <a:rPr lang="en-US" sz="3600" b="1" dirty="0">
+              <a:rPr lang="en-US" sz="3476" b="1" i="0" dirty="0">
                 <a:solidFill>
                   <a:srgbClr val="10212B"/>
                 </a:solidFill>
-                <a:latin typeface="IBM Plex Sans" pitchFamily="34" charset="0"/>
-                <a:ea typeface="IBM Plex Sans" pitchFamily="34" charset="-122"/>
-                <a:cs typeface="IBM Plex Sans" pitchFamily="34" charset="-120"/>
+                <a:latin typeface="Verdana" pitchFamily="34" charset="0"/>
+                <a:ea typeface="Verdana" pitchFamily="34" charset="-122"/>
+                <a:cs typeface="Verdana" pitchFamily="34" charset="-120"/>
               </a:rPr>
               <a:t>Why we're being asked for this now</a:t>
             </a:r>
-            <a:endParaRPr lang="en-US" sz="3600" dirty="0"/>
-          </a:p>
-        </p:txBody>
-      </p:sp>
-      <p:sp>
-        <p:nvSpPr>
-          <p:cNvPr id="3" name="Shape 1"/>
-          <p:cNvSpPr/>
-          <p:nvPr/>
-        </p:nvSpPr>
-        <p:spPr>
-          <a:xfrm>
-            <a:off x="815975" y="1623665"/>
-            <a:ext cx="3380284" cy="2208461"/>
-          </a:xfrm>
-          <a:prstGeom prst="roundRect">
-            <a:avLst>
-              <a:gd name="adj" fmla="val 4457"/>
-            </a:avLst>
-          </a:prstGeom>
-          <a:solidFill>
-            <a:srgbClr val="FFFFFF"/>
-          </a:solidFill>
-          <a:ln w="6350">
-            <a:solidFill>
-              <a:srgbClr val="DFE3DE"/>
-            </a:solidFill>
-            <a:prstDash val="solid"/>
-          </a:ln>
-        </p:spPr>
-      </p:sp>
-      <p:sp>
-        <p:nvSpPr>
-          <p:cNvPr id="4" name="Text 2"/>
-          <p:cNvSpPr/>
-          <p:nvPr/>
-        </p:nvSpPr>
-        <p:spPr>
-          <a:xfrm>
-            <a:off x="1073150" y="1880840"/>
-            <a:ext cx="2951912" cy="238720"/>
+            <a:endParaRPr lang="en-US" sz="3476" dirty="0"/>
+          </a:p>
+        </p:txBody>
+      </p:sp>
+      <p:graphicFrame>
+        <p:nvGraphicFramePr>
+          <p:cNvPr id="3" name="Table 0"/>
+          <p:cNvGraphicFramePr>
+            <a:graphicFrameLocks noGrp="1"/>
+          </p:cNvGraphicFramePr>
+          <p:nvPr>
+            <p:extLst>
+              <p:ext uri="{D42A27DB-BD31-4B8C-83A1-F6EECF244321}">
+                <p14:modId xmlns:p14="http://schemas.microsoft.com/office/powerpoint/2010/main" val="1579011935"/>
+              </p:ext>
+            </p:extLst>
+          </p:nvPr>
+        </p:nvGraphicFramePr>
+        <p:xfrm>
+          <a:off x="825500" y="1536303"/>
+          <a:ext cx="10553700" cy="3565575"/>
+        </p:xfrm>
+        <a:graphic>
+          <a:graphicData uri="http://schemas.openxmlformats.org/drawingml/2006/table">
+            <a:tbl>
+              <a:tblPr/>
+              <a:tblGrid>
+                <a:gridCol w="2638425"/>
+                <a:gridCol w="2532888"/>
+                <a:gridCol w="3693795"/>
+                <a:gridCol w="1688592"/>
+              </a:tblGrid>
+              <a:tr h="392361">
+                <a:tc>
+                  <a:txBody>
+                    <a:bodyPr/>
+                    <a:lstStyle/>
+                    <a:p>
+                      <a:pPr indent="0" marL="0">
+                        <a:lnSpc>
+                          <a:spcPts val="1712"/>
+                        </a:lnSpc>
+                        <a:buNone/>
+                      </a:pPr>
+                      <a:r>
+                        <a:rPr lang="en-US" sz="1223" b="1" dirty="0">
+                          <a:solidFill>
+                            <a:srgbClr val="C2571A"/>
+                          </a:solidFill>
+                          <a:latin typeface="Verdana" pitchFamily="34" charset="0"/>
+                          <a:ea typeface="Verdana" pitchFamily="34" charset="-122"/>
+                          <a:cs typeface="Verdana" pitchFamily="34" charset="-120"/>
+                        </a:rPr>
+                        <a:t>Rule</a:t>
+                      </a:r>
+                      <a:endParaRPr lang="en-US" sz="1223" dirty="0">
+                        <a:latin typeface="Verdana" charset="0"/>
+                        <a:ea typeface="Verdana" charset="0"/>
+                        <a:cs typeface="Verdana" charset="0"/>
+                      </a:endParaRPr>
+                    </a:p>
+                  </a:txBody>
+                  <a:tcPr marL="127000" marR="127000" marT="88900" marB="88900" anchor="t">
+                    <a:lnL w="12700" cap="flat" cmpd="sng" algn="ctr">
+                      <a:solidFill>
+                        <a:srgbClr val="C5C6C4"/>
+                      </a:solidFill>
+                      <a:prstDash val="solid"/>
+                      <a:round/>
+                      <a:headEnd type="none" w="med" len="med"/>
+                      <a:tailEnd type="none" w="med" len="med"/>
+                    </a:lnL>
+                    <a:lnR w="12700" cap="flat" cmpd="sng" algn="ctr">
+                      <a:solidFill>
+                        <a:srgbClr val="B7B8B6"/>
+                      </a:solidFill>
+                      <a:prstDash val="solid"/>
+                      <a:round/>
+                      <a:headEnd type="none" w="med" len="med"/>
+                      <a:tailEnd type="none" w="med" len="med"/>
+                    </a:lnR>
+                    <a:lnT w="12700" cap="flat" cmpd="sng" algn="ctr">
+                      <a:solidFill>
+                        <a:srgbClr val="C5C6C4"/>
+                      </a:solidFill>
+                      <a:prstDash val="solid"/>
+                      <a:round/>
+                      <a:headEnd type="none" w="med" len="med"/>
+                      <a:tailEnd type="none" w="med" len="med"/>
+                    </a:lnT>
+                    <a:lnB w="12700" cap="flat" cmpd="sng" algn="ctr">
+                      <a:solidFill>
+                        <a:srgbClr val="B7B8B6"/>
+                      </a:solidFill>
+                      <a:prstDash val="solid"/>
+                      <a:round/>
+                      <a:headEnd type="none" w="med" len="med"/>
+                      <a:tailEnd type="none" w="med" len="med"/>
+                    </a:lnB>
+                    <a:solidFill>
+                      <a:srgbClr val="E5E6E4"/>
+                    </a:solidFill>
+                  </a:tcPr>
+                </a:tc>
+                <a:tc>
+                  <a:txBody>
+                    <a:bodyPr/>
+                    <a:lstStyle/>
+                    <a:p>
+                      <a:pPr indent="0" marL="0">
+                        <a:lnSpc>
+                          <a:spcPts val="1712"/>
+                        </a:lnSpc>
+                        <a:buNone/>
+                      </a:pPr>
+                      <a:r>
+                        <a:rPr lang="en-US" sz="1223" b="1" dirty="0">
+                          <a:solidFill>
+                            <a:srgbClr val="C2571A"/>
+                          </a:solidFill>
+                          <a:latin typeface="Verdana" pitchFamily="34" charset="0"/>
+                          <a:ea typeface="Verdana" pitchFamily="34" charset="-122"/>
+                          <a:cs typeface="Verdana" pitchFamily="34" charset="-120"/>
+                        </a:rPr>
+                        <a:t>Who it covers</a:t>
+                      </a:r>
+                      <a:endParaRPr lang="en-US" sz="1223" dirty="0">
+                        <a:latin typeface="Verdana" charset="0"/>
+                        <a:ea typeface="Verdana" charset="0"/>
+                        <a:cs typeface="Verdana" charset="0"/>
+                      </a:endParaRPr>
+                    </a:p>
+                  </a:txBody>
+                  <a:tcPr marL="127000" marR="127000" marT="88900" marB="88900" anchor="t">
+                    <a:lnL w="12700" cap="flat" cmpd="sng" algn="ctr">
+                      <a:solidFill>
+                        <a:srgbClr val="B7B8B6"/>
+                      </a:solidFill>
+                      <a:prstDash val="solid"/>
+                      <a:round/>
+                      <a:headEnd type="none" w="med" len="med"/>
+                      <a:tailEnd type="none" w="med" len="med"/>
+                    </a:lnL>
+                    <a:lnR w="12700" cap="flat" cmpd="sng" algn="ctr">
+                      <a:solidFill>
+                        <a:srgbClr val="B7B8B6"/>
+                      </a:solidFill>
+                      <a:prstDash val="solid"/>
+                      <a:round/>
+                      <a:headEnd type="none" w="med" len="med"/>
+                      <a:tailEnd type="none" w="med" len="med"/>
+                    </a:lnR>
+                    <a:lnT w="12700" cap="flat" cmpd="sng" algn="ctr">
+                      <a:solidFill>
+                        <a:srgbClr val="C5C6C4"/>
+                      </a:solidFill>
+                      <a:prstDash val="solid"/>
+                      <a:round/>
+                      <a:headEnd type="none" w="med" len="med"/>
+                      <a:tailEnd type="none" w="med" len="med"/>
+                    </a:lnT>
+                    <a:lnB w="12700" cap="flat" cmpd="sng" algn="ctr">
+                      <a:solidFill>
+                        <a:srgbClr val="B7B8B6"/>
+                      </a:solidFill>
+                      <a:prstDash val="solid"/>
+                      <a:round/>
+                      <a:headEnd type="none" w="med" len="med"/>
+                      <a:tailEnd type="none" w="med" len="med"/>
+                    </a:lnB>
+                    <a:solidFill>
+                      <a:srgbClr val="E5E6E4"/>
+                    </a:solidFill>
+                  </a:tcPr>
+                </a:tc>
+                <a:tc>
+                  <a:txBody>
+                    <a:bodyPr/>
+                    <a:lstStyle/>
+                    <a:p>
+                      <a:pPr indent="0" marL="0">
+                        <a:lnSpc>
+                          <a:spcPts val="1712"/>
+                        </a:lnSpc>
+                        <a:buNone/>
+                      </a:pPr>
+                      <a:r>
+                        <a:rPr lang="en-US" sz="1223" b="1" dirty="0">
+                          <a:solidFill>
+                            <a:srgbClr val="C2571A"/>
+                          </a:solidFill>
+                          <a:latin typeface="Verdana" pitchFamily="34" charset="0"/>
+                          <a:ea typeface="Verdana" pitchFamily="34" charset="-122"/>
+                          <a:cs typeface="Verdana" pitchFamily="34" charset="-120"/>
+                        </a:rPr>
+                        <a:t>What it asks for</a:t>
+                      </a:r>
+                      <a:endParaRPr lang="en-US" sz="1223" dirty="0">
+                        <a:latin typeface="Verdana" charset="0"/>
+                        <a:ea typeface="Verdana" charset="0"/>
+                        <a:cs typeface="Verdana" charset="0"/>
+                      </a:endParaRPr>
+                    </a:p>
+                  </a:txBody>
+                  <a:tcPr marL="127000" marR="127000" marT="88900" marB="88900" anchor="t">
+                    <a:lnL w="12700" cap="flat" cmpd="sng" algn="ctr">
+                      <a:solidFill>
+                        <a:srgbClr val="B7B8B6"/>
+                      </a:solidFill>
+                      <a:prstDash val="solid"/>
+                      <a:round/>
+                      <a:headEnd type="none" w="med" len="med"/>
+                      <a:tailEnd type="none" w="med" len="med"/>
+                    </a:lnL>
+                    <a:lnR w="12700" cap="flat" cmpd="sng" algn="ctr">
+                      <a:solidFill>
+                        <a:srgbClr val="B7B8B6"/>
+                      </a:solidFill>
+                      <a:prstDash val="solid"/>
+                      <a:round/>
+                      <a:headEnd type="none" w="med" len="med"/>
+                      <a:tailEnd type="none" w="med" len="med"/>
+                    </a:lnR>
+                    <a:lnT w="12700" cap="flat" cmpd="sng" algn="ctr">
+                      <a:solidFill>
+                        <a:srgbClr val="C5C6C4"/>
+                      </a:solidFill>
+                      <a:prstDash val="solid"/>
+                      <a:round/>
+                      <a:headEnd type="none" w="med" len="med"/>
+                      <a:tailEnd type="none" w="med" len="med"/>
+                    </a:lnT>
+                    <a:lnB w="12700" cap="flat" cmpd="sng" algn="ctr">
+                      <a:solidFill>
+                        <a:srgbClr val="B7B8B6"/>
+                      </a:solidFill>
+                      <a:prstDash val="solid"/>
+                      <a:round/>
+                      <a:headEnd type="none" w="med" len="med"/>
+                      <a:tailEnd type="none" w="med" len="med"/>
+                    </a:lnB>
+                    <a:solidFill>
+                      <a:srgbClr val="E5E6E4"/>
+                    </a:solidFill>
+                  </a:tcPr>
+                </a:tc>
+                <a:tc>
+                  <a:txBody>
+                    <a:bodyPr/>
+                    <a:lstStyle/>
+                    <a:p>
+                      <a:pPr indent="0" marL="0">
+                        <a:lnSpc>
+                          <a:spcPts val="1712"/>
+                        </a:lnSpc>
+                        <a:buNone/>
+                      </a:pPr>
+                      <a:r>
+                        <a:rPr lang="en-US" sz="1223" b="1" dirty="0">
+                          <a:solidFill>
+                            <a:srgbClr val="C2571A"/>
+                          </a:solidFill>
+                          <a:latin typeface="Verdana" pitchFamily="34" charset="0"/>
+                          <a:ea typeface="Verdana" pitchFamily="34" charset="-122"/>
+                          <a:cs typeface="Verdana" pitchFamily="34" charset="-120"/>
+                        </a:rPr>
+                        <a:t>Since</a:t>
+                      </a:r>
+                      <a:endParaRPr lang="en-US" sz="1223" dirty="0">
+                        <a:latin typeface="Verdana" charset="0"/>
+                        <a:ea typeface="Verdana" charset="0"/>
+                        <a:cs typeface="Verdana" charset="0"/>
+                      </a:endParaRPr>
+                    </a:p>
+                  </a:txBody>
+                  <a:tcPr marL="127000" marR="127000" marT="88900" marB="88900" anchor="t">
+                    <a:lnL w="12700" cap="flat" cmpd="sng" algn="ctr">
+                      <a:solidFill>
+                        <a:srgbClr val="B7B8B6"/>
+                      </a:solidFill>
+                      <a:prstDash val="solid"/>
+                      <a:round/>
+                      <a:headEnd type="none" w="med" len="med"/>
+                      <a:tailEnd type="none" w="med" len="med"/>
+                    </a:lnL>
+                    <a:lnR w="12700" cap="flat" cmpd="sng" algn="ctr">
+                      <a:solidFill>
+                        <a:srgbClr val="B7B8B6"/>
+                      </a:solidFill>
+                      <a:prstDash val="solid"/>
+                      <a:round/>
+                      <a:headEnd type="none" w="med" len="med"/>
+                      <a:tailEnd type="none" w="med" len="med"/>
+                    </a:lnR>
+                    <a:lnT w="12700" cap="flat" cmpd="sng" algn="ctr">
+                      <a:solidFill>
+                        <a:srgbClr val="C5C6C4"/>
+                      </a:solidFill>
+                      <a:prstDash val="solid"/>
+                      <a:round/>
+                      <a:headEnd type="none" w="med" len="med"/>
+                      <a:tailEnd type="none" w="med" len="med"/>
+                    </a:lnT>
+                    <a:lnB w="12700" cap="flat" cmpd="sng" algn="ctr">
+                      <a:solidFill>
+                        <a:srgbClr val="B7B8B6"/>
+                      </a:solidFill>
+                      <a:prstDash val="solid"/>
+                      <a:round/>
+                      <a:headEnd type="none" w="med" len="med"/>
+                      <a:tailEnd type="none" w="med" len="med"/>
+                    </a:lnB>
+                    <a:solidFill>
+                      <a:srgbClr val="E5E6E4"/>
+                    </a:solidFill>
+                  </a:tcPr>
+                </a:tc>
+              </a:tr>
+              <a:tr h="594271">
+                <a:tc>
+                  <a:txBody>
+                    <a:bodyPr/>
+                    <a:lstStyle/>
+                    <a:p>
+                      <a:pPr indent="0" marL="0">
+                        <a:lnSpc>
+                          <a:spcPts val="1712"/>
+                        </a:lnSpc>
+                        <a:buNone/>
+                      </a:pPr>
+                      <a:r>
+                        <a:rPr lang="en-US" sz="1223" dirty="0">
+                          <a:solidFill>
+                            <a:srgbClr val="10212B"/>
+                          </a:solidFill>
+                          <a:latin typeface="Verdana" pitchFamily="34" charset="0"/>
+                          <a:ea typeface="Verdana" pitchFamily="34" charset="-122"/>
+                          <a:cs typeface="Verdana" pitchFamily="34" charset="-120"/>
+                        </a:rPr>
+                        <a:t>PCI DSS 4.0, Req. 6.3.2</a:t>
+                      </a:r>
+                      <a:endParaRPr lang="en-US" sz="1223" dirty="0">
+                        <a:latin typeface="Verdana" charset="0"/>
+                        <a:ea typeface="Verdana" charset="0"/>
+                        <a:cs typeface="Verdana" charset="0"/>
+                      </a:endParaRPr>
+                    </a:p>
+                  </a:txBody>
+                  <a:tcPr marL="127000" marR="127000" marT="88900" marB="88900" anchor="t">
+                    <a:lnL w="12700" cap="flat" cmpd="sng" algn="ctr">
+                      <a:solidFill>
+                        <a:srgbClr val="C5C6C4"/>
+                      </a:solidFill>
+                      <a:prstDash val="solid"/>
+                      <a:round/>
+                      <a:headEnd type="none" w="med" len="med"/>
+                      <a:tailEnd type="none" w="med" len="med"/>
+                    </a:lnL>
+                    <a:lnR w="12700" cap="flat" cmpd="sng" algn="ctr">
+                      <a:solidFill>
+                        <a:srgbClr val="C5C6C4"/>
+                      </a:solidFill>
+                      <a:prstDash val="solid"/>
+                      <a:round/>
+                      <a:headEnd type="none" w="med" len="med"/>
+                      <a:tailEnd type="none" w="med" len="med"/>
+                    </a:lnR>
+                    <a:lnT w="12700" cap="flat" cmpd="sng" algn="ctr">
+                      <a:solidFill>
+                        <a:srgbClr val="B7B8B6"/>
+                      </a:solidFill>
+                      <a:prstDash val="solid"/>
+                      <a:round/>
+                      <a:headEnd type="none" w="med" len="med"/>
+                      <a:tailEnd type="none" w="med" len="med"/>
+                    </a:lnT>
+                    <a:lnB w="12700" cap="flat" cmpd="sng" algn="ctr">
+                      <a:solidFill>
+                        <a:srgbClr val="C5C6C4"/>
+                      </a:solidFill>
+                      <a:prstDash val="solid"/>
+                      <a:round/>
+                      <a:headEnd type="none" w="med" len="med"/>
+                      <a:tailEnd type="none" w="med" len="med"/>
+                    </a:lnB>
+                  </a:tcPr>
+                </a:tc>
+                <a:tc>
+                  <a:txBody>
+                    <a:bodyPr/>
+                    <a:lstStyle/>
+                    <a:p>
+                      <a:pPr indent="0" marL="0">
+                        <a:lnSpc>
+                          <a:spcPts val="1712"/>
+                        </a:lnSpc>
+                        <a:buNone/>
+                      </a:pPr>
+                      <a:r>
+                        <a:rPr lang="en-US" sz="1223" dirty="0">
+                          <a:solidFill>
+                            <a:srgbClr val="4A5568"/>
+                          </a:solidFill>
+                          <a:latin typeface="Verdana" pitchFamily="34" charset="0"/>
+                          <a:ea typeface="Verdana" pitchFamily="34" charset="-122"/>
+                          <a:cs typeface="Verdana" pitchFamily="34" charset="-120"/>
+                        </a:rPr>
+                        <a:t>Banks and anyone else handling card data</a:t>
+                      </a:r>
+                      <a:endParaRPr lang="en-US" sz="1223" dirty="0">
+                        <a:latin typeface="Verdana" charset="0"/>
+                        <a:ea typeface="Verdana" charset="0"/>
+                        <a:cs typeface="Verdana" charset="0"/>
+                      </a:endParaRPr>
+                    </a:p>
+                  </a:txBody>
+                  <a:tcPr marL="127000" marR="127000" marT="88900" marB="88900" anchor="t">
+                    <a:lnL w="12700" cap="flat" cmpd="sng" algn="ctr">
+                      <a:solidFill>
+                        <a:srgbClr val="C5C6C4"/>
+                      </a:solidFill>
+                      <a:prstDash val="solid"/>
+                      <a:round/>
+                      <a:headEnd type="none" w="med" len="med"/>
+                      <a:tailEnd type="none" w="med" len="med"/>
+                    </a:lnL>
+                    <a:lnR w="12700" cap="flat" cmpd="sng" algn="ctr">
+                      <a:solidFill>
+                        <a:srgbClr val="C5C6C4"/>
+                      </a:solidFill>
+                      <a:prstDash val="solid"/>
+                      <a:round/>
+                      <a:headEnd type="none" w="med" len="med"/>
+                      <a:tailEnd type="none" w="med" len="med"/>
+                    </a:lnR>
+                    <a:lnT w="12700" cap="flat" cmpd="sng" algn="ctr">
+                      <a:solidFill>
+                        <a:srgbClr val="B7B8B6"/>
+                      </a:solidFill>
+                      <a:prstDash val="solid"/>
+                      <a:round/>
+                      <a:headEnd type="none" w="med" len="med"/>
+                      <a:tailEnd type="none" w="med" len="med"/>
+                    </a:lnT>
+                    <a:lnB w="12700" cap="flat" cmpd="sng" algn="ctr">
+                      <a:solidFill>
+                        <a:srgbClr val="C5C6C4"/>
+                      </a:solidFill>
+                      <a:prstDash val="solid"/>
+                      <a:round/>
+                      <a:headEnd type="none" w="med" len="med"/>
+                      <a:tailEnd type="none" w="med" len="med"/>
+                    </a:lnB>
+                  </a:tcPr>
+                </a:tc>
+                <a:tc>
+                  <a:txBody>
+                    <a:bodyPr/>
+                    <a:lstStyle/>
+                    <a:p>
+                      <a:pPr indent="0" marL="0">
+                        <a:lnSpc>
+                          <a:spcPts val="1712"/>
+                        </a:lnSpc>
+                        <a:buNone/>
+                      </a:pPr>
+                      <a:r>
+                        <a:rPr lang="en-US" sz="1223" dirty="0">
+                          <a:solidFill>
+                            <a:srgbClr val="4A5568"/>
+                          </a:solidFill>
+                          <a:latin typeface="Verdana" pitchFamily="34" charset="0"/>
+                          <a:ea typeface="Verdana" pitchFamily="34" charset="-122"/>
+                          <a:cs typeface="Verdana" pitchFamily="34" charset="-120"/>
+                        </a:rPr>
+                        <a:t>An inventory of our own software and the third-party components in it</a:t>
+                      </a:r>
+                      <a:endParaRPr lang="en-US" sz="1223" dirty="0">
+                        <a:latin typeface="Verdana" charset="0"/>
+                        <a:ea typeface="Verdana" charset="0"/>
+                        <a:cs typeface="Verdana" charset="0"/>
+                      </a:endParaRPr>
+                    </a:p>
+                  </a:txBody>
+                  <a:tcPr marL="127000" marR="127000" marT="88900" marB="88900" anchor="t">
+                    <a:lnL w="12700" cap="flat" cmpd="sng" algn="ctr">
+                      <a:solidFill>
+                        <a:srgbClr val="C5C6C4"/>
+                      </a:solidFill>
+                      <a:prstDash val="solid"/>
+                      <a:round/>
+                      <a:headEnd type="none" w="med" len="med"/>
+                      <a:tailEnd type="none" w="med" len="med"/>
+                    </a:lnL>
+                    <a:lnR w="12700" cap="flat" cmpd="sng" algn="ctr">
+                      <a:solidFill>
+                        <a:srgbClr val="C5C6C4"/>
+                      </a:solidFill>
+                      <a:prstDash val="solid"/>
+                      <a:round/>
+                      <a:headEnd type="none" w="med" len="med"/>
+                      <a:tailEnd type="none" w="med" len="med"/>
+                    </a:lnR>
+                    <a:lnT w="12700" cap="flat" cmpd="sng" algn="ctr">
+                      <a:solidFill>
+                        <a:srgbClr val="B7B8B6"/>
+                      </a:solidFill>
+                      <a:prstDash val="solid"/>
+                      <a:round/>
+                      <a:headEnd type="none" w="med" len="med"/>
+                      <a:tailEnd type="none" w="med" len="med"/>
+                    </a:lnT>
+                    <a:lnB w="12700" cap="flat" cmpd="sng" algn="ctr">
+                      <a:solidFill>
+                        <a:srgbClr val="C5C6C4"/>
+                      </a:solidFill>
+                      <a:prstDash val="solid"/>
+                      <a:round/>
+                      <a:headEnd type="none" w="med" len="med"/>
+                      <a:tailEnd type="none" w="med" len="med"/>
+                    </a:lnB>
+                  </a:tcPr>
+                </a:tc>
+                <a:tc>
+                  <a:txBody>
+                    <a:bodyPr/>
+                    <a:lstStyle/>
+                    <a:p>
+                      <a:pPr indent="0" marL="0">
+                        <a:lnSpc>
+                          <a:spcPts val="1712"/>
+                        </a:lnSpc>
+                        <a:buNone/>
+                      </a:pPr>
+                      <a:r>
+                        <a:rPr lang="en-US" sz="1223" dirty="0">
+                          <a:solidFill>
+                            <a:srgbClr val="10212B"/>
+                          </a:solidFill>
+                          <a:latin typeface="Verdana" pitchFamily="34" charset="0"/>
+                          <a:ea typeface="Verdana" pitchFamily="34" charset="-122"/>
+                          <a:cs typeface="Verdana" pitchFamily="34" charset="-120"/>
+                        </a:rPr>
+                        <a:t>31 Mar 2025</a:t>
+                      </a:r>
+                      <a:endParaRPr lang="en-US" sz="1223" dirty="0">
+                        <a:latin typeface="Verdana" charset="0"/>
+                        <a:ea typeface="Verdana" charset="0"/>
+                        <a:cs typeface="Verdana" charset="0"/>
+                      </a:endParaRPr>
+                    </a:p>
+                  </a:txBody>
+                  <a:tcPr marL="127000" marR="127000" marT="88900" marB="88900" anchor="t">
+                    <a:lnL w="12700" cap="flat" cmpd="sng" algn="ctr">
+                      <a:solidFill>
+                        <a:srgbClr val="C5C6C4"/>
+                      </a:solidFill>
+                      <a:prstDash val="solid"/>
+                      <a:round/>
+                      <a:headEnd type="none" w="med" len="med"/>
+                      <a:tailEnd type="none" w="med" len="med"/>
+                    </a:lnL>
+                    <a:lnR w="12700" cap="flat" cmpd="sng" algn="ctr">
+                      <a:solidFill>
+                        <a:srgbClr val="C5C6C4"/>
+                      </a:solidFill>
+                      <a:prstDash val="solid"/>
+                      <a:round/>
+                      <a:headEnd type="none" w="med" len="med"/>
+                      <a:tailEnd type="none" w="med" len="med"/>
+                    </a:lnR>
+                    <a:lnT w="12700" cap="flat" cmpd="sng" algn="ctr">
+                      <a:solidFill>
+                        <a:srgbClr val="B7B8B6"/>
+                      </a:solidFill>
+                      <a:prstDash val="solid"/>
+                      <a:round/>
+                      <a:headEnd type="none" w="med" len="med"/>
+                      <a:tailEnd type="none" w="med" len="med"/>
+                    </a:lnT>
+                    <a:lnB w="12700" cap="flat" cmpd="sng" algn="ctr">
+                      <a:solidFill>
+                        <a:srgbClr val="C5C6C4"/>
+                      </a:solidFill>
+                      <a:prstDash val="solid"/>
+                      <a:round/>
+                      <a:headEnd type="none" w="med" len="med"/>
+                      <a:tailEnd type="none" w="med" len="med"/>
+                    </a:lnB>
+                  </a:tcPr>
+                </a:tc>
+              </a:tr>
+              <a:tr h="796131">
+                <a:tc>
+                  <a:txBody>
+                    <a:bodyPr/>
+                    <a:lstStyle/>
+                    <a:p>
+                      <a:pPr indent="0" marL="0">
+                        <a:lnSpc>
+                          <a:spcPts val="1712"/>
+                        </a:lnSpc>
+                        <a:buNone/>
+                      </a:pPr>
+                      <a:r>
+                        <a:rPr lang="en-US" sz="1223" dirty="0">
+                          <a:solidFill>
+                            <a:srgbClr val="10212B"/>
+                          </a:solidFill>
+                          <a:latin typeface="Verdana" pitchFamily="34" charset="0"/>
+                          <a:ea typeface="Verdana" pitchFamily="34" charset="-122"/>
+                          <a:cs typeface="Verdana" pitchFamily="34" charset="-120"/>
+                        </a:rPr>
+                        <a:t>EU DORA, RTS 2024/1774 Art. 10</a:t>
+                      </a:r>
+                      <a:endParaRPr lang="en-US" sz="1223" dirty="0">
+                        <a:latin typeface="Verdana" charset="0"/>
+                        <a:ea typeface="Verdana" charset="0"/>
+                        <a:cs typeface="Verdana" charset="0"/>
+                      </a:endParaRPr>
+                    </a:p>
+                  </a:txBody>
+                  <a:tcPr marL="127000" marR="127000" marT="88900" marB="88900" anchor="t">
+                    <a:lnL w="12700" cap="flat" cmpd="sng" algn="ctr">
+                      <a:solidFill>
+                        <a:srgbClr val="C5C6C4"/>
+                      </a:solidFill>
+                      <a:prstDash val="solid"/>
+                      <a:round/>
+                      <a:headEnd type="none" w="med" len="med"/>
+                      <a:tailEnd type="none" w="med" len="med"/>
+                    </a:lnL>
+                    <a:lnR w="12700" cap="flat" cmpd="sng" algn="ctr">
+                      <a:solidFill>
+                        <a:srgbClr val="C5C6C4"/>
+                      </a:solidFill>
+                      <a:prstDash val="solid"/>
+                      <a:round/>
+                      <a:headEnd type="none" w="med" len="med"/>
+                      <a:tailEnd type="none" w="med" len="med"/>
+                    </a:lnR>
+                    <a:lnT w="12700" cap="flat" cmpd="sng" algn="ctr">
+                      <a:solidFill>
+                        <a:srgbClr val="C5C6C4"/>
+                      </a:solidFill>
+                      <a:prstDash val="solid"/>
+                      <a:round/>
+                      <a:headEnd type="none" w="med" len="med"/>
+                      <a:tailEnd type="none" w="med" len="med"/>
+                    </a:lnT>
+                    <a:lnB w="12700" cap="flat" cmpd="sng" algn="ctr">
+                      <a:solidFill>
+                        <a:srgbClr val="C5C6C4"/>
+                      </a:solidFill>
+                      <a:prstDash val="solid"/>
+                      <a:round/>
+                      <a:headEnd type="none" w="med" len="med"/>
+                      <a:tailEnd type="none" w="med" len="med"/>
+                    </a:lnB>
+                  </a:tcPr>
+                </a:tc>
+                <a:tc>
+                  <a:txBody>
+                    <a:bodyPr/>
+                    <a:lstStyle/>
+                    <a:p>
+                      <a:pPr indent="0" marL="0">
+                        <a:lnSpc>
+                          <a:spcPts val="1712"/>
+                        </a:lnSpc>
+                        <a:buNone/>
+                      </a:pPr>
+                      <a:r>
+                        <a:rPr lang="en-US" sz="1223" dirty="0">
+                          <a:solidFill>
+                            <a:srgbClr val="4A5568"/>
+                          </a:solidFill>
+                          <a:latin typeface="Verdana" pitchFamily="34" charset="0"/>
+                          <a:ea typeface="Verdana" pitchFamily="34" charset="-122"/>
+                          <a:cs typeface="Verdana" pitchFamily="34" charset="-120"/>
+                        </a:rPr>
+                        <a:t>EU banks, insurers and investment firms</a:t>
+                      </a:r>
+                      <a:endParaRPr lang="en-US" sz="1223" dirty="0">
+                        <a:latin typeface="Verdana" charset="0"/>
+                        <a:ea typeface="Verdana" charset="0"/>
+                        <a:cs typeface="Verdana" charset="0"/>
+                      </a:endParaRPr>
+                    </a:p>
+                  </a:txBody>
+                  <a:tcPr marL="127000" marR="127000" marT="88900" marB="88900" anchor="t">
+                    <a:lnL w="12700" cap="flat" cmpd="sng" algn="ctr">
+                      <a:solidFill>
+                        <a:srgbClr val="C5C6C4"/>
+                      </a:solidFill>
+                      <a:prstDash val="solid"/>
+                      <a:round/>
+                      <a:headEnd type="none" w="med" len="med"/>
+                      <a:tailEnd type="none" w="med" len="med"/>
+                    </a:lnL>
+                    <a:lnR w="12700" cap="flat" cmpd="sng" algn="ctr">
+                      <a:solidFill>
+                        <a:srgbClr val="C5C6C4"/>
+                      </a:solidFill>
+                      <a:prstDash val="solid"/>
+                      <a:round/>
+                      <a:headEnd type="none" w="med" len="med"/>
+                      <a:tailEnd type="none" w="med" len="med"/>
+                    </a:lnR>
+                    <a:lnT w="12700" cap="flat" cmpd="sng" algn="ctr">
+                      <a:solidFill>
+                        <a:srgbClr val="C5C6C4"/>
+                      </a:solidFill>
+                      <a:prstDash val="solid"/>
+                      <a:round/>
+                      <a:headEnd type="none" w="med" len="med"/>
+                      <a:tailEnd type="none" w="med" len="med"/>
+                    </a:lnT>
+                    <a:lnB w="12700" cap="flat" cmpd="sng" algn="ctr">
+                      <a:solidFill>
+                        <a:srgbClr val="C5C6C4"/>
+                      </a:solidFill>
+                      <a:prstDash val="solid"/>
+                      <a:round/>
+                      <a:headEnd type="none" w="med" len="med"/>
+                      <a:tailEnd type="none" w="med" len="med"/>
+                    </a:lnB>
+                  </a:tcPr>
+                </a:tc>
+                <a:tc>
+                  <a:txBody>
+                    <a:bodyPr/>
+                    <a:lstStyle/>
+                    <a:p>
+                      <a:pPr indent="0" marL="0">
+                        <a:lnSpc>
+                          <a:spcPts val="1712"/>
+                        </a:lnSpc>
+                        <a:buNone/>
+                      </a:pPr>
+                      <a:r>
+                        <a:rPr lang="en-US" sz="1223" dirty="0">
+                          <a:solidFill>
+                            <a:srgbClr val="4A5568"/>
+                          </a:solidFill>
+                          <a:latin typeface="Verdana" pitchFamily="34" charset="0"/>
+                          <a:ea typeface="Verdana" pitchFamily="34" charset="-122"/>
+                          <a:cs typeface="Verdana" pitchFamily="34" charset="-120"/>
+                        </a:rPr>
+                        <a:t>Track third-party libraries, open source included, in services behind critical functions</a:t>
+                      </a:r>
+                      <a:endParaRPr lang="en-US" sz="1223" dirty="0">
+                        <a:latin typeface="Verdana" charset="0"/>
+                        <a:ea typeface="Verdana" charset="0"/>
+                        <a:cs typeface="Verdana" charset="0"/>
+                      </a:endParaRPr>
+                    </a:p>
+                  </a:txBody>
+                  <a:tcPr marL="127000" marR="127000" marT="88900" marB="88900" anchor="t">
+                    <a:lnL w="12700" cap="flat" cmpd="sng" algn="ctr">
+                      <a:solidFill>
+                        <a:srgbClr val="C5C6C4"/>
+                      </a:solidFill>
+                      <a:prstDash val="solid"/>
+                      <a:round/>
+                      <a:headEnd type="none" w="med" len="med"/>
+                      <a:tailEnd type="none" w="med" len="med"/>
+                    </a:lnL>
+                    <a:lnR w="12700" cap="flat" cmpd="sng" algn="ctr">
+                      <a:solidFill>
+                        <a:srgbClr val="C5C6C4"/>
+                      </a:solidFill>
+                      <a:prstDash val="solid"/>
+                      <a:round/>
+                      <a:headEnd type="none" w="med" len="med"/>
+                      <a:tailEnd type="none" w="med" len="med"/>
+                    </a:lnR>
+                    <a:lnT w="12700" cap="flat" cmpd="sng" algn="ctr">
+                      <a:solidFill>
+                        <a:srgbClr val="C5C6C4"/>
+                      </a:solidFill>
+                      <a:prstDash val="solid"/>
+                      <a:round/>
+                      <a:headEnd type="none" w="med" len="med"/>
+                      <a:tailEnd type="none" w="med" len="med"/>
+                    </a:lnT>
+                    <a:lnB w="12700" cap="flat" cmpd="sng" algn="ctr">
+                      <a:solidFill>
+                        <a:srgbClr val="C5C6C4"/>
+                      </a:solidFill>
+                      <a:prstDash val="solid"/>
+                      <a:round/>
+                      <a:headEnd type="none" w="med" len="med"/>
+                      <a:tailEnd type="none" w="med" len="med"/>
+                    </a:lnB>
+                  </a:tcPr>
+                </a:tc>
+                <a:tc>
+                  <a:txBody>
+                    <a:bodyPr/>
+                    <a:lstStyle/>
+                    <a:p>
+                      <a:pPr indent="0" marL="0">
+                        <a:lnSpc>
+                          <a:spcPts val="1712"/>
+                        </a:lnSpc>
+                        <a:buNone/>
+                      </a:pPr>
+                      <a:r>
+                        <a:rPr lang="en-US" sz="1223" dirty="0">
+                          <a:solidFill>
+                            <a:srgbClr val="10212B"/>
+                          </a:solidFill>
+                          <a:latin typeface="Verdana" pitchFamily="34" charset="0"/>
+                          <a:ea typeface="Verdana" pitchFamily="34" charset="-122"/>
+                          <a:cs typeface="Verdana" pitchFamily="34" charset="-120"/>
+                        </a:rPr>
+                        <a:t>17 Jan 2025</a:t>
+                      </a:r>
+                      <a:endParaRPr lang="en-US" sz="1223" dirty="0">
+                        <a:latin typeface="Verdana" charset="0"/>
+                        <a:ea typeface="Verdana" charset="0"/>
+                        <a:cs typeface="Verdana" charset="0"/>
+                      </a:endParaRPr>
+                    </a:p>
+                  </a:txBody>
+                  <a:tcPr marL="127000" marR="127000" marT="88900" marB="88900" anchor="t">
+                    <a:lnL w="12700" cap="flat" cmpd="sng" algn="ctr">
+                      <a:solidFill>
+                        <a:srgbClr val="C5C6C4"/>
+                      </a:solidFill>
+                      <a:prstDash val="solid"/>
+                      <a:round/>
+                      <a:headEnd type="none" w="med" len="med"/>
+                      <a:tailEnd type="none" w="med" len="med"/>
+                    </a:lnL>
+                    <a:lnR w="12700" cap="flat" cmpd="sng" algn="ctr">
+                      <a:solidFill>
+                        <a:srgbClr val="C5C6C4"/>
+                      </a:solidFill>
+                      <a:prstDash val="solid"/>
+                      <a:round/>
+                      <a:headEnd type="none" w="med" len="med"/>
+                      <a:tailEnd type="none" w="med" len="med"/>
+                    </a:lnR>
+                    <a:lnT w="12700" cap="flat" cmpd="sng" algn="ctr">
+                      <a:solidFill>
+                        <a:srgbClr val="C5C6C4"/>
+                      </a:solidFill>
+                      <a:prstDash val="solid"/>
+                      <a:round/>
+                      <a:headEnd type="none" w="med" len="med"/>
+                      <a:tailEnd type="none" w="med" len="med"/>
+                    </a:lnT>
+                    <a:lnB w="12700" cap="flat" cmpd="sng" algn="ctr">
+                      <a:solidFill>
+                        <a:srgbClr val="C5C6C4"/>
+                      </a:solidFill>
+                      <a:prstDash val="solid"/>
+                      <a:round/>
+                      <a:headEnd type="none" w="med" len="med"/>
+                      <a:tailEnd type="none" w="med" len="med"/>
+                    </a:lnB>
+                  </a:tcPr>
+                </a:tc>
+              </a:tr>
+              <a:tr h="594271">
+                <a:tc>
+                  <a:txBody>
+                    <a:bodyPr/>
+                    <a:lstStyle/>
+                    <a:p>
+                      <a:pPr indent="0" marL="0">
+                        <a:lnSpc>
+                          <a:spcPts val="1712"/>
+                        </a:lnSpc>
+                        <a:buNone/>
+                      </a:pPr>
+                      <a:r>
+                        <a:rPr lang="en-US" sz="1223" dirty="0">
+                          <a:solidFill>
+                            <a:srgbClr val="10212B"/>
+                          </a:solidFill>
+                          <a:latin typeface="Verdana" pitchFamily="34" charset="0"/>
+                          <a:ea typeface="Verdana" pitchFamily="34" charset="-122"/>
+                          <a:cs typeface="Verdana" pitchFamily="34" charset="-120"/>
+                        </a:rPr>
+                        <a:t>EU Cyber Resilience Act</a:t>
+                      </a:r>
+                      <a:endParaRPr lang="en-US" sz="1223" dirty="0">
+                        <a:latin typeface="Verdana" charset="0"/>
+                        <a:ea typeface="Verdana" charset="0"/>
+                        <a:cs typeface="Verdana" charset="0"/>
+                      </a:endParaRPr>
+                    </a:p>
+                  </a:txBody>
+                  <a:tcPr marL="127000" marR="127000" marT="88900" marB="88900" anchor="t">
+                    <a:lnL w="12700" cap="flat" cmpd="sng" algn="ctr">
+                      <a:solidFill>
+                        <a:srgbClr val="C5C6C4"/>
+                      </a:solidFill>
+                      <a:prstDash val="solid"/>
+                      <a:round/>
+                      <a:headEnd type="none" w="med" len="med"/>
+                      <a:tailEnd type="none" w="med" len="med"/>
+                    </a:lnL>
+                    <a:lnR w="12700" cap="flat" cmpd="sng" algn="ctr">
+                      <a:solidFill>
+                        <a:srgbClr val="C5C6C4"/>
+                      </a:solidFill>
+                      <a:prstDash val="solid"/>
+                      <a:round/>
+                      <a:headEnd type="none" w="med" len="med"/>
+                      <a:tailEnd type="none" w="med" len="med"/>
+                    </a:lnR>
+                    <a:lnT w="12700" cap="flat" cmpd="sng" algn="ctr">
+                      <a:solidFill>
+                        <a:srgbClr val="C5C6C4"/>
+                      </a:solidFill>
+                      <a:prstDash val="solid"/>
+                      <a:round/>
+                      <a:headEnd type="none" w="med" len="med"/>
+                      <a:tailEnd type="none" w="med" len="med"/>
+                    </a:lnT>
+                    <a:lnB w="12700" cap="flat" cmpd="sng" algn="ctr">
+                      <a:solidFill>
+                        <a:srgbClr val="C5C6C4"/>
+                      </a:solidFill>
+                      <a:prstDash val="solid"/>
+                      <a:round/>
+                      <a:headEnd type="none" w="med" len="med"/>
+                      <a:tailEnd type="none" w="med" len="med"/>
+                    </a:lnB>
+                  </a:tcPr>
+                </a:tc>
+                <a:tc>
+                  <a:txBody>
+                    <a:bodyPr/>
+                    <a:lstStyle/>
+                    <a:p>
+                      <a:pPr indent="0" marL="0">
+                        <a:lnSpc>
+                          <a:spcPts val="1712"/>
+                        </a:lnSpc>
+                        <a:buNone/>
+                      </a:pPr>
+                      <a:r>
+                        <a:rPr lang="en-US" sz="1223" dirty="0">
+                          <a:solidFill>
+                            <a:srgbClr val="4A5568"/>
+                          </a:solidFill>
+                          <a:latin typeface="Verdana" pitchFamily="34" charset="0"/>
+                          <a:ea typeface="Verdana" pitchFamily="34" charset="-122"/>
+                          <a:cs typeface="Verdana" pitchFamily="34" charset="-120"/>
+                        </a:rPr>
+                        <a:t>Anyone selling software in the EU</a:t>
+                      </a:r>
+                      <a:endParaRPr lang="en-US" sz="1223" dirty="0">
+                        <a:latin typeface="Verdana" charset="0"/>
+                        <a:ea typeface="Verdana" charset="0"/>
+                        <a:cs typeface="Verdana" charset="0"/>
+                      </a:endParaRPr>
+                    </a:p>
+                  </a:txBody>
+                  <a:tcPr marL="127000" marR="127000" marT="88900" marB="88900" anchor="t">
+                    <a:lnL w="12700" cap="flat" cmpd="sng" algn="ctr">
+                      <a:solidFill>
+                        <a:srgbClr val="C5C6C4"/>
+                      </a:solidFill>
+                      <a:prstDash val="solid"/>
+                      <a:round/>
+                      <a:headEnd type="none" w="med" len="med"/>
+                      <a:tailEnd type="none" w="med" len="med"/>
+                    </a:lnL>
+                    <a:lnR w="12700" cap="flat" cmpd="sng" algn="ctr">
+                      <a:solidFill>
+                        <a:srgbClr val="C5C6C4"/>
+                      </a:solidFill>
+                      <a:prstDash val="solid"/>
+                      <a:round/>
+                      <a:headEnd type="none" w="med" len="med"/>
+                      <a:tailEnd type="none" w="med" len="med"/>
+                    </a:lnR>
+                    <a:lnT w="12700" cap="flat" cmpd="sng" algn="ctr">
+                      <a:solidFill>
+                        <a:srgbClr val="C5C6C4"/>
+                      </a:solidFill>
+                      <a:prstDash val="solid"/>
+                      <a:round/>
+                      <a:headEnd type="none" w="med" len="med"/>
+                      <a:tailEnd type="none" w="med" len="med"/>
+                    </a:lnT>
+                    <a:lnB w="12700" cap="flat" cmpd="sng" algn="ctr">
+                      <a:solidFill>
+                        <a:srgbClr val="C5C6C4"/>
+                      </a:solidFill>
+                      <a:prstDash val="solid"/>
+                      <a:round/>
+                      <a:headEnd type="none" w="med" len="med"/>
+                      <a:tailEnd type="none" w="med" len="med"/>
+                    </a:lnB>
+                  </a:tcPr>
+                </a:tc>
+                <a:tc>
+                  <a:txBody>
+                    <a:bodyPr/>
+                    <a:lstStyle/>
+                    <a:p>
+                      <a:pPr indent="0" marL="0">
+                        <a:lnSpc>
+                          <a:spcPts val="1712"/>
+                        </a:lnSpc>
+                        <a:buNone/>
+                      </a:pPr>
+                      <a:r>
+                        <a:rPr lang="en-US" sz="1223" dirty="0">
+                          <a:solidFill>
+                            <a:srgbClr val="4A5568"/>
+                          </a:solidFill>
+                          <a:latin typeface="Verdana" pitchFamily="34" charset="0"/>
+                          <a:ea typeface="Verdana" pitchFamily="34" charset="-122"/>
+                          <a:cs typeface="Verdana" pitchFamily="34" charset="-120"/>
+                        </a:rPr>
+                        <a:t>A machine-readable SBOM for each product</a:t>
+                      </a:r>
+                      <a:endParaRPr lang="en-US" sz="1223" dirty="0">
+                        <a:latin typeface="Verdana" charset="0"/>
+                        <a:ea typeface="Verdana" charset="0"/>
+                        <a:cs typeface="Verdana" charset="0"/>
+                      </a:endParaRPr>
+                    </a:p>
+                  </a:txBody>
+                  <a:tcPr marL="127000" marR="127000" marT="88900" marB="88900" anchor="t">
+                    <a:lnL w="12700" cap="flat" cmpd="sng" algn="ctr">
+                      <a:solidFill>
+                        <a:srgbClr val="C5C6C4"/>
+                      </a:solidFill>
+                      <a:prstDash val="solid"/>
+                      <a:round/>
+                      <a:headEnd type="none" w="med" len="med"/>
+                      <a:tailEnd type="none" w="med" len="med"/>
+                    </a:lnL>
+                    <a:lnR w="12700" cap="flat" cmpd="sng" algn="ctr">
+                      <a:solidFill>
+                        <a:srgbClr val="C5C6C4"/>
+                      </a:solidFill>
+                      <a:prstDash val="solid"/>
+                      <a:round/>
+                      <a:headEnd type="none" w="med" len="med"/>
+                      <a:tailEnd type="none" w="med" len="med"/>
+                    </a:lnR>
+                    <a:lnT w="12700" cap="flat" cmpd="sng" algn="ctr">
+                      <a:solidFill>
+                        <a:srgbClr val="C5C6C4"/>
+                      </a:solidFill>
+                      <a:prstDash val="solid"/>
+                      <a:round/>
+                      <a:headEnd type="none" w="med" len="med"/>
+                      <a:tailEnd type="none" w="med" len="med"/>
+                    </a:lnT>
+                    <a:lnB w="12700" cap="flat" cmpd="sng" algn="ctr">
+                      <a:solidFill>
+                        <a:srgbClr val="C5C6C4"/>
+                      </a:solidFill>
+                      <a:prstDash val="solid"/>
+                      <a:round/>
+                      <a:headEnd type="none" w="med" len="med"/>
+                      <a:tailEnd type="none" w="med" len="med"/>
+                    </a:lnB>
+                  </a:tcPr>
+                </a:tc>
+                <a:tc>
+                  <a:txBody>
+                    <a:bodyPr/>
+                    <a:lstStyle/>
+                    <a:p>
+                      <a:pPr indent="0" marL="0">
+                        <a:lnSpc>
+                          <a:spcPts val="1712"/>
+                        </a:lnSpc>
+                        <a:buNone/>
+                      </a:pPr>
+                      <a:r>
+                        <a:rPr lang="en-US" sz="1223" dirty="0">
+                          <a:solidFill>
+                            <a:srgbClr val="10212B"/>
+                          </a:solidFill>
+                          <a:latin typeface="Verdana" pitchFamily="34" charset="0"/>
+                          <a:ea typeface="Verdana" pitchFamily="34" charset="-122"/>
+                          <a:cs typeface="Verdana" pitchFamily="34" charset="-120"/>
+                        </a:rPr>
+                        <a:t>11 Dec 2027</a:t>
+                      </a:r>
+                      <a:endParaRPr lang="en-US" sz="1223" dirty="0">
+                        <a:latin typeface="Verdana" charset="0"/>
+                        <a:ea typeface="Verdana" charset="0"/>
+                        <a:cs typeface="Verdana" charset="0"/>
+                      </a:endParaRPr>
+                    </a:p>
+                  </a:txBody>
+                  <a:tcPr marL="127000" marR="127000" marT="88900" marB="88900" anchor="t">
+                    <a:lnL w="12700" cap="flat" cmpd="sng" algn="ctr">
+                      <a:solidFill>
+                        <a:srgbClr val="C5C6C4"/>
+                      </a:solidFill>
+                      <a:prstDash val="solid"/>
+                      <a:round/>
+                      <a:headEnd type="none" w="med" len="med"/>
+                      <a:tailEnd type="none" w="med" len="med"/>
+                    </a:lnL>
+                    <a:lnR w="12700" cap="flat" cmpd="sng" algn="ctr">
+                      <a:solidFill>
+                        <a:srgbClr val="C5C6C4"/>
+                      </a:solidFill>
+                      <a:prstDash val="solid"/>
+                      <a:round/>
+                      <a:headEnd type="none" w="med" len="med"/>
+                      <a:tailEnd type="none" w="med" len="med"/>
+                    </a:lnR>
+                    <a:lnT w="12700" cap="flat" cmpd="sng" algn="ctr">
+                      <a:solidFill>
+                        <a:srgbClr val="C5C6C4"/>
+                      </a:solidFill>
+                      <a:prstDash val="solid"/>
+                      <a:round/>
+                      <a:headEnd type="none" w="med" len="med"/>
+                      <a:tailEnd type="none" w="med" len="med"/>
+                    </a:lnT>
+                    <a:lnB w="12700" cap="flat" cmpd="sng" algn="ctr">
+                      <a:solidFill>
+                        <a:srgbClr val="C5C6C4"/>
+                      </a:solidFill>
+                      <a:prstDash val="solid"/>
+                      <a:round/>
+                      <a:headEnd type="none" w="med" len="med"/>
+                      <a:tailEnd type="none" w="med" len="med"/>
+                    </a:lnB>
+                  </a:tcPr>
+                </a:tc>
+              </a:tr>
+              <a:tr h="594271">
+                <a:tc>
+                  <a:txBody>
+                    <a:bodyPr/>
+                    <a:lstStyle/>
+                    <a:p>
+                      <a:pPr indent="0" marL="0">
+                        <a:lnSpc>
+                          <a:spcPts val="1712"/>
+                        </a:lnSpc>
+                        <a:buNone/>
+                      </a:pPr>
+                      <a:r>
+                        <a:rPr lang="en-US" sz="1223" dirty="0">
+                          <a:solidFill>
+                            <a:srgbClr val="10212B"/>
+                          </a:solidFill>
+                          <a:latin typeface="Verdana" pitchFamily="34" charset="0"/>
+                          <a:ea typeface="Verdana" pitchFamily="34" charset="-122"/>
+                          <a:cs typeface="Verdana" pitchFamily="34" charset="-120"/>
+                        </a:rPr>
+                        <a:t>US Executive Order 14028</a:t>
+                      </a:r>
+                      <a:endParaRPr lang="en-US" sz="1223" dirty="0">
+                        <a:latin typeface="Verdana" charset="0"/>
+                        <a:ea typeface="Verdana" charset="0"/>
+                        <a:cs typeface="Verdana" charset="0"/>
+                      </a:endParaRPr>
+                    </a:p>
+                  </a:txBody>
+                  <a:tcPr marL="127000" marR="127000" marT="88900" marB="88900" anchor="t">
+                    <a:lnL w="12700" cap="flat" cmpd="sng" algn="ctr">
+                      <a:solidFill>
+                        <a:srgbClr val="C5C6C4"/>
+                      </a:solidFill>
+                      <a:prstDash val="solid"/>
+                      <a:round/>
+                      <a:headEnd type="none" w="med" len="med"/>
+                      <a:tailEnd type="none" w="med" len="med"/>
+                    </a:lnL>
+                    <a:lnR w="12700" cap="flat" cmpd="sng" algn="ctr">
+                      <a:solidFill>
+                        <a:srgbClr val="C5C6C4"/>
+                      </a:solidFill>
+                      <a:prstDash val="solid"/>
+                      <a:round/>
+                      <a:headEnd type="none" w="med" len="med"/>
+                      <a:tailEnd type="none" w="med" len="med"/>
+                    </a:lnR>
+                    <a:lnT w="12700" cap="flat" cmpd="sng" algn="ctr">
+                      <a:solidFill>
+                        <a:srgbClr val="C5C6C4"/>
+                      </a:solidFill>
+                      <a:prstDash val="solid"/>
+                      <a:round/>
+                      <a:headEnd type="none" w="med" len="med"/>
+                      <a:tailEnd type="none" w="med" len="med"/>
+                    </a:lnT>
+                    <a:lnB w="12700" cap="flat" cmpd="sng" algn="ctr">
+                      <a:solidFill>
+                        <a:srgbClr val="C5C6C4"/>
+                      </a:solidFill>
+                      <a:prstDash val="solid"/>
+                      <a:round/>
+                      <a:headEnd type="none" w="med" len="med"/>
+                      <a:tailEnd type="none" w="med" len="med"/>
+                    </a:lnB>
+                  </a:tcPr>
+                </a:tc>
+                <a:tc>
+                  <a:txBody>
+                    <a:bodyPr/>
+                    <a:lstStyle/>
+                    <a:p>
+                      <a:pPr indent="0" marL="0">
+                        <a:lnSpc>
+                          <a:spcPts val="1712"/>
+                        </a:lnSpc>
+                        <a:buNone/>
+                      </a:pPr>
+                      <a:r>
+                        <a:rPr lang="en-US" sz="1223" dirty="0">
+                          <a:solidFill>
+                            <a:srgbClr val="4A5568"/>
+                          </a:solidFill>
+                          <a:latin typeface="Verdana" pitchFamily="34" charset="0"/>
+                          <a:ea typeface="Verdana" pitchFamily="34" charset="-122"/>
+                          <a:cs typeface="Verdana" pitchFamily="34" charset="-120"/>
+                        </a:rPr>
+                        <a:t>Software sold to federal agencies</a:t>
+                      </a:r>
+                      <a:endParaRPr lang="en-US" sz="1223" dirty="0">
+                        <a:latin typeface="Verdana" charset="0"/>
+                        <a:ea typeface="Verdana" charset="0"/>
+                        <a:cs typeface="Verdana" charset="0"/>
+                      </a:endParaRPr>
+                    </a:p>
+                  </a:txBody>
+                  <a:tcPr marL="127000" marR="127000" marT="88900" marB="88900" anchor="t">
+                    <a:lnL w="12700" cap="flat" cmpd="sng" algn="ctr">
+                      <a:solidFill>
+                        <a:srgbClr val="C5C6C4"/>
+                      </a:solidFill>
+                      <a:prstDash val="solid"/>
+                      <a:round/>
+                      <a:headEnd type="none" w="med" len="med"/>
+                      <a:tailEnd type="none" w="med" len="med"/>
+                    </a:lnL>
+                    <a:lnR w="12700" cap="flat" cmpd="sng" algn="ctr">
+                      <a:solidFill>
+                        <a:srgbClr val="C5C6C4"/>
+                      </a:solidFill>
+                      <a:prstDash val="solid"/>
+                      <a:round/>
+                      <a:headEnd type="none" w="med" len="med"/>
+                      <a:tailEnd type="none" w="med" len="med"/>
+                    </a:lnR>
+                    <a:lnT w="12700" cap="flat" cmpd="sng" algn="ctr">
+                      <a:solidFill>
+                        <a:srgbClr val="C5C6C4"/>
+                      </a:solidFill>
+                      <a:prstDash val="solid"/>
+                      <a:round/>
+                      <a:headEnd type="none" w="med" len="med"/>
+                      <a:tailEnd type="none" w="med" len="med"/>
+                    </a:lnT>
+                    <a:lnB w="12700" cap="flat" cmpd="sng" algn="ctr">
+                      <a:solidFill>
+                        <a:srgbClr val="C5C6C4"/>
+                      </a:solidFill>
+                      <a:prstDash val="solid"/>
+                      <a:round/>
+                      <a:headEnd type="none" w="med" len="med"/>
+                      <a:tailEnd type="none" w="med" len="med"/>
+                    </a:lnB>
+                  </a:tcPr>
+                </a:tc>
+                <a:tc>
+                  <a:txBody>
+                    <a:bodyPr/>
+                    <a:lstStyle/>
+                    <a:p>
+                      <a:pPr indent="0" marL="0">
+                        <a:lnSpc>
+                          <a:spcPts val="1712"/>
+                        </a:lnSpc>
+                        <a:buNone/>
+                      </a:pPr>
+                      <a:r>
+                        <a:rPr lang="en-US" sz="1223" dirty="0">
+                          <a:solidFill>
+                            <a:srgbClr val="4A5568"/>
+                          </a:solidFill>
+                          <a:latin typeface="Verdana" pitchFamily="34" charset="0"/>
+                          <a:ea typeface="Verdana" pitchFamily="34" charset="-122"/>
+                          <a:cs typeface="Verdana" pitchFamily="34" charset="-120"/>
+                        </a:rPr>
+                        <a:t>An SBOM when an agency asks, with NTIA's minimum elements</a:t>
+                      </a:r>
+                      <a:endParaRPr lang="en-US" sz="1223" dirty="0">
+                        <a:latin typeface="Verdana" charset="0"/>
+                        <a:ea typeface="Verdana" charset="0"/>
+                        <a:cs typeface="Verdana" charset="0"/>
+                      </a:endParaRPr>
+                    </a:p>
+                  </a:txBody>
+                  <a:tcPr marL="127000" marR="127000" marT="88900" marB="88900" anchor="t">
+                    <a:lnL w="12700" cap="flat" cmpd="sng" algn="ctr">
+                      <a:solidFill>
+                        <a:srgbClr val="C5C6C4"/>
+                      </a:solidFill>
+                      <a:prstDash val="solid"/>
+                      <a:round/>
+                      <a:headEnd type="none" w="med" len="med"/>
+                      <a:tailEnd type="none" w="med" len="med"/>
+                    </a:lnL>
+                    <a:lnR w="12700" cap="flat" cmpd="sng" algn="ctr">
+                      <a:solidFill>
+                        <a:srgbClr val="C5C6C4"/>
+                      </a:solidFill>
+                      <a:prstDash val="solid"/>
+                      <a:round/>
+                      <a:headEnd type="none" w="med" len="med"/>
+                      <a:tailEnd type="none" w="med" len="med"/>
+                    </a:lnR>
+                    <a:lnT w="12700" cap="flat" cmpd="sng" algn="ctr">
+                      <a:solidFill>
+                        <a:srgbClr val="C5C6C4"/>
+                      </a:solidFill>
+                      <a:prstDash val="solid"/>
+                      <a:round/>
+                      <a:headEnd type="none" w="med" len="med"/>
+                      <a:tailEnd type="none" w="med" len="med"/>
+                    </a:lnT>
+                    <a:lnB w="12700" cap="flat" cmpd="sng" algn="ctr">
+                      <a:solidFill>
+                        <a:srgbClr val="C5C6C4"/>
+                      </a:solidFill>
+                      <a:prstDash val="solid"/>
+                      <a:round/>
+                      <a:headEnd type="none" w="med" len="med"/>
+                      <a:tailEnd type="none" w="med" len="med"/>
+                    </a:lnB>
+                  </a:tcPr>
+                </a:tc>
+                <a:tc>
+                  <a:txBody>
+                    <a:bodyPr/>
+                    <a:lstStyle/>
+                    <a:p>
+                      <a:pPr indent="0" marL="0">
+                        <a:lnSpc>
+                          <a:spcPts val="1712"/>
+                        </a:lnSpc>
+                        <a:buNone/>
+                      </a:pPr>
+                      <a:r>
+                        <a:rPr lang="en-US" sz="1223" dirty="0">
+                          <a:solidFill>
+                            <a:srgbClr val="10212B"/>
+                          </a:solidFill>
+                          <a:latin typeface="Verdana" pitchFamily="34" charset="0"/>
+                          <a:ea typeface="Verdana" pitchFamily="34" charset="-122"/>
+                          <a:cs typeface="Verdana" pitchFamily="34" charset="-120"/>
+                        </a:rPr>
+                        <a:t>2021</a:t>
+                      </a:r>
+                      <a:endParaRPr lang="en-US" sz="1223" dirty="0">
+                        <a:latin typeface="Verdana" charset="0"/>
+                        <a:ea typeface="Verdana" charset="0"/>
+                        <a:cs typeface="Verdana" charset="0"/>
+                      </a:endParaRPr>
+                    </a:p>
+                  </a:txBody>
+                  <a:tcPr marL="127000" marR="127000" marT="88900" marB="88900" anchor="t">
+                    <a:lnL w="12700" cap="flat" cmpd="sng" algn="ctr">
+                      <a:solidFill>
+                        <a:srgbClr val="C5C6C4"/>
+                      </a:solidFill>
+                      <a:prstDash val="solid"/>
+                      <a:round/>
+                      <a:headEnd type="none" w="med" len="med"/>
+                      <a:tailEnd type="none" w="med" len="med"/>
+                    </a:lnL>
+                    <a:lnR w="12700" cap="flat" cmpd="sng" algn="ctr">
+                      <a:solidFill>
+                        <a:srgbClr val="C5C6C4"/>
+                      </a:solidFill>
+                      <a:prstDash val="solid"/>
+                      <a:round/>
+                      <a:headEnd type="none" w="med" len="med"/>
+                      <a:tailEnd type="none" w="med" len="med"/>
+                    </a:lnR>
+                    <a:lnT w="12700" cap="flat" cmpd="sng" algn="ctr">
+                      <a:solidFill>
+                        <a:srgbClr val="C5C6C4"/>
+                      </a:solidFill>
+                      <a:prstDash val="solid"/>
+                      <a:round/>
+                      <a:headEnd type="none" w="med" len="med"/>
+                      <a:tailEnd type="none" w="med" len="med"/>
+                    </a:lnT>
+                    <a:lnB w="12700" cap="flat" cmpd="sng" algn="ctr">
+                      <a:solidFill>
+                        <a:srgbClr val="C5C6C4"/>
+                      </a:solidFill>
+                      <a:prstDash val="solid"/>
+                      <a:round/>
+                      <a:headEnd type="none" w="med" len="med"/>
+                      <a:tailEnd type="none" w="med" len="med"/>
+                    </a:lnB>
+                  </a:tcPr>
+                </a:tc>
+              </a:tr>
+              <a:tr h="594271">
+                <a:tc>
+                  <a:txBody>
+                    <a:bodyPr/>
+                    <a:lstStyle/>
+                    <a:p>
+                      <a:pPr indent="0" marL="0">
+                        <a:lnSpc>
+                          <a:spcPts val="1712"/>
+                        </a:lnSpc>
+                        <a:buNone/>
+                      </a:pPr>
+                      <a:r>
+                        <a:rPr lang="en-US" sz="1223" dirty="0">
+                          <a:solidFill>
+                            <a:srgbClr val="10212B"/>
+                          </a:solidFill>
+                          <a:latin typeface="Verdana" pitchFamily="34" charset="0"/>
+                          <a:ea typeface="Verdana" pitchFamily="34" charset="-122"/>
+                          <a:cs typeface="Verdana" pitchFamily="34" charset="-120"/>
+                        </a:rPr>
+                        <a:t>Customers</a:t>
+                      </a:r>
+                      <a:endParaRPr lang="en-US" sz="1223" dirty="0">
+                        <a:latin typeface="Verdana" charset="0"/>
+                        <a:ea typeface="Verdana" charset="0"/>
+                        <a:cs typeface="Verdana" charset="0"/>
+                      </a:endParaRPr>
+                    </a:p>
+                  </a:txBody>
+                  <a:tcPr marL="127000" marR="127000" marT="88900" marB="88900" anchor="t">
+                    <a:lnL w="12700" cap="flat" cmpd="sng" algn="ctr">
+                      <a:solidFill>
+                        <a:srgbClr val="C5C6C4"/>
+                      </a:solidFill>
+                      <a:prstDash val="solid"/>
+                      <a:round/>
+                      <a:headEnd type="none" w="med" len="med"/>
+                      <a:tailEnd type="none" w="med" len="med"/>
+                    </a:lnL>
+                    <a:lnR w="12700" cap="flat" cmpd="sng" algn="ctr">
+                      <a:solidFill>
+                        <a:srgbClr val="C5C6C4"/>
+                      </a:solidFill>
+                      <a:prstDash val="solid"/>
+                      <a:round/>
+                      <a:headEnd type="none" w="med" len="med"/>
+                      <a:tailEnd type="none" w="med" len="med"/>
+                    </a:lnR>
+                    <a:lnT w="12700" cap="flat" cmpd="sng" algn="ctr">
+                      <a:solidFill>
+                        <a:srgbClr val="C5C6C4"/>
+                      </a:solidFill>
+                      <a:prstDash val="solid"/>
+                      <a:round/>
+                      <a:headEnd type="none" w="med" len="med"/>
+                      <a:tailEnd type="none" w="med" len="med"/>
+                    </a:lnT>
+                    <a:lnB w="12700" cap="flat" cmpd="sng" algn="ctr">
+                      <a:solidFill>
+                        <a:srgbClr val="C5C6C4"/>
+                      </a:solidFill>
+                      <a:prstDash val="solid"/>
+                      <a:round/>
+                      <a:headEnd type="none" w="med" len="med"/>
+                      <a:tailEnd type="none" w="med" len="med"/>
+                    </a:lnB>
+                  </a:tcPr>
+                </a:tc>
+                <a:tc>
+                  <a:txBody>
+                    <a:bodyPr/>
+                    <a:lstStyle/>
+                    <a:p>
+                      <a:pPr indent="0" marL="0">
+                        <a:lnSpc>
+                          <a:spcPts val="1712"/>
+                        </a:lnSpc>
+                        <a:buNone/>
+                      </a:pPr>
+                      <a:r>
+                        <a:rPr lang="en-US" sz="1223" dirty="0">
+                          <a:solidFill>
+                            <a:srgbClr val="4A5568"/>
+                          </a:solidFill>
+                          <a:latin typeface="Verdana" pitchFamily="34" charset="0"/>
+                          <a:ea typeface="Verdana" pitchFamily="34" charset="-122"/>
+                          <a:cs typeface="Verdana" pitchFamily="34" charset="-120"/>
+                        </a:rPr>
+                        <a:t>Every deal with a security review</a:t>
+                      </a:r>
+                      <a:endParaRPr lang="en-US" sz="1223" dirty="0">
+                        <a:latin typeface="Verdana" charset="0"/>
+                        <a:ea typeface="Verdana" charset="0"/>
+                        <a:cs typeface="Verdana" charset="0"/>
+                      </a:endParaRPr>
+                    </a:p>
+                  </a:txBody>
+                  <a:tcPr marL="127000" marR="127000" marT="88900" marB="88900" anchor="t">
+                    <a:lnL w="12700" cap="flat" cmpd="sng" algn="ctr">
+                      <a:solidFill>
+                        <a:srgbClr val="C5C6C4"/>
+                      </a:solidFill>
+                      <a:prstDash val="solid"/>
+                      <a:round/>
+                      <a:headEnd type="none" w="med" len="med"/>
+                      <a:tailEnd type="none" w="med" len="med"/>
+                    </a:lnL>
+                    <a:lnR w="12700" cap="flat" cmpd="sng" algn="ctr">
+                      <a:solidFill>
+                        <a:srgbClr val="C5C6C4"/>
+                      </a:solidFill>
+                      <a:prstDash val="solid"/>
+                      <a:round/>
+                      <a:headEnd type="none" w="med" len="med"/>
+                      <a:tailEnd type="none" w="med" len="med"/>
+                    </a:lnR>
+                    <a:lnT w="12700" cap="flat" cmpd="sng" algn="ctr">
+                      <a:solidFill>
+                        <a:srgbClr val="C5C6C4"/>
+                      </a:solidFill>
+                      <a:prstDash val="solid"/>
+                      <a:round/>
+                      <a:headEnd type="none" w="med" len="med"/>
+                      <a:tailEnd type="none" w="med" len="med"/>
+                    </a:lnT>
+                    <a:lnB w="12700" cap="flat" cmpd="sng" algn="ctr">
+                      <a:solidFill>
+                        <a:srgbClr val="C5C6C4"/>
+                      </a:solidFill>
+                      <a:prstDash val="solid"/>
+                      <a:round/>
+                      <a:headEnd type="none" w="med" len="med"/>
+                      <a:tailEnd type="none" w="med" len="med"/>
+                    </a:lnB>
+                  </a:tcPr>
+                </a:tc>
+                <a:tc>
+                  <a:txBody>
+                    <a:bodyPr/>
+                    <a:lstStyle/>
+                    <a:p>
+                      <a:pPr indent="0" marL="0">
+                        <a:lnSpc>
+                          <a:spcPts val="1712"/>
+                        </a:lnSpc>
+                        <a:buNone/>
+                      </a:pPr>
+                      <a:r>
+                        <a:rPr lang="en-US" sz="1223" dirty="0">
+                          <a:solidFill>
+                            <a:srgbClr val="4A5568"/>
+                          </a:solidFill>
+                          <a:latin typeface="Verdana" pitchFamily="34" charset="0"/>
+                          <a:ea typeface="Verdana" pitchFamily="34" charset="-122"/>
+                          <a:cs typeface="Verdana" pitchFamily="34" charset="-120"/>
+                        </a:rPr>
+                        <a:t>Questionnaires we answer by hand today</a:t>
+                      </a:r>
+                      <a:endParaRPr lang="en-US" sz="1223" dirty="0">
+                        <a:latin typeface="Verdana" charset="0"/>
+                        <a:ea typeface="Verdana" charset="0"/>
+                        <a:cs typeface="Verdana" charset="0"/>
+                      </a:endParaRPr>
+                    </a:p>
+                  </a:txBody>
+                  <a:tcPr marL="127000" marR="127000" marT="88900" marB="88900" anchor="t">
+                    <a:lnL w="12700" cap="flat" cmpd="sng" algn="ctr">
+                      <a:solidFill>
+                        <a:srgbClr val="C5C6C4"/>
+                      </a:solidFill>
+                      <a:prstDash val="solid"/>
+                      <a:round/>
+                      <a:headEnd type="none" w="med" len="med"/>
+                      <a:tailEnd type="none" w="med" len="med"/>
+                    </a:lnL>
+                    <a:lnR w="12700" cap="flat" cmpd="sng" algn="ctr">
+                      <a:solidFill>
+                        <a:srgbClr val="C5C6C4"/>
+                      </a:solidFill>
+                      <a:prstDash val="solid"/>
+                      <a:round/>
+                      <a:headEnd type="none" w="med" len="med"/>
+                      <a:tailEnd type="none" w="med" len="med"/>
+                    </a:lnR>
+                    <a:lnT w="12700" cap="flat" cmpd="sng" algn="ctr">
+                      <a:solidFill>
+                        <a:srgbClr val="C5C6C4"/>
+                      </a:solidFill>
+                      <a:prstDash val="solid"/>
+                      <a:round/>
+                      <a:headEnd type="none" w="med" len="med"/>
+                      <a:tailEnd type="none" w="med" len="med"/>
+                    </a:lnT>
+                    <a:lnB w="12700" cap="flat" cmpd="sng" algn="ctr">
+                      <a:solidFill>
+                        <a:srgbClr val="C5C6C4"/>
+                      </a:solidFill>
+                      <a:prstDash val="solid"/>
+                      <a:round/>
+                      <a:headEnd type="none" w="med" len="med"/>
+                      <a:tailEnd type="none" w="med" len="med"/>
+                    </a:lnB>
+                  </a:tcPr>
+                </a:tc>
+                <a:tc>
+                  <a:txBody>
+                    <a:bodyPr/>
+                    <a:lstStyle/>
+                    <a:p>
+                      <a:pPr indent="0" marL="0">
+                        <a:lnSpc>
+                          <a:spcPts val="1712"/>
+                        </a:lnSpc>
+                        <a:buNone/>
+                      </a:pPr>
+                      <a:r>
+                        <a:rPr lang="en-US" sz="1223" dirty="0">
+                          <a:solidFill>
+                            <a:srgbClr val="10212B"/>
+                          </a:solidFill>
+                          <a:latin typeface="Verdana" pitchFamily="34" charset="0"/>
+                          <a:ea typeface="Verdana" pitchFamily="34" charset="-122"/>
+                          <a:cs typeface="Verdana" pitchFamily="34" charset="-120"/>
+                        </a:rPr>
+                        <a:t>Now</a:t>
+                      </a:r>
+                      <a:endParaRPr lang="en-US" sz="1223" dirty="0">
+                        <a:latin typeface="Verdana" charset="0"/>
+                        <a:ea typeface="Verdana" charset="0"/>
+                        <a:cs typeface="Verdana" charset="0"/>
+                      </a:endParaRPr>
+                    </a:p>
+                  </a:txBody>
+                  <a:tcPr marL="127000" marR="127000" marT="88900" marB="88900" anchor="t">
+                    <a:lnL w="12700" cap="flat" cmpd="sng" algn="ctr">
+                      <a:solidFill>
+                        <a:srgbClr val="C5C6C4"/>
+                      </a:solidFill>
+                      <a:prstDash val="solid"/>
+                      <a:round/>
+                      <a:headEnd type="none" w="med" len="med"/>
+                      <a:tailEnd type="none" w="med" len="med"/>
+                    </a:lnL>
+                    <a:lnR w="12700" cap="flat" cmpd="sng" algn="ctr">
+                      <a:solidFill>
+                        <a:srgbClr val="C5C6C4"/>
+                      </a:solidFill>
+                      <a:prstDash val="solid"/>
+                      <a:round/>
+                      <a:headEnd type="none" w="med" len="med"/>
+                      <a:tailEnd type="none" w="med" len="med"/>
+                    </a:lnR>
+                    <a:lnT w="12700" cap="flat" cmpd="sng" algn="ctr">
+                      <a:solidFill>
+                        <a:srgbClr val="C5C6C4"/>
+                      </a:solidFill>
+                      <a:prstDash val="solid"/>
+                      <a:round/>
+                      <a:headEnd type="none" w="med" len="med"/>
+                      <a:tailEnd type="none" w="med" len="med"/>
+                    </a:lnT>
+                    <a:lnB w="12700" cap="flat" cmpd="sng" algn="ctr">
+                      <a:solidFill>
+                        <a:srgbClr val="C5C6C4"/>
+                      </a:solidFill>
+                      <a:prstDash val="solid"/>
+                      <a:round/>
+                      <a:headEnd type="none" w="med" len="med"/>
+                      <a:tailEnd type="none" w="med" len="med"/>
+                    </a:lnB>
+                  </a:tcPr>
+                </a:tc>
+              </a:tr>
+            </a:tbl>
+          </a:graphicData>
+        </a:graphic>
+      </p:graphicFrame>
+      <p:sp>
+        <p:nvSpPr>
+          <p:cNvPr id="4" name="Text 1"/>
+          <p:cNvSpPr/>
+          <p:nvPr/>
+        </p:nvSpPr>
+        <p:spPr>
+          <a:xfrm>
+            <a:off x="812800" y="5330478"/>
+            <a:ext cx="10464800" cy="536922"/>
+          </a:xfrm>
+          <a:prstGeom prst="rect">
+            <a:avLst/>
+          </a:prstGeom>
+          <a:noFill/>
+          <a:ln/>
+        </p:spPr>
+        <p:txBody>
+          <a:bodyPr wrap="square" lIns="0" tIns="0" rIns="0" bIns="0" rtlCol="0" anchor="t">
+            <a:normAutofit/>
+          </a:bodyPr>
+          <a:lstStyle/>
+          <a:p>
+            <a:pPr algn="l" indent="0" marL="0">
+              <a:lnSpc>
+                <a:spcPts val="2034"/>
+              </a:lnSpc>
+              <a:buNone/>
+            </a:pPr>
+            <a:r>
+              <a:rPr lang="en-US" sz="1453" dirty="0">
+                <a:solidFill>
+                  <a:srgbClr val="10212B"/>
+                </a:solidFill>
+                <a:latin typeface="Verdana" pitchFamily="34" charset="0"/>
+                <a:ea typeface="Verdana" pitchFamily="34" charset="-122"/>
+                <a:cs typeface="Verdana" pitchFamily="34" charset="-120"/>
+              </a:rPr>
+              <a:t>The two financial rules already apply. Neither says "SBOM"; an SBOM is how we show the inventory they require.</a:t>
+            </a:r>
+            <a:endParaRPr lang="en-US" sz="1453" dirty="0"/>
+          </a:p>
+        </p:txBody>
+      </p:sp>
+      <p:sp>
+        <p:nvSpPr>
+          <p:cNvPr id="5" name="Text 2"/>
+          <p:cNvSpPr/>
+          <p:nvPr/>
+        </p:nvSpPr>
+        <p:spPr>
+          <a:xfrm>
+            <a:off x="812800" y="6238280"/>
+            <a:ext cx="11379200" cy="238720"/>
           </a:xfrm>
           <a:prstGeom prst="rect">
             <a:avLst/>
@@ -4340,509 +6335,15 @@
               <a:buNone/>
             </a:pPr>
             <a:r>
-              <a:rPr lang="en-US" sz="1200" b="1" spc="100" kern="0" dirty="0">
-                <a:solidFill>
-                  <a:srgbClr val="C2571A"/>
-                </a:solidFill>
-                <a:latin typeface="JetBrains Mono" pitchFamily="34" charset="0"/>
-                <a:ea typeface="JetBrains Mono" pitchFamily="34" charset="-122"/>
-                <a:cs typeface="JetBrains Mono" pitchFamily="34" charset="-120"/>
-              </a:rPr>
-              <a:t>UNITED STATES</a:t>
-            </a:r>
-            <a:endParaRPr lang="en-US" sz="1200" dirty="0"/>
-          </a:p>
-        </p:txBody>
-      </p:sp>
-      <p:sp>
-        <p:nvSpPr>
-          <p:cNvPr id="5" name="Text 3"/>
-          <p:cNvSpPr/>
-          <p:nvPr/>
-        </p:nvSpPr>
-        <p:spPr>
-          <a:xfrm>
-            <a:off x="1073150" y="2183061"/>
-            <a:ext cx="2951912" cy="299690"/>
-          </a:xfrm>
-          <a:prstGeom prst="rect">
-            <a:avLst/>
-          </a:prstGeom>
-          <a:noFill/>
-          <a:ln/>
-        </p:spPr>
-        <p:txBody>
-          <a:bodyPr wrap="square" lIns="0" tIns="0" rIns="0" bIns="0" rtlCol="0" anchor="t">
-            <a:normAutofit/>
-          </a:bodyPr>
-          <a:lstStyle/>
-          <a:p>
-            <a:pPr algn="l" indent="0" marL="0">
-              <a:lnSpc>
-                <a:spcPts val="2160"/>
-              </a:lnSpc>
-              <a:buNone/>
-            </a:pPr>
-            <a:r>
-              <a:rPr lang="en-US" sz="1800" b="1" dirty="0">
-                <a:solidFill>
-                  <a:srgbClr val="10212B"/>
-                </a:solidFill>
-                <a:latin typeface="IBM Plex Sans" pitchFamily="34" charset="0"/>
-                <a:ea typeface="IBM Plex Sans" pitchFamily="34" charset="-122"/>
-                <a:cs typeface="IBM Plex Sans" pitchFamily="34" charset="-120"/>
-              </a:rPr>
-              <a:t>Executive Order 14028</a:t>
-            </a:r>
-            <a:endParaRPr lang="en-US" sz="1800" dirty="0"/>
-          </a:p>
-        </p:txBody>
-      </p:sp>
-      <p:sp>
-        <p:nvSpPr>
-          <p:cNvPr id="6" name="Text 4"/>
-          <p:cNvSpPr/>
-          <p:nvPr/>
-        </p:nvSpPr>
-        <p:spPr>
-          <a:xfrm>
-            <a:off x="1073150" y="2546251"/>
-            <a:ext cx="2951912" cy="1054100"/>
-          </a:xfrm>
-          <a:prstGeom prst="rect">
-            <a:avLst/>
-          </a:prstGeom>
-          <a:noFill/>
-          <a:ln/>
-        </p:spPr>
-        <p:txBody>
-          <a:bodyPr wrap="square" lIns="0" tIns="0" rIns="0" bIns="0" rtlCol="0" anchor="t">
-            <a:normAutofit/>
-          </a:bodyPr>
-          <a:lstStyle/>
-          <a:p>
-            <a:pPr algn="l" indent="0" marL="0">
-              <a:lnSpc>
-                <a:spcPts val="2025"/>
-              </a:lnSpc>
-              <a:buNone/>
-            </a:pPr>
-            <a:r>
-              <a:rPr lang="en-US" sz="1500" dirty="0">
-                <a:solidFill>
-                  <a:srgbClr val="4A5568"/>
-                </a:solidFill>
-                <a:latin typeface="IBM Plex Sans" pitchFamily="34" charset="0"/>
-                <a:ea typeface="IBM Plex Sans" pitchFamily="34" charset="-122"/>
-                <a:cs typeface="IBM Plex Sans" pitchFamily="34" charset="-120"/>
-              </a:rPr>
-              <a:t>Software sold to the federal government has to ship with an SBOM. NTIA's minimum elements spell out the fields.</a:t>
-            </a:r>
-            <a:endParaRPr lang="en-US" sz="1500" dirty="0"/>
-          </a:p>
-        </p:txBody>
-      </p:sp>
-      <p:sp>
-        <p:nvSpPr>
-          <p:cNvPr id="7" name="Shape 5"/>
-          <p:cNvSpPr/>
-          <p:nvPr/>
-        </p:nvSpPr>
-        <p:spPr>
-          <a:xfrm>
-            <a:off x="4405809" y="1623665"/>
-            <a:ext cx="3380333" cy="2208461"/>
-          </a:xfrm>
-          <a:prstGeom prst="roundRect">
-            <a:avLst>
-              <a:gd name="adj" fmla="val 4457"/>
-            </a:avLst>
-          </a:prstGeom>
-          <a:solidFill>
-            <a:srgbClr val="FFFFFF"/>
-          </a:solidFill>
-          <a:ln w="6350">
-            <a:solidFill>
-              <a:srgbClr val="DFE3DE"/>
-            </a:solidFill>
-            <a:prstDash val="solid"/>
-          </a:ln>
-        </p:spPr>
-      </p:sp>
-      <p:sp>
-        <p:nvSpPr>
-          <p:cNvPr id="8" name="Text 6"/>
-          <p:cNvSpPr/>
-          <p:nvPr/>
-        </p:nvSpPr>
-        <p:spPr>
-          <a:xfrm>
-            <a:off x="4662984" y="1880840"/>
-            <a:ext cx="2951963" cy="238720"/>
-          </a:xfrm>
-          <a:prstGeom prst="rect">
-            <a:avLst/>
-          </a:prstGeom>
-          <a:noFill/>
-          <a:ln/>
-        </p:spPr>
-        <p:txBody>
-          <a:bodyPr wrap="square" lIns="0" tIns="0" rIns="0" bIns="0" rtlCol="0" anchor="t">
-            <a:normAutofit/>
-          </a:bodyPr>
-          <a:lstStyle/>
-          <a:p>
-            <a:pPr algn="l" indent="0" marL="0">
-              <a:lnSpc>
-                <a:spcPts val="1680"/>
-              </a:lnSpc>
-              <a:buNone/>
-            </a:pPr>
-            <a:r>
-              <a:rPr lang="en-US" sz="1200" b="1" spc="100" kern="0" dirty="0">
-                <a:solidFill>
-                  <a:srgbClr val="C2571A"/>
-                </a:solidFill>
-                <a:latin typeface="JetBrains Mono" pitchFamily="34" charset="0"/>
-                <a:ea typeface="JetBrains Mono" pitchFamily="34" charset="-122"/>
-                <a:cs typeface="JetBrains Mono" pitchFamily="34" charset="-120"/>
-              </a:rPr>
-              <a:t>EUROPEAN UNION</a:t>
-            </a:r>
-            <a:endParaRPr lang="en-US" sz="1200" dirty="0"/>
-          </a:p>
-        </p:txBody>
-      </p:sp>
-      <p:sp>
-        <p:nvSpPr>
-          <p:cNvPr id="9" name="Text 7"/>
-          <p:cNvSpPr/>
-          <p:nvPr/>
-        </p:nvSpPr>
-        <p:spPr>
-          <a:xfrm>
-            <a:off x="4662984" y="2183061"/>
-            <a:ext cx="2951963" cy="299690"/>
-          </a:xfrm>
-          <a:prstGeom prst="rect">
-            <a:avLst/>
-          </a:prstGeom>
-          <a:noFill/>
-          <a:ln/>
-        </p:spPr>
-        <p:txBody>
-          <a:bodyPr wrap="square" lIns="0" tIns="0" rIns="0" bIns="0" rtlCol="0" anchor="t">
-            <a:normAutofit/>
-          </a:bodyPr>
-          <a:lstStyle/>
-          <a:p>
-            <a:pPr algn="l" indent="0" marL="0">
-              <a:lnSpc>
-                <a:spcPts val="2160"/>
-              </a:lnSpc>
-              <a:buNone/>
-            </a:pPr>
-            <a:r>
-              <a:rPr lang="en-US" sz="1800" b="1" dirty="0">
-                <a:solidFill>
-                  <a:srgbClr val="10212B"/>
-                </a:solidFill>
-                <a:latin typeface="IBM Plex Sans" pitchFamily="34" charset="0"/>
-                <a:ea typeface="IBM Plex Sans" pitchFamily="34" charset="-122"/>
-                <a:cs typeface="IBM Plex Sans" pitchFamily="34" charset="-120"/>
-              </a:rPr>
-              <a:t>Cyber Resilience Act</a:t>
-            </a:r>
-            <a:endParaRPr lang="en-US" sz="1800" dirty="0"/>
-          </a:p>
-        </p:txBody>
-      </p:sp>
-      <p:sp>
-        <p:nvSpPr>
-          <p:cNvPr id="10" name="Text 8"/>
-          <p:cNvSpPr/>
-          <p:nvPr/>
-        </p:nvSpPr>
-        <p:spPr>
-          <a:xfrm>
-            <a:off x="4662984" y="2546251"/>
-            <a:ext cx="2951963" cy="1054100"/>
-          </a:xfrm>
-          <a:prstGeom prst="rect">
-            <a:avLst/>
-          </a:prstGeom>
-          <a:noFill/>
-          <a:ln/>
-        </p:spPr>
-        <p:txBody>
-          <a:bodyPr wrap="square" lIns="0" tIns="0" rIns="0" bIns="0" rtlCol="0" anchor="t">
-            <a:normAutofit/>
-          </a:bodyPr>
-          <a:lstStyle/>
-          <a:p>
-            <a:pPr algn="l" indent="0" marL="0">
-              <a:lnSpc>
-                <a:spcPts val="2025"/>
-              </a:lnSpc>
-              <a:buNone/>
-            </a:pPr>
-            <a:r>
-              <a:rPr lang="en-US" sz="1500" dirty="0">
-                <a:solidFill>
-                  <a:srgbClr val="4A5568"/>
-                </a:solidFill>
-                <a:latin typeface="IBM Plex Sans" pitchFamily="34" charset="0"/>
-                <a:ea typeface="IBM Plex Sans" pitchFamily="34" charset="-122"/>
-                <a:cs typeface="IBM Plex Sans" pitchFamily="34" charset="-120"/>
-              </a:rPr>
-              <a:t>Anyone putting a product with digital elements on the EU market has to draw up an SBOM. It phases in through 2027.</a:t>
-            </a:r>
-            <a:endParaRPr lang="en-US" sz="1500" dirty="0"/>
-          </a:p>
-        </p:txBody>
-      </p:sp>
-      <p:sp>
-        <p:nvSpPr>
-          <p:cNvPr id="11" name="Shape 9"/>
-          <p:cNvSpPr/>
-          <p:nvPr/>
-        </p:nvSpPr>
-        <p:spPr>
-          <a:xfrm>
-            <a:off x="7995692" y="1623665"/>
-            <a:ext cx="3380333" cy="2208461"/>
-          </a:xfrm>
-          <a:prstGeom prst="roundRect">
-            <a:avLst>
-              <a:gd name="adj" fmla="val 4457"/>
-            </a:avLst>
-          </a:prstGeom>
-          <a:solidFill>
-            <a:srgbClr val="FFFFFF"/>
-          </a:solidFill>
-          <a:ln w="6350">
-            <a:solidFill>
-              <a:srgbClr val="DFE3DE"/>
-            </a:solidFill>
-            <a:prstDash val="solid"/>
-          </a:ln>
-        </p:spPr>
-      </p:sp>
-      <p:sp>
-        <p:nvSpPr>
-          <p:cNvPr id="12" name="Text 10"/>
-          <p:cNvSpPr/>
-          <p:nvPr/>
-        </p:nvSpPr>
-        <p:spPr>
-          <a:xfrm>
-            <a:off x="8252867" y="1880840"/>
-            <a:ext cx="2951963" cy="238720"/>
-          </a:xfrm>
-          <a:prstGeom prst="rect">
-            <a:avLst/>
-          </a:prstGeom>
-          <a:noFill/>
-          <a:ln/>
-        </p:spPr>
-        <p:txBody>
-          <a:bodyPr wrap="square" lIns="0" tIns="0" rIns="0" bIns="0" rtlCol="0" anchor="t">
-            <a:normAutofit/>
-          </a:bodyPr>
-          <a:lstStyle/>
-          <a:p>
-            <a:pPr algn="l" indent="0" marL="0">
-              <a:lnSpc>
-                <a:spcPts val="1680"/>
-              </a:lnSpc>
-              <a:buNone/>
-            </a:pPr>
-            <a:r>
-              <a:rPr lang="en-US" sz="1200" b="1" spc="100" kern="0" dirty="0">
-                <a:solidFill>
-                  <a:srgbClr val="C2571A"/>
-                </a:solidFill>
-                <a:latin typeface="JetBrains Mono" pitchFamily="34" charset="0"/>
-                <a:ea typeface="JetBrains Mono" pitchFamily="34" charset="-122"/>
-                <a:cs typeface="JetBrains Mono" pitchFamily="34" charset="-120"/>
-              </a:rPr>
-              <a:t>CUSTOMERS</a:t>
-            </a:r>
-            <a:endParaRPr lang="en-US" sz="1200" dirty="0"/>
-          </a:p>
-        </p:txBody>
-      </p:sp>
-      <p:sp>
-        <p:nvSpPr>
-          <p:cNvPr id="13" name="Text 11"/>
-          <p:cNvSpPr/>
-          <p:nvPr/>
-        </p:nvSpPr>
-        <p:spPr>
-          <a:xfrm>
-            <a:off x="8252867" y="2183061"/>
-            <a:ext cx="2951963" cy="299690"/>
-          </a:xfrm>
-          <a:prstGeom prst="rect">
-            <a:avLst/>
-          </a:prstGeom>
-          <a:noFill/>
-          <a:ln/>
-        </p:spPr>
-        <p:txBody>
-          <a:bodyPr wrap="square" lIns="0" tIns="0" rIns="0" bIns="0" rtlCol="0" anchor="t">
-            <a:normAutofit/>
-          </a:bodyPr>
-          <a:lstStyle/>
-          <a:p>
-            <a:pPr algn="l" indent="0" marL="0">
-              <a:lnSpc>
-                <a:spcPts val="2160"/>
-              </a:lnSpc>
-              <a:buNone/>
-            </a:pPr>
-            <a:r>
-              <a:rPr lang="en-US" sz="1800" b="1" dirty="0">
-                <a:solidFill>
-                  <a:srgbClr val="10212B"/>
-                </a:solidFill>
-                <a:latin typeface="IBM Plex Sans" pitchFamily="34" charset="0"/>
-                <a:ea typeface="IBM Plex Sans" pitchFamily="34" charset="-122"/>
-                <a:cs typeface="IBM Plex Sans" pitchFamily="34" charset="-120"/>
-              </a:rPr>
-              <a:t>Security questionnaires</a:t>
-            </a:r>
-            <a:endParaRPr lang="en-US" sz="1800" dirty="0"/>
-          </a:p>
-        </p:txBody>
-      </p:sp>
-      <p:sp>
-        <p:nvSpPr>
-          <p:cNvPr id="14" name="Text 12"/>
-          <p:cNvSpPr/>
-          <p:nvPr/>
-        </p:nvSpPr>
-        <p:spPr>
-          <a:xfrm>
-            <a:off x="8252867" y="2546251"/>
-            <a:ext cx="2951963" cy="796925"/>
-          </a:xfrm>
-          <a:prstGeom prst="rect">
-            <a:avLst/>
-          </a:prstGeom>
-          <a:noFill/>
-          <a:ln/>
-        </p:spPr>
-        <p:txBody>
-          <a:bodyPr wrap="square" lIns="0" tIns="0" rIns="0" bIns="0" rtlCol="0" anchor="t">
-            <a:normAutofit/>
-          </a:bodyPr>
-          <a:lstStyle/>
-          <a:p>
-            <a:pPr algn="l" indent="0" marL="0">
-              <a:lnSpc>
-                <a:spcPts val="2025"/>
-              </a:lnSpc>
-              <a:buNone/>
-            </a:pPr>
-            <a:r>
-              <a:rPr lang="en-US" sz="1500" dirty="0">
-                <a:solidFill>
-                  <a:srgbClr val="4A5568"/>
-                </a:solidFill>
-                <a:latin typeface="IBM Plex Sans" pitchFamily="34" charset="0"/>
-                <a:ea typeface="IBM Plex Sans" pitchFamily="34" charset="-122"/>
-                <a:cs typeface="IBM Plex Sans" pitchFamily="34" charset="-120"/>
-              </a:rPr>
-              <a:t>These arrive one deal at a time, on someone else's deadline. Today we answer them by hand.</a:t>
-            </a:r>
-            <a:endParaRPr lang="en-US" sz="1500" dirty="0"/>
-          </a:p>
-        </p:txBody>
-      </p:sp>
-      <p:sp>
-        <p:nvSpPr>
-          <p:cNvPr id="15" name="Text 13"/>
-          <p:cNvSpPr/>
-          <p:nvPr/>
-        </p:nvSpPr>
-        <p:spPr>
-          <a:xfrm>
-            <a:off x="812800" y="4140101"/>
-            <a:ext cx="10464800" cy="309860"/>
-          </a:xfrm>
-          <a:prstGeom prst="rect">
-            <a:avLst/>
-          </a:prstGeom>
-          <a:noFill/>
-          <a:ln/>
-        </p:spPr>
-        <p:txBody>
-          <a:bodyPr wrap="square" lIns="0" tIns="0" rIns="0" bIns="0" rtlCol="0" anchor="t">
-            <a:normAutofit/>
-          </a:bodyPr>
-          <a:lstStyle/>
-          <a:p>
-            <a:pPr algn="l" indent="0" marL="0">
-              <a:lnSpc>
-                <a:spcPts val="2240"/>
-              </a:lnSpc>
-              <a:buNone/>
-            </a:pPr>
-            <a:r>
-              <a:rPr lang="en-US" sz="1600" dirty="0">
-                <a:solidFill>
-                  <a:srgbClr val="10212B"/>
-                </a:solidFill>
-                <a:latin typeface="IBM Plex Sans" pitchFamily="34" charset="0"/>
-                <a:ea typeface="IBM Plex Sans" pitchFamily="34" charset="-122"/>
-                <a:cs typeface="IBM Plex Sans" pitchFamily="34" charset="-120"/>
-              </a:rPr>
-              <a:t>All three want the same thing from us: a list we can produce on demand, built the same way every time.</a:t>
-            </a:r>
-            <a:endParaRPr lang="en-US" sz="1600" dirty="0"/>
-          </a:p>
-        </p:txBody>
-      </p:sp>
-      <p:sp>
-        <p:nvSpPr>
-          <p:cNvPr id="16" name="Text 14"/>
-          <p:cNvSpPr/>
-          <p:nvPr/>
-        </p:nvSpPr>
-        <p:spPr>
-          <a:xfrm>
-            <a:off x="812800" y="6238280"/>
-            <a:ext cx="6431815" cy="238720"/>
-          </a:xfrm>
-          <a:prstGeom prst="rect">
-            <a:avLst/>
-          </a:prstGeom>
-          <a:noFill/>
-          <a:ln/>
-        </p:spPr>
-        <p:txBody>
-          <a:bodyPr wrap="square" lIns="0" tIns="0" rIns="0" bIns="0" rtlCol="0" anchor="t">
-            <a:normAutofit/>
-          </a:bodyPr>
-          <a:lstStyle/>
-          <a:p>
-            <a:pPr algn="l" indent="0" marL="0">
-              <a:lnSpc>
-                <a:spcPts val="1680"/>
-              </a:lnSpc>
-              <a:buNone/>
-            </a:pPr>
-            <a:r>
               <a:rPr lang="en-US" sz="1200" dirty="0">
                 <a:solidFill>
                   <a:srgbClr val="6A7179"/>
                 </a:solidFill>
-                <a:latin typeface="IBM Plex Sans" pitchFamily="34" charset="0"/>
-                <a:ea typeface="IBM Plex Sans" pitchFamily="34" charset="-122"/>
-                <a:cs typeface="IBM Plex Sans" pitchFamily="34" charset="-120"/>
+                <a:latin typeface="Verdana" pitchFamily="34" charset="0"/>
+                <a:ea typeface="Verdana" pitchFamily="34" charset="-122"/>
+                <a:cs typeface="Verdana" pitchFamily="34" charset="-120"/>
               </a:rPr>
-              <a:t>Check the current regulatory dates before presenting — these timelines have shifted before.</a:t>
+              <a:t>Sources: PCI DSS v4.0 Req. 6.3.2 · Commission Delegated Reg. (EU) 2024/1774 Art. 10(2)(d) · Reg. (EU) 2024/2847 · EO 14028</a:t>
             </a:r>
             <a:endParaRPr lang="en-US" sz="1200" dirty="0"/>
           </a:p>
@@ -4884,12 +6385,14 @@
         <p:nvSpPr>
           <p:cNvPr id="2" name="Text 0"/>
           <p:cNvSpPr/>
-          <p:nvPr/>
+          <p:nvPr>
+            <p:ph type="title"/>
+          </p:nvPr>
         </p:nvSpPr>
         <p:spPr>
           <a:xfrm>
             <a:off x="812800" y="812800"/>
-            <a:ext cx="10883392" cy="528290"/>
+            <a:ext cx="11379200" cy="528290"/>
           </a:xfrm>
           <a:prstGeom prst="rect">
             <a:avLst/>
@@ -4910,13 +6413,13 @@
               <a:buNone/>
             </a:pPr>
             <a:r>
-              <a:rPr lang="en-US" sz="3600" b="1" dirty="0">
+              <a:rPr lang="en-US" sz="3600" b="1" i="0" dirty="0">
                 <a:solidFill>
                   <a:srgbClr val="10212B"/>
                 </a:solidFill>
-                <a:latin typeface="IBM Plex Sans" pitchFamily="34" charset="0"/>
-                <a:ea typeface="IBM Plex Sans" pitchFamily="34" charset="-122"/>
-                <a:cs typeface="IBM Plex Sans" pitchFamily="34" charset="-120"/>
+                <a:latin typeface="Verdana" pitchFamily="34" charset="0"/>
+                <a:ea typeface="Verdana" pitchFamily="34" charset="-122"/>
+                <a:cs typeface="Verdana" pitchFamily="34" charset="-120"/>
               </a:rPr>
               <a:t>Why the tools already out there don't fit</a:t>
             </a:r>
@@ -4958,9 +6461,9 @@
                 <a:solidFill>
                   <a:srgbClr val="4A5568"/>
                 </a:solidFill>
-                <a:latin typeface="IBM Plex Sans" pitchFamily="34" charset="0"/>
-                <a:ea typeface="IBM Plex Sans" pitchFamily="34" charset="-122"/>
-                <a:cs typeface="IBM Plex Sans" pitchFamily="34" charset="-120"/>
+                <a:latin typeface="Verdana" pitchFamily="34" charset="0"/>
+                <a:ea typeface="Verdana" pitchFamily="34" charset="-122"/>
+                <a:cs typeface="Verdana" pitchFamily="34" charset="-120"/>
               </a:rPr>
               <a:t>Most SBOM tooling was built for pip, npm and Maven. A pixi environment is conda packages </a:t>
             </a:r>
@@ -4969,9 +6472,9 @@
                 <a:solidFill>
                   <a:srgbClr val="4A5568"/>
                 </a:solidFill>
-                <a:latin typeface="IBM Plex Sans" pitchFamily="34" charset="0"/>
-                <a:ea typeface="IBM Plex Sans" pitchFamily="34" charset="-122"/>
-                <a:cs typeface="IBM Plex Sans" pitchFamily="34" charset="-120"/>
+                <a:latin typeface="Verdana" pitchFamily="34" charset="0"/>
+                <a:ea typeface="Verdana" pitchFamily="34" charset="-122"/>
+                <a:cs typeface="Verdana" pitchFamily="34" charset="-120"/>
               </a:rPr>
               <a:t>and</a:t>
             </a:r>
@@ -4980,9 +6483,9 @@
                 <a:solidFill>
                   <a:srgbClr val="4A5568"/>
                 </a:solidFill>
-                <a:latin typeface="IBM Plex Sans" pitchFamily="34" charset="0"/>
-                <a:ea typeface="IBM Plex Sans" pitchFamily="34" charset="-122"/>
-                <a:cs typeface="IBM Plex Sans" pitchFamily="34" charset="-120"/>
+                <a:latin typeface="Verdana" pitchFamily="34" charset="0"/>
+                <a:ea typeface="Verdana" pitchFamily="34" charset="-122"/>
+                <a:cs typeface="Verdana" pitchFamily="34" charset="-120"/>
               </a:rPr>
               <a:t> PyPI wheels, resolved together into one lockfile.</a:t>
             </a:r>
@@ -4999,11 +6502,11 @@
         <p:spPr>
           <a:xfrm>
             <a:off x="815975" y="2517725"/>
-            <a:ext cx="5181600" cy="2005310"/>
+            <a:ext cx="5181600" cy="2291060"/>
           </a:xfrm>
           <a:prstGeom prst="roundRect">
             <a:avLst>
-              <a:gd name="adj" fmla="val 4908"/>
+              <a:gd name="adj" fmla="val 4296"/>
             </a:avLst>
           </a:prstGeom>
           <a:solidFill>
@@ -5051,9 +6554,9 @@
                 <a:solidFill>
                   <a:srgbClr val="C2571A"/>
                 </a:solidFill>
-                <a:latin typeface="IBM Plex Sans" pitchFamily="34" charset="0"/>
-                <a:ea typeface="IBM Plex Sans" pitchFamily="34" charset="-122"/>
-                <a:cs typeface="IBM Plex Sans" pitchFamily="34" charset="-120"/>
+                <a:latin typeface="Verdana" pitchFamily="34" charset="0"/>
+                <a:ea typeface="Verdana" pitchFamily="34" charset="-122"/>
+                <a:cs typeface="Verdana" pitchFamily="34" charset="-120"/>
               </a:rPr>
               <a:t>What a generic tool sees</a:t>
             </a:r>
@@ -5070,7 +6573,7 @@
         <p:spPr>
           <a:xfrm>
             <a:off x="1073150" y="3122861"/>
-            <a:ext cx="4807268" cy="1168400"/>
+            <a:ext cx="4807268" cy="1454150"/>
           </a:xfrm>
           <a:prstGeom prst="rect">
             <a:avLst/>
@@ -5096,9 +6599,9 @@
                 <a:solidFill>
                   <a:srgbClr val="4A5568"/>
                 </a:solidFill>
-                <a:latin typeface="IBM Plex Sans" pitchFamily="34" charset="0"/>
-                <a:ea typeface="IBM Plex Sans" pitchFamily="34" charset="-122"/>
-                <a:cs typeface="IBM Plex Sans" pitchFamily="34" charset="-120"/>
+                <a:latin typeface="Verdana" pitchFamily="34" charset="0"/>
+                <a:ea typeface="Verdana" pitchFamily="34" charset="-122"/>
+                <a:cs typeface="Verdana" pitchFamily="34" charset="-120"/>
               </a:rPr>
               <a:t>The wheels it recognizes</a:t>
             </a:r>
@@ -5117,9 +6620,9 @@
                 <a:solidFill>
                   <a:srgbClr val="4A5568"/>
                 </a:solidFill>
-                <a:latin typeface="IBM Plex Sans" pitchFamily="34" charset="0"/>
-                <a:ea typeface="IBM Plex Sans" pitchFamily="34" charset="-122"/>
-                <a:cs typeface="IBM Plex Sans" pitchFamily="34" charset="-120"/>
+                <a:latin typeface="Verdana" pitchFamily="34" charset="0"/>
+                <a:ea typeface="Verdana" pitchFamily="34" charset="-122"/>
+                <a:cs typeface="Verdana" pitchFamily="34" charset="-120"/>
               </a:rPr>
               <a:t>Conda packages as unknown, or missed entirely</a:t>
             </a:r>
@@ -5138,9 +6641,9 @@
                 <a:solidFill>
                   <a:srgbClr val="4A5568"/>
                 </a:solidFill>
-                <a:latin typeface="IBM Plex Sans" pitchFamily="34" charset="0"/>
-                <a:ea typeface="IBM Plex Sans" pitchFamily="34" charset="-122"/>
-                <a:cs typeface="IBM Plex Sans" pitchFamily="34" charset="-120"/>
+                <a:latin typeface="Verdana" pitchFamily="34" charset="0"/>
+                <a:ea typeface="Verdana" pitchFamily="34" charset="-122"/>
+                <a:cs typeface="Verdana" pitchFamily="34" charset="-120"/>
               </a:rPr>
               <a:t>No channel, build string or subdir</a:t>
             </a:r>
@@ -5159,9 +6662,9 @@
                 <a:solidFill>
                   <a:srgbClr val="4A5568"/>
                 </a:solidFill>
-                <a:latin typeface="IBM Plex Sans" pitchFamily="34" charset="0"/>
-                <a:ea typeface="IBM Plex Sans" pitchFamily="34" charset="-122"/>
-                <a:cs typeface="IBM Plex Sans" pitchFamily="34" charset="-120"/>
+                <a:latin typeface="Verdana" pitchFamily="34" charset="0"/>
+                <a:ea typeface="Verdana" pitchFamily="34" charset="-122"/>
+                <a:cs typeface="Verdana" pitchFamily="34" charset="-120"/>
               </a:rPr>
               <a:t>An inventory that looks complete and isn't</a:t>
             </a:r>
@@ -5178,11 +6681,11 @@
         <p:spPr>
           <a:xfrm>
             <a:off x="6203950" y="2514550"/>
-            <a:ext cx="5175250" cy="2011660"/>
+            <a:ext cx="5175250" cy="2297410"/>
           </a:xfrm>
           <a:prstGeom prst="roundRect">
             <a:avLst>
-              <a:gd name="adj" fmla="val 5051"/>
+              <a:gd name="adj" fmla="val 4422"/>
             </a:avLst>
           </a:prstGeom>
           <a:solidFill>
@@ -5225,9 +6728,9 @@
                 <a:solidFill>
                   <a:srgbClr val="6FBFAE"/>
                 </a:solidFill>
-                <a:latin typeface="IBM Plex Sans" pitchFamily="34" charset="0"/>
-                <a:ea typeface="IBM Plex Sans" pitchFamily="34" charset="-122"/>
-                <a:cs typeface="IBM Plex Sans" pitchFamily="34" charset="-120"/>
+                <a:latin typeface="Verdana" pitchFamily="34" charset="0"/>
+                <a:ea typeface="Verdana" pitchFamily="34" charset="-122"/>
+                <a:cs typeface="Verdana" pitchFamily="34" charset="-120"/>
               </a:rPr>
               <a:t>What pixi-sbom sees</a:t>
             </a:r>
@@ -5270,9 +6773,9 @@
                 <a:solidFill>
                   <a:srgbClr val="B5C4CA"/>
                 </a:solidFill>
-                <a:latin typeface="IBM Plex Sans" pitchFamily="34" charset="0"/>
-                <a:ea typeface="IBM Plex Sans" pitchFamily="34" charset="-122"/>
-                <a:cs typeface="IBM Plex Sans" pitchFamily="34" charset="-120"/>
+                <a:latin typeface="Verdana" pitchFamily="34" charset="0"/>
+                <a:ea typeface="Verdana" pitchFamily="34" charset="-122"/>
+                <a:cs typeface="Verdana" pitchFamily="34" charset="-120"/>
               </a:rPr>
               <a:t>Every locked package, both kinds</a:t>
             </a:r>
@@ -5291,9 +6794,9 @@
                 <a:solidFill>
                   <a:srgbClr val="B5C4CA"/>
                 </a:solidFill>
-                <a:latin typeface="IBM Plex Sans" pitchFamily="34" charset="0"/>
-                <a:ea typeface="IBM Plex Sans" pitchFamily="34" charset="-122"/>
-                <a:cs typeface="IBM Plex Sans" pitchFamily="34" charset="-120"/>
+                <a:latin typeface="Verdana" pitchFamily="34" charset="0"/>
+                <a:ea typeface="Verdana" pitchFamily="34" charset="-122"/>
+                <a:cs typeface="Verdana" pitchFamily="34" charset="-120"/>
               </a:rPr>
               <a:t>Channel, build, subdir and hashes</a:t>
             </a:r>
@@ -5312,9 +6815,9 @@
                 <a:solidFill>
                   <a:srgbClr val="B5C4CA"/>
                 </a:solidFill>
-                <a:latin typeface="IBM Plex Sans" pitchFamily="34" charset="0"/>
-                <a:ea typeface="IBM Plex Sans" pitchFamily="34" charset="-122"/>
-                <a:cs typeface="IBM Plex Sans" pitchFamily="34" charset="-120"/>
+                <a:latin typeface="Verdana" pitchFamily="34" charset="0"/>
+                <a:ea typeface="Verdana" pitchFamily="34" charset="-122"/>
+                <a:cs typeface="Verdana" pitchFamily="34" charset="-120"/>
               </a:rPr>
               <a:t>PyPI identity matched onto conda packages</a:t>
             </a:r>
@@ -5333,9 +6836,9 @@
                 <a:solidFill>
                   <a:srgbClr val="B5C4CA"/>
                 </a:solidFill>
-                <a:latin typeface="IBM Plex Sans" pitchFamily="34" charset="0"/>
-                <a:ea typeface="IBM Plex Sans" pitchFamily="34" charset="-122"/>
-                <a:cs typeface="IBM Plex Sans" pitchFamily="34" charset="-120"/>
+                <a:latin typeface="Verdana" pitchFamily="34" charset="0"/>
+                <a:ea typeface="Verdana" pitchFamily="34" charset="-122"/>
+                <a:cs typeface="Verdana" pitchFamily="34" charset="-120"/>
               </a:rPr>
               <a:t>The dependency graph the resolver picked</a:t>
             </a:r>
@@ -5379,7 +6882,9 @@
         <p:nvSpPr>
           <p:cNvPr id="2" name="Text 0"/>
           <p:cNvSpPr/>
-          <p:nvPr/>
+          <p:nvPr>
+            <p:ph type="title"/>
+          </p:nvPr>
         </p:nvSpPr>
         <p:spPr>
           <a:xfrm>
@@ -5405,13 +6910,13 @@
               <a:buNone/>
             </a:pPr>
             <a:r>
-              <a:rPr lang="en-US" sz="3600" b="1" dirty="0">
+              <a:rPr lang="en-US" sz="3600" b="1" i="0" dirty="0">
                 <a:solidFill>
                   <a:srgbClr val="F7F8F6"/>
                 </a:solidFill>
-                <a:latin typeface="IBM Plex Sans" pitchFamily="34" charset="0"/>
-                <a:ea typeface="IBM Plex Sans" pitchFamily="34" charset="-122"/>
-                <a:cs typeface="IBM Plex Sans" pitchFamily="34" charset="-120"/>
+                <a:latin typeface="Verdana" pitchFamily="34" charset="0"/>
+                <a:ea typeface="Verdana" pitchFamily="34" charset="-122"/>
+                <a:cs typeface="Verdana" pitchFamily="34" charset="-120"/>
               </a:rPr>
               <a:t>What it is</a:t>
             </a:r>
@@ -5428,7 +6933,7 @@
         <p:spPr>
           <a:xfrm>
             <a:off x="812800" y="1645890"/>
-            <a:ext cx="10595610" cy="454620"/>
+            <a:ext cx="10595610" cy="883841"/>
           </a:xfrm>
           <a:prstGeom prst="rect">
             <a:avLst/>
@@ -5453,33 +6958,33 @@
                 <a:solidFill>
                   <a:srgbClr val="F7F8F6"/>
                 </a:solidFill>
-                <a:latin typeface="IBM Plex Sans" pitchFamily="34" charset="0"/>
-                <a:ea typeface="IBM Plex Sans" pitchFamily="34" charset="-122"/>
-                <a:cs typeface="IBM Plex Sans" pitchFamily="34" charset="-120"/>
+                <a:latin typeface="Verdana" pitchFamily="34" charset="0"/>
+                <a:ea typeface="Verdana" pitchFamily="34" charset="-122"/>
+                <a:cs typeface="Verdana" pitchFamily="34" charset="-120"/>
               </a:rPr>
-              <a:t>One binary. It reads </a:t>
+              <a:t>One binary. It reads the lockfile </a:t>
             </a:r>
             <a:r>
               <a:rPr lang="en-US" sz="2600" dirty="0">
                 <a:solidFill>
                   <a:srgbClr val="6FBFAE"/>
                 </a:solidFill>
-                <a:latin typeface="IBM Plex Sans" pitchFamily="34" charset="0"/>
-                <a:ea typeface="IBM Plex Sans" pitchFamily="34" charset="-122"/>
-                <a:cs typeface="IBM Plex Sans" pitchFamily="34" charset="-120"/>
+                <a:latin typeface="Verdana" pitchFamily="34" charset="0"/>
+                <a:ea typeface="Verdana" pitchFamily="34" charset="-122"/>
+                <a:cs typeface="Verdana" pitchFamily="34" charset="-120"/>
               </a:rPr>
-              <a:t>pixi.lock</a:t>
+              <a:t>pixi, uv, Poetry, PDM, conda-lock or pip</a:t>
             </a:r>
             <a:r>
               <a:rPr lang="en-US" sz="2600" dirty="0">
                 <a:solidFill>
                   <a:srgbClr val="F7F8F6"/>
                 </a:solidFill>
-                <a:latin typeface="IBM Plex Sans" pitchFamily="34" charset="0"/>
-                <a:ea typeface="IBM Plex Sans" pitchFamily="34" charset="-122"/>
-                <a:cs typeface="IBM Plex Sans" pitchFamily="34" charset="-120"/>
+                <a:latin typeface="Verdana" pitchFamily="34" charset="0"/>
+                <a:ea typeface="Verdana" pitchFamily="34" charset="-122"/>
+                <a:cs typeface="Verdana" pitchFamily="34" charset="-120"/>
               </a:rPr>
-              <a:t> and writes CycloneDX or SPDX.</a:t>
+              <a:t> wrote, and writes CycloneDX or SPDX.</a:t>
             </a:r>
             <a:endParaRPr lang="en-US" sz="2600" dirty="0"/>
           </a:p>
@@ -5493,12 +6998,12 @@
         </p:nvSpPr>
         <p:spPr>
           <a:xfrm>
-            <a:off x="812800" y="2405311"/>
-            <a:ext cx="2508250" cy="1417290"/>
+            <a:off x="812800" y="2834531"/>
+            <a:ext cx="2508250" cy="1648420"/>
           </a:xfrm>
           <a:prstGeom prst="roundRect">
             <a:avLst>
-              <a:gd name="adj" fmla="val 7169"/>
+              <a:gd name="adj" fmla="val 6163"/>
             </a:avLst>
           </a:prstGeom>
           <a:solidFill>
@@ -5515,7 +7020,7 @@
         </p:nvSpPr>
         <p:spPr>
           <a:xfrm>
-            <a:off x="1041400" y="2633911"/>
+            <a:off x="1041400" y="3063131"/>
             <a:ext cx="2112582" cy="472430"/>
           </a:xfrm>
           <a:prstGeom prst="rect">
@@ -5541,11 +7046,11 @@
                 <a:solidFill>
                   <a:srgbClr val="6FBFAE"/>
                 </a:solidFill>
-                <a:latin typeface="IBM Plex Sans" pitchFamily="34" charset="0"/>
-                <a:ea typeface="IBM Plex Sans" pitchFamily="34" charset="-122"/>
-                <a:cs typeface="IBM Plex Sans" pitchFamily="34" charset="-120"/>
+                <a:latin typeface="Verdana" pitchFamily="34" charset="0"/>
+                <a:ea typeface="Verdana" pitchFamily="34" charset="-122"/>
+                <a:cs typeface="Verdana" pitchFamily="34" charset="-120"/>
               </a:rPr>
-              <a:t>7.6 MB</a:t>
+              <a:t>12 MB</a:t>
             </a:r>
             <a:endParaRPr lang="en-US" sz="3200" dirty="0"/>
           </a:p>
@@ -5559,7 +7064,7 @@
         </p:nvSpPr>
         <p:spPr>
           <a:xfrm>
-            <a:off x="1041400" y="3131741"/>
+            <a:off x="1041400" y="3560961"/>
             <a:ext cx="2112582" cy="487660"/>
           </a:xfrm>
           <a:prstGeom prst="rect">
@@ -5585,9 +7090,9 @@
                 <a:solidFill>
                   <a:srgbClr val="B5C4CA"/>
                 </a:solidFill>
-                <a:latin typeface="IBM Plex Sans" pitchFamily="34" charset="0"/>
-                <a:ea typeface="IBM Plex Sans" pitchFamily="34" charset="-122"/>
-                <a:cs typeface="IBM Plex Sans" pitchFamily="34" charset="-120"/>
+                <a:latin typeface="Verdana" pitchFamily="34" charset="0"/>
+                <a:ea typeface="Verdana" pitchFamily="34" charset="-122"/>
+                <a:cs typeface="Verdana" pitchFamily="34" charset="-120"/>
               </a:rPr>
               <a:t>one executable, no runtime to install</a:t>
             </a:r>
@@ -5603,12 +7108,12 @@
         </p:nvSpPr>
         <p:spPr>
           <a:xfrm>
-            <a:off x="3498850" y="2405311"/>
-            <a:ext cx="2508250" cy="1417290"/>
+            <a:off x="3498850" y="2834531"/>
+            <a:ext cx="2508250" cy="1648420"/>
           </a:xfrm>
           <a:prstGeom prst="roundRect">
             <a:avLst>
-              <a:gd name="adj" fmla="val 7169"/>
+              <a:gd name="adj" fmla="val 6163"/>
             </a:avLst>
           </a:prstGeom>
           <a:solidFill>
@@ -5625,7 +7130,7 @@
         </p:nvSpPr>
         <p:spPr>
           <a:xfrm>
-            <a:off x="3727450" y="2633911"/>
+            <a:off x="3727450" y="3063131"/>
             <a:ext cx="2112582" cy="472430"/>
           </a:xfrm>
           <a:prstGeom prst="rect">
@@ -5651,9 +7156,9 @@
                 <a:solidFill>
                   <a:srgbClr val="6FBFAE"/>
                 </a:solidFill>
-                <a:latin typeface="IBM Plex Sans" pitchFamily="34" charset="0"/>
-                <a:ea typeface="IBM Plex Sans" pitchFamily="34" charset="-122"/>
-                <a:cs typeface="IBM Plex Sans" pitchFamily="34" charset="-120"/>
+                <a:latin typeface="Verdana" pitchFamily="34" charset="0"/>
+                <a:ea typeface="Verdana" pitchFamily="34" charset="-122"/>
+                <a:cs typeface="Verdana" pitchFamily="34" charset="-120"/>
               </a:rPr>
               <a:t>5</a:t>
             </a:r>
@@ -5669,8 +7174,8 @@
         </p:nvSpPr>
         <p:spPr>
           <a:xfrm>
-            <a:off x="3727450" y="3131741"/>
-            <a:ext cx="2112582" cy="487660"/>
+            <a:off x="3727450" y="3560961"/>
+            <a:ext cx="2112582" cy="718790"/>
           </a:xfrm>
           <a:prstGeom prst="rect">
             <a:avLst/>
@@ -5695,9 +7200,9 @@
                 <a:solidFill>
                   <a:srgbClr val="B5C4CA"/>
                 </a:solidFill>
-                <a:latin typeface="IBM Plex Sans" pitchFamily="34" charset="0"/>
-                <a:ea typeface="IBM Plex Sans" pitchFamily="34" charset="-122"/>
-                <a:cs typeface="IBM Plex Sans" pitchFamily="34" charset="-120"/>
+                <a:latin typeface="Verdana" pitchFamily="34" charset="0"/>
+                <a:ea typeface="Verdana" pitchFamily="34" charset="-122"/>
+                <a:cs typeface="Verdana" pitchFamily="34" charset="-120"/>
               </a:rPr>
               <a:t>platforms: Linux, macOS, Windows, Intel and ARM</a:t>
             </a:r>
@@ -5713,12 +7218,12 @@
         </p:nvSpPr>
         <p:spPr>
           <a:xfrm>
-            <a:off x="6184900" y="2405311"/>
-            <a:ext cx="2508250" cy="1417290"/>
+            <a:off x="6184900" y="2834531"/>
+            <a:ext cx="2508250" cy="1648420"/>
           </a:xfrm>
           <a:prstGeom prst="roundRect">
             <a:avLst>
-              <a:gd name="adj" fmla="val 7169"/>
+              <a:gd name="adj" fmla="val 6163"/>
             </a:avLst>
           </a:prstGeom>
           <a:solidFill>
@@ -5735,7 +7240,7 @@
         </p:nvSpPr>
         <p:spPr>
           <a:xfrm>
-            <a:off x="6413500" y="2633911"/>
+            <a:off x="6413500" y="3063131"/>
             <a:ext cx="2112582" cy="472430"/>
           </a:xfrm>
           <a:prstGeom prst="rect">
@@ -5761,9 +7266,9 @@
                 <a:solidFill>
                   <a:srgbClr val="6FBFAE"/>
                 </a:solidFill>
-                <a:latin typeface="IBM Plex Sans" pitchFamily="34" charset="0"/>
-                <a:ea typeface="IBM Plex Sans" pitchFamily="34" charset="-122"/>
-                <a:cs typeface="IBM Plex Sans" pitchFamily="34" charset="-120"/>
+                <a:latin typeface="Verdana" pitchFamily="34" charset="0"/>
+                <a:ea typeface="Verdana" pitchFamily="34" charset="-122"/>
+                <a:cs typeface="Verdana" pitchFamily="34" charset="-120"/>
               </a:rPr>
               <a:t>0</a:t>
             </a:r>
@@ -5779,7 +7284,7 @@
         </p:nvSpPr>
         <p:spPr>
           <a:xfrm>
-            <a:off x="6413500" y="3131741"/>
+            <a:off x="6413500" y="3560961"/>
             <a:ext cx="2112582" cy="487660"/>
           </a:xfrm>
           <a:prstGeom prst="rect">
@@ -5805,9 +7310,9 @@
                 <a:solidFill>
                   <a:srgbClr val="B5C4CA"/>
                 </a:solidFill>
-                <a:latin typeface="IBM Plex Sans" pitchFamily="34" charset="0"/>
-                <a:ea typeface="IBM Plex Sans" pitchFamily="34" charset="-122"/>
-                <a:cs typeface="IBM Plex Sans" pitchFamily="34" charset="-120"/>
+                <a:latin typeface="Verdana" pitchFamily="34" charset="0"/>
+                <a:ea typeface="Verdana" pitchFamily="34" charset="-122"/>
+                <a:cs typeface="Verdana" pitchFamily="34" charset="-120"/>
               </a:rPr>
               <a:t>servers, accounts or telemetry</a:t>
             </a:r>
@@ -5823,12 +7328,12 @@
         </p:nvSpPr>
         <p:spPr>
           <a:xfrm>
-            <a:off x="8870950" y="2405311"/>
-            <a:ext cx="2508250" cy="1417290"/>
+            <a:off x="8870950" y="2834531"/>
+            <a:ext cx="2508250" cy="1648420"/>
           </a:xfrm>
           <a:prstGeom prst="roundRect">
             <a:avLst>
-              <a:gd name="adj" fmla="val 7169"/>
+              <a:gd name="adj" fmla="val 6163"/>
             </a:avLst>
           </a:prstGeom>
           <a:solidFill>
@@ -5845,7 +7350,7 @@
         </p:nvSpPr>
         <p:spPr>
           <a:xfrm>
-            <a:off x="9099550" y="2633911"/>
+            <a:off x="9099550" y="3063131"/>
             <a:ext cx="2112582" cy="472430"/>
           </a:xfrm>
           <a:prstGeom prst="rect">
@@ -5871,9 +7376,9 @@
                 <a:solidFill>
                   <a:srgbClr val="6FBFAE"/>
                 </a:solidFill>
-                <a:latin typeface="IBM Plex Sans" pitchFamily="34" charset="0"/>
-                <a:ea typeface="IBM Plex Sans" pitchFamily="34" charset="-122"/>
-                <a:cs typeface="IBM Plex Sans" pitchFamily="34" charset="-120"/>
+                <a:latin typeface="Verdana" pitchFamily="34" charset="0"/>
+                <a:ea typeface="Verdana" pitchFamily="34" charset="-122"/>
+                <a:cs typeface="Verdana" pitchFamily="34" charset="-120"/>
               </a:rPr>
               <a:t>Offline</a:t>
             </a:r>
@@ -5889,7 +7394,7 @@
         </p:nvSpPr>
         <p:spPr>
           <a:xfrm>
-            <a:off x="9099550" y="3131741"/>
+            <a:off x="9099550" y="3560961"/>
             <a:ext cx="2112582" cy="487660"/>
           </a:xfrm>
           <a:prstGeom prst="rect">
@@ -5915,9 +7420,9 @@
                 <a:solidFill>
                   <a:srgbClr val="B5C4CA"/>
                 </a:solidFill>
-                <a:latin typeface="IBM Plex Sans" pitchFamily="34" charset="0"/>
-                <a:ea typeface="IBM Plex Sans" pitchFamily="34" charset="-122"/>
-                <a:cs typeface="IBM Plex Sans" pitchFamily="34" charset="-120"/>
+                <a:latin typeface="Verdana" pitchFamily="34" charset="0"/>
+                <a:ea typeface="Verdana" pitchFamily="34" charset="-122"/>
+                <a:cs typeface="Verdana" pitchFamily="34" charset="-120"/>
               </a:rPr>
               <a:t>works with no network when it has to</a:t>
             </a:r>
@@ -5961,12 +7466,14 @@
         <p:nvSpPr>
           <p:cNvPr id="2" name="Text 0"/>
           <p:cNvSpPr/>
-          <p:nvPr/>
+          <p:nvPr>
+            <p:ph type="title"/>
+          </p:nvPr>
         </p:nvSpPr>
         <p:spPr>
           <a:xfrm>
             <a:off x="812800" y="812800"/>
-            <a:ext cx="10883392" cy="528290"/>
+            <a:ext cx="10883392" cy="521395"/>
           </a:xfrm>
           <a:prstGeom prst="rect">
             <a:avLst/>
@@ -5982,22 +7489,22 @@
           <a:p>
             <a:pPr algn="l" indent="0" marL="0">
               <a:lnSpc>
-                <a:spcPts val="3960"/>
+                <a:spcPts val="3923"/>
               </a:lnSpc>
               <a:buNone/>
             </a:pPr>
             <a:r>
-              <a:rPr lang="en-US" sz="3600" b="1" dirty="0">
+              <a:rPr lang="en-US" sz="3566" b="1" i="0" dirty="0">
                 <a:solidFill>
                   <a:srgbClr val="10212B"/>
                 </a:solidFill>
-                <a:latin typeface="IBM Plex Sans" pitchFamily="34" charset="0"/>
-                <a:ea typeface="IBM Plex Sans" pitchFamily="34" charset="-122"/>
-                <a:cs typeface="IBM Plex Sans" pitchFamily="34" charset="-120"/>
+                <a:latin typeface="Verdana" pitchFamily="34" charset="0"/>
+                <a:ea typeface="Verdana" pitchFamily="34" charset="-122"/>
+                <a:cs typeface="Verdana" pitchFamily="34" charset="-120"/>
               </a:rPr>
               <a:t>What it does</a:t>
             </a:r>
-            <a:endParaRPr lang="en-US" sz="3600" dirty="0"/>
+            <a:endParaRPr lang="en-US" sz="3566" dirty="0"/>
           </a:p>
         </p:txBody>
       </p:sp>
@@ -6009,12 +7516,12 @@
         </p:nvSpPr>
         <p:spPr>
           <a:xfrm>
-            <a:off x="815975" y="1572865"/>
-            <a:ext cx="3397250" cy="1833811"/>
+            <a:off x="815975" y="1565970"/>
+            <a:ext cx="3397250" cy="2044353"/>
           </a:xfrm>
           <a:prstGeom prst="roundRect">
             <a:avLst>
-              <a:gd name="adj" fmla="val 5367"/>
+              <a:gd name="adj" fmla="val 4814"/>
             </a:avLst>
           </a:prstGeom>
           <a:solidFill>
@@ -6038,13 +7545,13 @@
         </p:nvPicPr>
         <p:blipFill>
           <a:blip r:embed="rId1"/>
-          <a:srcRect l="0" r="0" t="0" b="0"/>
+          <a:srcRect l="0" r="0" t="-145" b="-145"/>
           <a:stretch/>
         </p:blipFill>
         <p:spPr>
           <a:xfrm>
-            <a:off x="1047750" y="1804640"/>
-            <a:ext cx="279400" cy="279400"/>
+            <a:off x="1047750" y="1797745"/>
+            <a:ext cx="279400" cy="273844"/>
           </a:xfrm>
           <a:prstGeom prst="rect">
             <a:avLst/>
@@ -6059,8 +7566,8 @@
         </p:nvSpPr>
         <p:spPr>
           <a:xfrm>
-            <a:off x="1047750" y="2147540"/>
-            <a:ext cx="3021711" cy="269230"/>
+            <a:off x="1047750" y="2135088"/>
+            <a:ext cx="3021711" cy="264368"/>
           </a:xfrm>
           <a:prstGeom prst="rect">
             <a:avLst/>
@@ -6085,9 +7592,9 @@
                 <a:solidFill>
                   <a:srgbClr val="10212B"/>
                 </a:solidFill>
-                <a:latin typeface="IBM Plex Sans" pitchFamily="34" charset="0"/>
-                <a:ea typeface="IBM Plex Sans" pitchFamily="34" charset="-122"/>
-                <a:cs typeface="IBM Plex Sans" pitchFamily="34" charset="-120"/>
+                <a:latin typeface="Verdana" pitchFamily="34" charset="0"/>
+                <a:ea typeface="Verdana" pitchFamily="34" charset="-122"/>
+                <a:cs typeface="Verdana" pitchFamily="34" charset="-120"/>
               </a:rPr>
               <a:t>Both standards</a:t>
             </a:r>
@@ -6103,8 +7610,8 @@
         </p:nvSpPr>
         <p:spPr>
           <a:xfrm>
-            <a:off x="1047750" y="2454870"/>
-            <a:ext cx="3021711" cy="745430"/>
+            <a:off x="1047750" y="2437557"/>
+            <a:ext cx="3021711" cy="966391"/>
           </a:xfrm>
           <a:prstGeom prst="rect">
             <a:avLst/>
@@ -6120,22 +7627,22 @@
           <a:p>
             <a:pPr algn="l" indent="0" marL="0">
               <a:lnSpc>
-                <a:spcPts val="1890"/>
+                <a:spcPts val="1855"/>
               </a:lnSpc>
               <a:buNone/>
             </a:pPr>
             <a:r>
-              <a:rPr lang="en-US" sz="1400" dirty="0">
+              <a:rPr lang="en-US" sz="1374" dirty="0">
                 <a:solidFill>
                   <a:srgbClr val="4A5568"/>
                 </a:solidFill>
-                <a:latin typeface="IBM Plex Sans" pitchFamily="34" charset="0"/>
-                <a:ea typeface="IBM Plex Sans" pitchFamily="34" charset="-122"/>
-                <a:cs typeface="IBM Plex Sans" pitchFamily="34" charset="-120"/>
+                <a:latin typeface="Verdana" pitchFamily="34" charset="0"/>
+                <a:ea typeface="Verdana" pitchFamily="34" charset="-122"/>
+                <a:cs typeface="Verdana" pitchFamily="34" charset="-120"/>
               </a:rPr>
               <a:t>CycloneDX 1.6 and 1.7, SPDX 2.3 and 3.0.1. Whoever asks gets the format they already use.</a:t>
             </a:r>
-            <a:endParaRPr lang="en-US" sz="1400" dirty="0"/>
+            <a:endParaRPr lang="en-US" sz="1374" dirty="0"/>
           </a:p>
         </p:txBody>
       </p:sp>
@@ -6147,12 +7654,12 @@
         </p:nvSpPr>
         <p:spPr>
           <a:xfrm>
-            <a:off x="4397375" y="1572865"/>
-            <a:ext cx="3397250" cy="1833811"/>
+            <a:off x="4397375" y="1565970"/>
+            <a:ext cx="3397250" cy="2044353"/>
           </a:xfrm>
           <a:prstGeom prst="roundRect">
             <a:avLst>
-              <a:gd name="adj" fmla="val 5367"/>
+              <a:gd name="adj" fmla="val 4814"/>
             </a:avLst>
           </a:prstGeom>
           <a:solidFill>
@@ -6176,13 +7683,13 @@
         </p:nvPicPr>
         <p:blipFill>
           <a:blip r:embed="rId2"/>
-          <a:srcRect l="0" r="0" t="0" b="0"/>
+          <a:srcRect l="0" r="0" t="-145" b="-145"/>
           <a:stretch/>
         </p:blipFill>
         <p:spPr>
           <a:xfrm>
-            <a:off x="4629150" y="1804640"/>
-            <a:ext cx="279400" cy="279400"/>
+            <a:off x="4629150" y="1797745"/>
+            <a:ext cx="279400" cy="273844"/>
           </a:xfrm>
           <a:prstGeom prst="rect">
             <a:avLst/>
@@ -6197,8 +7704,8 @@
         </p:nvSpPr>
         <p:spPr>
           <a:xfrm>
-            <a:off x="4629150" y="2147540"/>
-            <a:ext cx="3021711" cy="269230"/>
+            <a:off x="4629150" y="2135088"/>
+            <a:ext cx="3021711" cy="264368"/>
           </a:xfrm>
           <a:prstGeom prst="rect">
             <a:avLst/>
@@ -6223,9 +7730,9 @@
                 <a:solidFill>
                   <a:srgbClr val="10212B"/>
                 </a:solidFill>
-                <a:latin typeface="IBM Plex Sans" pitchFamily="34" charset="0"/>
-                <a:ea typeface="IBM Plex Sans" pitchFamily="34" charset="-122"/>
-                <a:cs typeface="IBM Plex Sans" pitchFamily="34" charset="-120"/>
+                <a:latin typeface="Verdana" pitchFamily="34" charset="0"/>
+                <a:ea typeface="Verdana" pitchFamily="34" charset="-122"/>
+                <a:cs typeface="Verdana" pitchFamily="34" charset="-120"/>
               </a:rPr>
               <a:t>Known vulnerabilities</a:t>
             </a:r>
@@ -6241,8 +7748,8 @@
         </p:nvSpPr>
         <p:spPr>
           <a:xfrm>
-            <a:off x="4629150" y="2454870"/>
-            <a:ext cx="3021711" cy="745430"/>
+            <a:off x="4629150" y="2437557"/>
+            <a:ext cx="3021711" cy="966391"/>
           </a:xfrm>
           <a:prstGeom prst="rect">
             <a:avLst/>
@@ -6258,22 +7765,22 @@
           <a:p>
             <a:pPr algn="l" indent="0" marL="0">
               <a:lnSpc>
-                <a:spcPts val="1890"/>
+                <a:spcPts val="1855"/>
               </a:lnSpc>
               <a:buNone/>
             </a:pPr>
             <a:r>
-              <a:rPr lang="en-US" sz="1400" dirty="0">
+              <a:rPr lang="en-US" sz="1374" dirty="0">
                 <a:solidFill>
                   <a:srgbClr val="4A5568"/>
                 </a:solidFill>
-                <a:latin typeface="IBM Plex Sans" pitchFamily="34" charset="0"/>
-                <a:ea typeface="IBM Plex Sans" pitchFamily="34" charset="-122"/>
-                <a:cs typeface="IBM Plex Sans" pitchFamily="34" charset="-120"/>
+                <a:latin typeface="Verdana" pitchFamily="34" charset="0"/>
+                <a:ea typeface="Verdana" pitchFamily="34" charset="-122"/>
+                <a:cs typeface="Verdana" pitchFamily="34" charset="-120"/>
               </a:rPr>
-              <a:t>Looks them up in OSV and flags anything sitting in CISA's known-exploited list.</a:t>
-            </a:r>
-            <a:endParaRPr lang="en-US" sz="1400" dirty="0"/>
+              <a:t>Looks them up in OSV, flags CISA's known-exploited list, and ranks the rest by how likely exploitation is (EPSS).</a:t>
+            </a:r>
+            <a:endParaRPr lang="en-US" sz="1374" dirty="0"/>
           </a:p>
         </p:txBody>
       </p:sp>
@@ -6285,12 +7792,12 @@
         </p:nvSpPr>
         <p:spPr>
           <a:xfrm>
-            <a:off x="7978775" y="1572865"/>
-            <a:ext cx="3397250" cy="1833811"/>
+            <a:off x="7978775" y="1565970"/>
+            <a:ext cx="3397250" cy="2044353"/>
           </a:xfrm>
           <a:prstGeom prst="roundRect">
             <a:avLst>
-              <a:gd name="adj" fmla="val 5367"/>
+              <a:gd name="adj" fmla="val 4814"/>
             </a:avLst>
           </a:prstGeom>
           <a:solidFill>
@@ -6319,7 +7826,7 @@
         </p:blipFill>
         <p:spPr>
           <a:xfrm>
-            <a:off x="8210550" y="1804640"/>
+            <a:off x="8210550" y="1797745"/>
             <a:ext cx="279400" cy="279400"/>
           </a:xfrm>
           <a:prstGeom prst="rect">
@@ -6335,7 +7842,7 @@
         </p:nvSpPr>
         <p:spPr>
           <a:xfrm>
-            <a:off x="8210550" y="2147540"/>
+            <a:off x="8210550" y="2140645"/>
             <a:ext cx="3021711" cy="269230"/>
           </a:xfrm>
           <a:prstGeom prst="rect">
@@ -6361,9 +7868,9 @@
                 <a:solidFill>
                   <a:srgbClr val="10212B"/>
                 </a:solidFill>
-                <a:latin typeface="IBM Plex Sans" pitchFamily="34" charset="0"/>
-                <a:ea typeface="IBM Plex Sans" pitchFamily="34" charset="-122"/>
-                <a:cs typeface="IBM Plex Sans" pitchFamily="34" charset="-120"/>
+                <a:latin typeface="Verdana" pitchFamily="34" charset="0"/>
+                <a:ea typeface="Verdana" pitchFamily="34" charset="-122"/>
+                <a:cs typeface="Verdana" pitchFamily="34" charset="-120"/>
               </a:rPr>
               <a:t>License rules</a:t>
             </a:r>
@@ -6379,7 +7886,7 @@
         </p:nvSpPr>
         <p:spPr>
           <a:xfrm>
-            <a:off x="8210550" y="2454870"/>
+            <a:off x="8210550" y="2447975"/>
             <a:ext cx="3021711" cy="745430"/>
           </a:xfrm>
           <a:prstGeom prst="rect">
@@ -6405,9 +7912,9 @@
                 <a:solidFill>
                   <a:srgbClr val="4A5568"/>
                 </a:solidFill>
-                <a:latin typeface="IBM Plex Sans" pitchFamily="34" charset="0"/>
-                <a:ea typeface="IBM Plex Sans" pitchFamily="34" charset="-122"/>
-                <a:cs typeface="IBM Plex Sans" pitchFamily="34" charset="-120"/>
+                <a:latin typeface="Verdana" pitchFamily="34" charset="0"/>
+                <a:ea typeface="Verdana" pitchFamily="34" charset="-122"/>
+                <a:cs typeface="Verdana" pitchFamily="34" charset="-120"/>
               </a:rPr>
               <a:t>Allow and deny lists, with exemptions that have to carry a reason.</a:t>
             </a:r>
@@ -6423,12 +7930,12 @@
         </p:nvSpPr>
         <p:spPr>
           <a:xfrm>
-            <a:off x="815975" y="3590826"/>
-            <a:ext cx="3397250" cy="1833811"/>
+            <a:off x="815975" y="3794472"/>
+            <a:ext cx="3397250" cy="2044353"/>
           </a:xfrm>
           <a:prstGeom prst="roundRect">
             <a:avLst>
-              <a:gd name="adj" fmla="val 5367"/>
+              <a:gd name="adj" fmla="val 4814"/>
             </a:avLst>
           </a:prstGeom>
           <a:solidFill>
@@ -6457,7 +7964,7 @@
         </p:blipFill>
         <p:spPr>
           <a:xfrm>
-            <a:off x="1047750" y="3822601"/>
+            <a:off x="1047750" y="4026247"/>
             <a:ext cx="279400" cy="279400"/>
           </a:xfrm>
           <a:prstGeom prst="rect">
@@ -6473,7 +7980,7 @@
         </p:nvSpPr>
         <p:spPr>
           <a:xfrm>
-            <a:off x="1047750" y="4165501"/>
+            <a:off x="1047750" y="4369147"/>
             <a:ext cx="3021711" cy="269230"/>
           </a:xfrm>
           <a:prstGeom prst="rect">
@@ -6499,9 +8006,9 @@
                 <a:solidFill>
                   <a:srgbClr val="10212B"/>
                 </a:solidFill>
-                <a:latin typeface="IBM Plex Sans" pitchFamily="34" charset="0"/>
-                <a:ea typeface="IBM Plex Sans" pitchFamily="34" charset="-122"/>
-                <a:cs typeface="IBM Plex Sans" pitchFamily="34" charset="-120"/>
+                <a:latin typeface="Verdana" pitchFamily="34" charset="0"/>
+                <a:ea typeface="Verdana" pitchFamily="34" charset="-122"/>
+                <a:cs typeface="Verdana" pitchFamily="34" charset="-120"/>
               </a:rPr>
               <a:t>Provenance</a:t>
             </a:r>
@@ -6517,7 +8024,7 @@
         </p:nvSpPr>
         <p:spPr>
           <a:xfrm>
-            <a:off x="1047750" y="4472831"/>
+            <a:off x="1047750" y="4676477"/>
             <a:ext cx="3021711" cy="745430"/>
           </a:xfrm>
           <a:prstGeom prst="rect">
@@ -6543,9 +8050,9 @@
                 <a:solidFill>
                   <a:srgbClr val="4A5568"/>
                 </a:solidFill>
-                <a:latin typeface="IBM Plex Sans" pitchFamily="34" charset="0"/>
-                <a:ea typeface="IBM Plex Sans" pitchFamily="34" charset="-122"/>
-                <a:cs typeface="IBM Plex Sans" pitchFamily="34" charset="-120"/>
+                <a:latin typeface="Verdana" pitchFamily="34" charset="0"/>
+                <a:ea typeface="Verdana" pitchFamily="34" charset="-122"/>
+                <a:cs typeface="Verdana" pitchFamily="34" charset="-120"/>
               </a:rPr>
               <a:t>Every fact records where it came from, including the sources that came back empty.</a:t>
             </a:r>
@@ -6561,12 +8068,12 @@
         </p:nvSpPr>
         <p:spPr>
           <a:xfrm>
-            <a:off x="4397375" y="3590826"/>
-            <a:ext cx="3397250" cy="1833811"/>
+            <a:off x="4397375" y="3794472"/>
+            <a:ext cx="3397250" cy="2044353"/>
           </a:xfrm>
           <a:prstGeom prst="roundRect">
             <a:avLst>
-              <a:gd name="adj" fmla="val 5367"/>
+              <a:gd name="adj" fmla="val 4814"/>
             </a:avLst>
           </a:prstGeom>
           <a:solidFill>
@@ -6582,7 +8089,7 @@
       </p:sp>
       <p:pic>
         <p:nvPicPr>
-          <p:cNvPr id="20" name="Image 4" descr="Chart">    </p:cNvPr>
+          <p:cNvPr id="20" name="Image 4" descr="Verified">    </p:cNvPr>
           <p:cNvPicPr>
             <a:picLocks noChangeAspect="1"/>
           </p:cNvPicPr>
@@ -6590,13 +8097,13 @@
         </p:nvPicPr>
         <p:blipFill>
           <a:blip r:embed="rId5"/>
-          <a:srcRect l="0" r="0" t="0" b="0"/>
+          <a:srcRect l="0" r="0" t="-145" b="-145"/>
           <a:stretch/>
         </p:blipFill>
         <p:spPr>
           <a:xfrm>
-            <a:off x="4629150" y="3822601"/>
-            <a:ext cx="279400" cy="279400"/>
+            <a:off x="4629150" y="4026247"/>
+            <a:ext cx="279400" cy="273844"/>
           </a:xfrm>
           <a:prstGeom prst="rect">
             <a:avLst/>
@@ -6611,8 +8118,8 @@
         </p:nvSpPr>
         <p:spPr>
           <a:xfrm>
-            <a:off x="4629150" y="4165501"/>
-            <a:ext cx="3021711" cy="269230"/>
+            <a:off x="4629150" y="4363591"/>
+            <a:ext cx="3021711" cy="264368"/>
           </a:xfrm>
           <a:prstGeom prst="rect">
             <a:avLst/>
@@ -6637,11 +8144,11 @@
                 <a:solidFill>
                   <a:srgbClr val="10212B"/>
                 </a:solidFill>
-                <a:latin typeface="IBM Plex Sans" pitchFamily="34" charset="0"/>
-                <a:ea typeface="IBM Plex Sans" pitchFamily="34" charset="-122"/>
-                <a:cs typeface="IBM Plex Sans" pitchFamily="34" charset="-120"/>
+                <a:latin typeface="Verdana" pitchFamily="34" charset="0"/>
+                <a:ea typeface="Verdana" pitchFamily="34" charset="-122"/>
+                <a:cs typeface="Verdana" pitchFamily="34" charset="-120"/>
               </a:rPr>
-              <a:t>Release-to-release diff</a:t>
+              <a:t>Supplier SBOMs</a:t>
             </a:r>
             <a:endParaRPr lang="en-US" sz="1600" dirty="0"/>
           </a:p>
@@ -6655,8 +8162,8 @@
         </p:nvSpPr>
         <p:spPr>
           <a:xfrm>
-            <a:off x="4629150" y="4472831"/>
-            <a:ext cx="3021711" cy="505420"/>
+            <a:off x="4629150" y="4666059"/>
+            <a:ext cx="3021711" cy="966391"/>
           </a:xfrm>
           <a:prstGeom prst="rect">
             <a:avLst/>
@@ -6672,22 +8179,22 @@
           <a:p>
             <a:pPr algn="l" indent="0" marL="0">
               <a:lnSpc>
-                <a:spcPts val="1890"/>
+                <a:spcPts val="1855"/>
               </a:lnSpc>
               <a:buNone/>
             </a:pPr>
             <a:r>
-              <a:rPr lang="en-US" sz="1400" dirty="0">
+              <a:rPr lang="en-US" sz="1374" dirty="0">
                 <a:solidFill>
                   <a:srgbClr val="4A5568"/>
                 </a:solidFill>
-                <a:latin typeface="IBM Plex Sans" pitchFamily="34" charset="0"/>
-                <a:ea typeface="IBM Plex Sans" pitchFamily="34" charset="-122"/>
-                <a:cs typeface="IBM Plex Sans" pitchFamily="34" charset="-120"/>
+                <a:latin typeface="Verdana" pitchFamily="34" charset="0"/>
+                <a:ea typeface="Verdana" pitchFamily="34" charset="-122"/>
+                <a:cs typeface="Verdana" pitchFamily="34" charset="-120"/>
               </a:rPr>
-              <a:t>What got added, dropped, upgraded or relicensed since last time.</a:t>
-            </a:r>
-            <a:endParaRPr lang="en-US" sz="1400" dirty="0"/>
+              <a:t>Grades a vendor's document before we trust it, applies their VEX, and merges it with ours into one.</a:t>
+            </a:r>
+            <a:endParaRPr lang="en-US" sz="1374" dirty="0"/>
           </a:p>
         </p:txBody>
       </p:sp>
@@ -6699,12 +8206,12 @@
         </p:nvSpPr>
         <p:spPr>
           <a:xfrm>
-            <a:off x="7978775" y="3590826"/>
-            <a:ext cx="3397250" cy="1833811"/>
+            <a:off x="7978775" y="3794472"/>
+            <a:ext cx="3397250" cy="2044353"/>
           </a:xfrm>
           <a:prstGeom prst="roundRect">
             <a:avLst>
-              <a:gd name="adj" fmla="val 5367"/>
+              <a:gd name="adj" fmla="val 4814"/>
             </a:avLst>
           </a:prstGeom>
           <a:solidFill>
@@ -6728,13 +8235,13 @@
         </p:nvPicPr>
         <p:blipFill>
           <a:blip r:embed="rId6"/>
-          <a:srcRect l="0" r="0" t="0" b="0"/>
+          <a:srcRect l="0" r="0" t="-145" b="-145"/>
           <a:stretch/>
         </p:blipFill>
         <p:spPr>
           <a:xfrm>
-            <a:off x="8210550" y="3822601"/>
-            <a:ext cx="279400" cy="279400"/>
+            <a:off x="8210550" y="4026247"/>
+            <a:ext cx="279400" cy="273844"/>
           </a:xfrm>
           <a:prstGeom prst="rect">
             <a:avLst/>
@@ -6749,8 +8256,8 @@
         </p:nvSpPr>
         <p:spPr>
           <a:xfrm>
-            <a:off x="8210550" y="4165501"/>
-            <a:ext cx="3021711" cy="269230"/>
+            <a:off x="8210550" y="4363591"/>
+            <a:ext cx="3021711" cy="264368"/>
           </a:xfrm>
           <a:prstGeom prst="rect">
             <a:avLst/>
@@ -6775,11 +8282,11 @@
                 <a:solidFill>
                   <a:srgbClr val="10212B"/>
                 </a:solidFill>
-                <a:latin typeface="IBM Plex Sans" pitchFamily="34" charset="0"/>
-                <a:ea typeface="IBM Plex Sans" pitchFamily="34" charset="-122"/>
-                <a:cs typeface="IBM Plex Sans" pitchFamily="34" charset="-120"/>
+                <a:latin typeface="Verdana" pitchFamily="34" charset="0"/>
+                <a:ea typeface="Verdana" pitchFamily="34" charset="-122"/>
+                <a:cs typeface="Verdana" pitchFamily="34" charset="-120"/>
               </a:rPr>
-              <a:t>A GitHub Action</a:t>
+              <a:t>Any Python project</a:t>
             </a:r>
             <a:endParaRPr lang="en-US" sz="1600" dirty="0"/>
           </a:p>
@@ -6793,8 +8300,8 @@
         </p:nvSpPr>
         <p:spPr>
           <a:xfrm>
-            <a:off x="8210550" y="4472831"/>
-            <a:ext cx="3021711" cy="505420"/>
+            <a:off x="8210550" y="4666059"/>
+            <a:ext cx="3021711" cy="966391"/>
           </a:xfrm>
           <a:prstGeom prst="rect">
             <a:avLst/>
@@ -6810,22 +8317,22 @@
           <a:p>
             <a:pPr algn="l" indent="0" marL="0">
               <a:lnSpc>
-                <a:spcPts val="1890"/>
+                <a:spcPts val="1855"/>
               </a:lnSpc>
               <a:buNone/>
             </a:pPr>
             <a:r>
-              <a:rPr lang="en-US" sz="1400" dirty="0">
+              <a:rPr lang="en-US" sz="1374" dirty="0">
                 <a:solidFill>
                   <a:srgbClr val="4A5568"/>
                 </a:solidFill>
-                <a:latin typeface="IBM Plex Sans" pitchFamily="34" charset="0"/>
-                <a:ea typeface="IBM Plex Sans" pitchFamily="34" charset="-122"/>
-                <a:cs typeface="IBM Plex Sans" pitchFamily="34" charset="-120"/>
+                <a:latin typeface="Verdana" pitchFamily="34" charset="0"/>
+                <a:ea typeface="Verdana" pitchFamily="34" charset="-122"/>
+                <a:cs typeface="Verdana" pitchFamily="34" charset="-120"/>
               </a:rPr>
-              <a:t>Drop it in and the document comes out attached to the build.</a:t>
-            </a:r>
-            <a:endParaRPr lang="en-US" sz="1400" dirty="0"/>
+              <a:t>pixi, uv, Poetry, PDM, conda-lock or pinned pip. From PyPI, a GitHub Action or a pre-commit hook.</a:t>
+            </a:r>
+            <a:endParaRPr lang="en-US" sz="1374" dirty="0"/>
           </a:p>
         </p:txBody>
       </p:sp>
@@ -6865,7 +8372,9 @@
         <p:nvSpPr>
           <p:cNvPr id="2" name="Text 0"/>
           <p:cNvSpPr/>
-          <p:nvPr/>
+          <p:nvPr>
+            <p:ph type="title"/>
+          </p:nvPr>
         </p:nvSpPr>
         <p:spPr>
           <a:xfrm>
@@ -6891,13 +8400,13 @@
               <a:buNone/>
             </a:pPr>
             <a:r>
-              <a:rPr lang="en-US" sz="3600" b="1" dirty="0">
+              <a:rPr lang="en-US" sz="3600" b="1" i="0" dirty="0">
                 <a:solidFill>
                   <a:srgbClr val="10212B"/>
                 </a:solidFill>
-                <a:latin typeface="IBM Plex Sans" pitchFamily="34" charset="0"/>
-                <a:ea typeface="IBM Plex Sans" pitchFamily="34" charset="-122"/>
-                <a:cs typeface="IBM Plex Sans" pitchFamily="34" charset="-120"/>
+                <a:latin typeface="Verdana" pitchFamily="34" charset="0"/>
+                <a:ea typeface="Verdana" pitchFamily="34" charset="-122"/>
+                <a:cs typeface="Verdana" pitchFamily="34" charset="-120"/>
               </a:rPr>
               <a:t>What it isn't</a:t>
             </a:r>
@@ -6966,9 +8475,9 @@
                 <a:solidFill>
                   <a:srgbClr val="10212B"/>
                 </a:solidFill>
-                <a:latin typeface="IBM Plex Sans" pitchFamily="34" charset="0"/>
-                <a:ea typeface="IBM Plex Sans" pitchFamily="34" charset="-122"/>
-                <a:cs typeface="IBM Plex Sans" pitchFamily="34" charset="-120"/>
+                <a:latin typeface="Verdana" pitchFamily="34" charset="0"/>
+                <a:ea typeface="Verdana" pitchFamily="34" charset="-122"/>
+                <a:cs typeface="Verdana" pitchFamily="34" charset="-120"/>
               </a:rPr>
               <a:t>Not a vulnerability scanner</a:t>
             </a:r>
@@ -7010,9 +8519,9 @@
                 <a:solidFill>
                   <a:srgbClr val="4A5568"/>
                 </a:solidFill>
-                <a:latin typeface="IBM Plex Sans" pitchFamily="34" charset="0"/>
-                <a:ea typeface="IBM Plex Sans" pitchFamily="34" charset="-122"/>
-                <a:cs typeface="IBM Plex Sans" pitchFamily="34" charset="-120"/>
+                <a:latin typeface="Verdana" pitchFamily="34" charset="0"/>
+                <a:ea typeface="Verdana" pitchFamily="34" charset="-122"/>
+                <a:cs typeface="Verdana" pitchFamily="34" charset="-120"/>
               </a:rPr>
               <a:t>It tells you what you're shipping and hands that to whatever scans it. It doesn't replace the security tooling we already pay for.</a:t>
             </a:r>
@@ -7081,9 +8590,9 @@
                 <a:solidFill>
                   <a:srgbClr val="10212B"/>
                 </a:solidFill>
-                <a:latin typeface="IBM Plex Sans" pitchFamily="34" charset="0"/>
-                <a:ea typeface="IBM Plex Sans" pitchFamily="34" charset="-122"/>
-                <a:cs typeface="IBM Plex Sans" pitchFamily="34" charset="-120"/>
+                <a:latin typeface="Verdana" pitchFamily="34" charset="0"/>
+                <a:ea typeface="Verdana" pitchFamily="34" charset="-122"/>
+                <a:cs typeface="Verdana" pitchFamily="34" charset="-120"/>
               </a:rPr>
               <a:t>Not a policy engine for the whole company</a:t>
             </a:r>
@@ -7125,9 +8634,9 @@
                 <a:solidFill>
                   <a:srgbClr val="4A5568"/>
                 </a:solidFill>
-                <a:latin typeface="IBM Plex Sans" pitchFamily="34" charset="0"/>
-                <a:ea typeface="IBM Plex Sans" pitchFamily="34" charset="-122"/>
-                <a:cs typeface="IBM Plex Sans" pitchFamily="34" charset="-120"/>
+                <a:latin typeface="Verdana" pitchFamily="34" charset="0"/>
+                <a:ea typeface="Verdana" pitchFamily="34" charset="-122"/>
+                <a:cs typeface="Verdana" pitchFamily="34" charset="-120"/>
               </a:rPr>
               <a:t>It enforces license and vulnerability rules for one build. Governance across every team is a different problem with different owners.</a:t>
             </a:r>
@@ -7196,9 +8705,9 @@
                 <a:solidFill>
                   <a:srgbClr val="10212B"/>
                 </a:solidFill>
-                <a:latin typeface="IBM Plex Sans" pitchFamily="34" charset="0"/>
-                <a:ea typeface="IBM Plex Sans" pitchFamily="34" charset="-122"/>
-                <a:cs typeface="IBM Plex Sans" pitchFamily="34" charset="-120"/>
+                <a:latin typeface="Verdana" pitchFamily="34" charset="0"/>
+                <a:ea typeface="Verdana" pitchFamily="34" charset="-122"/>
+                <a:cs typeface="Verdana" pitchFamily="34" charset="-120"/>
               </a:rPr>
               <a:t>Not a promise that nothing is missing</a:t>
             </a:r>
@@ -7240,9 +8749,9 @@
                 <a:solidFill>
                   <a:srgbClr val="4A5568"/>
                 </a:solidFill>
-                <a:latin typeface="IBM Plex Sans" pitchFamily="34" charset="0"/>
-                <a:ea typeface="IBM Plex Sans" pitchFamily="34" charset="-122"/>
-                <a:cs typeface="IBM Plex Sans" pitchFamily="34" charset="-120"/>
+                <a:latin typeface="Verdana" pitchFamily="34" charset="0"/>
+                <a:ea typeface="Verdana" pitchFamily="34" charset="-122"/>
+                <a:cs typeface="Verdana" pitchFamily="34" charset="-120"/>
               </a:rPr>
               <a:t>When an upstream publishes no license or no advisory, the document says so instead of filling in a guess. You can tell an unanswered question from an empty answer.</a:t>
             </a:r>
@@ -7286,12 +8795,14 @@
         <p:nvSpPr>
           <p:cNvPr id="2" name="Text 0"/>
           <p:cNvSpPr/>
-          <p:nvPr/>
+          <p:nvPr>
+            <p:ph type="title"/>
+          </p:nvPr>
         </p:nvSpPr>
         <p:spPr>
           <a:xfrm>
             <a:off x="812800" y="812800"/>
-            <a:ext cx="10883392" cy="528290"/>
+            <a:ext cx="10883392" cy="480814"/>
           </a:xfrm>
           <a:prstGeom prst="rect">
             <a:avLst/>
@@ -7307,22 +8818,22 @@
           <a:p>
             <a:pPr algn="l" indent="0" marL="0">
               <a:lnSpc>
-                <a:spcPts val="3960"/>
+                <a:spcPts val="3614"/>
               </a:lnSpc>
               <a:buNone/>
             </a:pPr>
             <a:r>
-              <a:rPr lang="en-US" sz="3600" b="1" dirty="0">
+              <a:rPr lang="en-US" sz="3285" b="1" i="0" dirty="0">
                 <a:solidFill>
                   <a:srgbClr val="10212B"/>
                 </a:solidFill>
-                <a:latin typeface="IBM Plex Sans" pitchFamily="34" charset="0"/>
-                <a:ea typeface="IBM Plex Sans" pitchFamily="34" charset="-122"/>
-                <a:cs typeface="IBM Plex Sans" pitchFamily="34" charset="-120"/>
+                <a:latin typeface="Verdana" pitchFamily="34" charset="0"/>
+                <a:ea typeface="Verdana" pitchFamily="34" charset="-122"/>
+                <a:cs typeface="Verdana" pitchFamily="34" charset="-120"/>
               </a:rPr>
               <a:t>What a team gets out of it</a:t>
             </a:r>
-            <a:endParaRPr lang="en-US" sz="3600" dirty="0"/>
+            <a:endParaRPr lang="en-US" sz="3285" dirty="0"/>
           </a:p>
         </p:txBody>
       </p:sp>
@@ -7334,7 +8845,7 @@
         </p:nvSpPr>
         <p:spPr>
           <a:xfrm>
-            <a:off x="812800" y="1576040"/>
+            <a:off x="812800" y="1528564"/>
             <a:ext cx="10566400" cy="0"/>
           </a:xfrm>
           <a:prstGeom prst="line">
@@ -7359,8 +8870,8 @@
         </p:nvSpPr>
         <p:spPr>
           <a:xfrm>
-            <a:off x="819150" y="1569690"/>
-            <a:ext cx="0" cy="3251200"/>
+            <a:off x="819150" y="1522214"/>
+            <a:ext cx="0" cy="3824238"/>
           </a:xfrm>
           <a:prstGeom prst="line">
             <a:avLst/>
@@ -7391,8 +8902,8 @@
           </p:nvPr>
         </p:nvGraphicFramePr>
         <p:xfrm>
-          <a:off x="965200" y="1696690"/>
-          <a:ext cx="10274300" cy="3009900"/>
+          <a:off x="965200" y="1649214"/>
+          <a:ext cx="10274300" cy="3582938"/>
         </p:xfrm>
         <a:graphic>
           <a:graphicData uri="http://schemas.openxmlformats.org/drawingml/2006/table">
@@ -7403,7 +8914,7 @@
                 <a:gridCol w="3493262"/>
                 <a:gridCol w="2054860"/>
               </a:tblGrid>
-              <a:tr h="412750">
+              <a:tr h="401092">
                 <a:tc>
                   <a:txBody>
                     <a:bodyPr/>
@@ -7411,29 +8922,29 @@
                     <a:p>
                       <a:pPr indent="0" marL="0">
                         <a:lnSpc>
-                          <a:spcPts val="2100"/>
+                          <a:spcPts val="2034"/>
                         </a:lnSpc>
                         <a:buNone/>
                       </a:pPr>
                       <a:r>
-                        <a:rPr lang="en-US" sz="1500" b="1" dirty="0">
+                        <a:rPr lang="en-US" sz="1453" b="1" dirty="0">
                           <a:solidFill>
                             <a:srgbClr val="F7F8F6"/>
                           </a:solidFill>
-                          <a:latin typeface="IBM Plex Sans" pitchFamily="34" charset="0"/>
-                          <a:ea typeface="IBM Plex Sans" pitchFamily="34" charset="-122"/>
-                          <a:cs typeface="IBM Plex Sans" pitchFamily="34" charset="-120"/>
+                          <a:latin typeface="Verdana" pitchFamily="34" charset="0"/>
+                          <a:ea typeface="Verdana" pitchFamily="34" charset="-122"/>
+                          <a:cs typeface="Verdana" pitchFamily="34" charset="-120"/>
                         </a:rPr>
                         <a:t>How it goes today</a:t>
                       </a:r>
-                      <a:endParaRPr lang="en-US" sz="1500" dirty="0">
-                        <a:latin typeface="IBM Plex Sans" charset="0"/>
-                        <a:ea typeface="IBM Plex Sans" charset="0"/>
-                        <a:cs typeface="IBM Plex Sans" charset="0"/>
+                      <a:endParaRPr lang="en-US" sz="1453" dirty="0">
+                        <a:latin typeface="Verdana" charset="0"/>
+                        <a:ea typeface="Verdana" charset="0"/>
+                        <a:cs typeface="Verdana" charset="0"/>
                       </a:endParaRPr>
                     </a:p>
                   </a:txBody>
-                  <a:tcPr marL="66675" marR="66675" marT="66675" marB="66675" anchor="t">
+                  <a:tcPr marL="64591" marR="64591" marT="64591" marB="64591" anchor="t">
                     <a:lnL w="0" cap="flat" cmpd="sng" algn="ctr">
                       <a:noFill/>
                     </a:lnL>
@@ -7470,29 +8981,29 @@
                     <a:p>
                       <a:pPr indent="0" marL="0">
                         <a:lnSpc>
-                          <a:spcPts val="2100"/>
+                          <a:spcPts val="2034"/>
                         </a:lnSpc>
                         <a:buNone/>
                       </a:pPr>
                       <a:r>
-                        <a:rPr lang="en-US" sz="1500" b="1" dirty="0">
+                        <a:rPr lang="en-US" sz="1453" b="1" dirty="0">
                           <a:solidFill>
                             <a:srgbClr val="F7F8F6"/>
                           </a:solidFill>
-                          <a:latin typeface="IBM Plex Sans" pitchFamily="34" charset="0"/>
-                          <a:ea typeface="IBM Plex Sans" pitchFamily="34" charset="-122"/>
-                          <a:cs typeface="IBM Plex Sans" pitchFamily="34" charset="-120"/>
+                          <a:latin typeface="Verdana" pitchFamily="34" charset="0"/>
+                          <a:ea typeface="Verdana" pitchFamily="34" charset="-122"/>
+                          <a:cs typeface="Verdana" pitchFamily="34" charset="-120"/>
                         </a:rPr>
                         <a:t>With this in CI</a:t>
                       </a:r>
-                      <a:endParaRPr lang="en-US" sz="1500" dirty="0">
-                        <a:latin typeface="IBM Plex Sans" charset="0"/>
-                        <a:ea typeface="IBM Plex Sans" charset="0"/>
-                        <a:cs typeface="IBM Plex Sans" charset="0"/>
+                      <a:endParaRPr lang="en-US" sz="1453" dirty="0">
+                        <a:latin typeface="Verdana" charset="0"/>
+                        <a:ea typeface="Verdana" charset="0"/>
+                        <a:cs typeface="Verdana" charset="0"/>
                       </a:endParaRPr>
                     </a:p>
                   </a:txBody>
-                  <a:tcPr marL="66675" marR="66675" marT="66675" marB="66675" anchor="t">
+                  <a:tcPr marL="64591" marR="64591" marT="64591" marB="64591" anchor="t">
                     <a:lnL w="12700" cap="flat" cmpd="sng" algn="ctr">
                       <a:solidFill>
                         <a:srgbClr val="111E26"/>
@@ -7535,29 +9046,29 @@
                     <a:p>
                       <a:pPr indent="0" marL="0">
                         <a:lnSpc>
-                          <a:spcPts val="2100"/>
+                          <a:spcPts val="2034"/>
                         </a:lnSpc>
                         <a:buNone/>
                       </a:pPr>
                       <a:r>
-                        <a:rPr lang="en-US" sz="1500" b="1" dirty="0">
+                        <a:rPr lang="en-US" sz="1453" b="1" dirty="0">
                           <a:solidFill>
                             <a:srgbClr val="F7F8F6"/>
                           </a:solidFill>
-                          <a:latin typeface="IBM Plex Sans" pitchFamily="34" charset="0"/>
-                          <a:ea typeface="IBM Plex Sans" pitchFamily="34" charset="-122"/>
-                          <a:cs typeface="IBM Plex Sans" pitchFamily="34" charset="-120"/>
+                          <a:latin typeface="Verdana" pitchFamily="34" charset="0"/>
+                          <a:ea typeface="Verdana" pitchFamily="34" charset="-122"/>
+                          <a:cs typeface="Verdana" pitchFamily="34" charset="-120"/>
                         </a:rPr>
                         <a:t>Signal</a:t>
                       </a:r>
-                      <a:endParaRPr lang="en-US" sz="1500" dirty="0">
-                        <a:latin typeface="IBM Plex Sans" charset="0"/>
-                        <a:ea typeface="IBM Plex Sans" charset="0"/>
-                        <a:cs typeface="IBM Plex Sans" charset="0"/>
+                      <a:endParaRPr lang="en-US" sz="1453" dirty="0">
+                        <a:latin typeface="Verdana" charset="0"/>
+                        <a:ea typeface="Verdana" charset="0"/>
+                        <a:cs typeface="Verdana" charset="0"/>
                       </a:endParaRPr>
                     </a:p>
                   </a:txBody>
-                  <a:tcPr marL="66675" marR="66675" marT="66675" marB="66675" anchor="t">
+                  <a:tcPr marL="64591" marR="64591" marT="64591" marB="64591" anchor="t">
                     <a:lnL w="12700" cap="flat" cmpd="sng" algn="ctr">
                       <a:solidFill>
                         <a:srgbClr val="111E26"/>
@@ -7594,7 +9105,7 @@
                   </a:tcPr>
                 </a:tc>
               </a:tr>
-              <a:tr h="412750">
+              <a:tr h="659457">
                 <a:tc>
                   <a:txBody>
                     <a:bodyPr/>
@@ -7602,29 +9113,29 @@
                     <a:p>
                       <a:pPr indent="0" marL="0">
                         <a:lnSpc>
-                          <a:spcPts val="2100"/>
+                          <a:spcPts val="2034"/>
                         </a:lnSpc>
                         <a:buNone/>
                       </a:pPr>
                       <a:r>
-                        <a:rPr lang="en-US" sz="1500" dirty="0">
+                        <a:rPr lang="en-US" sz="1453" dirty="0">
                           <a:solidFill>
                             <a:srgbClr val="10212B"/>
                           </a:solidFill>
-                          <a:latin typeface="IBM Plex Sans" pitchFamily="34" charset="0"/>
-                          <a:ea typeface="IBM Plex Sans" pitchFamily="34" charset="-122"/>
-                          <a:cs typeface="IBM Plex Sans" pitchFamily="34" charset="-120"/>
+                          <a:latin typeface="Verdana" pitchFamily="34" charset="0"/>
+                          <a:ea typeface="Verdana" pitchFamily="34" charset="-122"/>
+                          <a:cs typeface="Verdana" pitchFamily="34" charset="-120"/>
                         </a:rPr>
                         <a:t>Someone asks if we're exposed to a CVE</a:t>
                       </a:r>
-                      <a:endParaRPr lang="en-US" sz="1500" dirty="0">
-                        <a:latin typeface="IBM Plex Sans" charset="0"/>
-                        <a:ea typeface="IBM Plex Sans" charset="0"/>
-                        <a:cs typeface="IBM Plex Sans" charset="0"/>
+                      <a:endParaRPr lang="en-US" sz="1453" dirty="0">
+                        <a:latin typeface="Verdana" charset="0"/>
+                        <a:ea typeface="Verdana" charset="0"/>
+                        <a:cs typeface="Verdana" charset="0"/>
                       </a:endParaRPr>
                     </a:p>
                   </a:txBody>
-                  <a:tcPr marL="66675" marR="66675" marT="66675" marB="66675" anchor="t">
+                  <a:tcPr marL="64591" marR="64591" marT="64591" marB="64591" anchor="t">
                     <a:lnL w="0" cap="flat" cmpd="sng" algn="ctr">
                       <a:noFill/>
                     </a:lnL>
@@ -7664,29 +9175,29 @@
                     <a:p>
                       <a:pPr indent="0" marL="0">
                         <a:lnSpc>
-                          <a:spcPts val="2100"/>
+                          <a:spcPts val="2034"/>
                         </a:lnSpc>
                         <a:buNone/>
                       </a:pPr>
                       <a:r>
-                        <a:rPr lang="en-US" sz="1500" dirty="0">
+                        <a:rPr lang="en-US" sz="1453" dirty="0">
                           <a:solidFill>
                             <a:srgbClr val="10212B"/>
                           </a:solidFill>
-                          <a:latin typeface="IBM Plex Sans" pitchFamily="34" charset="0"/>
-                          <a:ea typeface="IBM Plex Sans" pitchFamily="34" charset="-122"/>
-                          <a:cs typeface="IBM Plex Sans" pitchFamily="34" charset="-120"/>
+                          <a:latin typeface="Verdana" pitchFamily="34" charset="0"/>
+                          <a:ea typeface="Verdana" pitchFamily="34" charset="-122"/>
+                          <a:cs typeface="Verdana" pitchFamily="34" charset="-120"/>
                         </a:rPr>
                         <a:t>Search the document for that release</a:t>
                       </a:r>
-                      <a:endParaRPr lang="en-US" sz="1500" dirty="0">
-                        <a:latin typeface="IBM Plex Sans" charset="0"/>
-                        <a:ea typeface="IBM Plex Sans" charset="0"/>
-                        <a:cs typeface="IBM Plex Sans" charset="0"/>
+                      <a:endParaRPr lang="en-US" sz="1453" dirty="0">
+                        <a:latin typeface="Verdana" charset="0"/>
+                        <a:ea typeface="Verdana" charset="0"/>
+                        <a:cs typeface="Verdana" charset="0"/>
                       </a:endParaRPr>
                     </a:p>
                   </a:txBody>
-                  <a:tcPr marL="66675" marR="66675" marT="66675" marB="66675" anchor="t">
+                  <a:tcPr marL="64591" marR="64591" marT="64591" marB="64591" anchor="t">
                     <a:lnL w="12700" cap="flat" cmpd="sng" algn="ctr">
                       <a:solidFill>
                         <a:srgbClr val="C5C6C4"/>
@@ -7732,29 +9243,29 @@
                     <a:p>
                       <a:pPr indent="0" marL="0">
                         <a:lnSpc>
-                          <a:spcPts val="2100"/>
+                          <a:spcPts val="2034"/>
                         </a:lnSpc>
                         <a:buNone/>
                       </a:pPr>
                       <a:r>
-                        <a:rPr lang="en-US" sz="1500" dirty="0">
+                        <a:rPr lang="en-US" sz="1453" dirty="0">
                           <a:solidFill>
                             <a:srgbClr val="10212B"/>
                           </a:solidFill>
-                          <a:latin typeface="IBM Plex Sans" pitchFamily="34" charset="0"/>
-                          <a:ea typeface="IBM Plex Sans" pitchFamily="34" charset="-122"/>
-                          <a:cs typeface="IBM Plex Sans" pitchFamily="34" charset="-120"/>
+                          <a:latin typeface="Verdana" pitchFamily="34" charset="0"/>
+                          <a:ea typeface="Verdana" pitchFamily="34" charset="-122"/>
+                          <a:cs typeface="Verdana" pitchFamily="34" charset="-120"/>
                         </a:rPr>
                         <a:t>Minutes, not a day</a:t>
                       </a:r>
-                      <a:endParaRPr lang="en-US" sz="1500" dirty="0">
-                        <a:latin typeface="IBM Plex Sans" charset="0"/>
-                        <a:ea typeface="IBM Plex Sans" charset="0"/>
-                        <a:cs typeface="IBM Plex Sans" charset="0"/>
+                      <a:endParaRPr lang="en-US" sz="1453" dirty="0">
+                        <a:latin typeface="Verdana" charset="0"/>
+                        <a:ea typeface="Verdana" charset="0"/>
+                        <a:cs typeface="Verdana" charset="0"/>
                       </a:endParaRPr>
                     </a:p>
                   </a:txBody>
-                  <a:tcPr marL="66675" marR="66675" marT="66675" marB="66675" anchor="t">
+                  <a:tcPr marL="64591" marR="64591" marT="64591" marB="64591" anchor="t">
                     <a:lnL w="12700" cap="flat" cmpd="sng" algn="ctr">
                       <a:solidFill>
                         <a:srgbClr val="C5C6C4"/>
@@ -7794,7 +9305,7 @@
                   </a:tcPr>
                 </a:tc>
               </a:tr>
-              <a:tr h="679450">
+              <a:tr h="659457">
                 <a:tc>
                   <a:txBody>
                     <a:bodyPr/>
@@ -7802,29 +9313,29 @@
                     <a:p>
                       <a:pPr indent="0" marL="0">
                         <a:lnSpc>
-                          <a:spcPts val="2100"/>
+                          <a:spcPts val="2034"/>
                         </a:lnSpc>
                         <a:buNone/>
                       </a:pPr>
                       <a:r>
-                        <a:rPr lang="en-US" sz="1500" dirty="0">
+                        <a:rPr lang="en-US" sz="1453" dirty="0">
                           <a:solidFill>
                             <a:srgbClr val="10212B"/>
                           </a:solidFill>
-                          <a:latin typeface="IBM Plex Sans" pitchFamily="34" charset="0"/>
-                          <a:ea typeface="IBM Plex Sans" pitchFamily="34" charset="-122"/>
-                          <a:cs typeface="IBM Plex Sans" pitchFamily="34" charset="-120"/>
+                          <a:latin typeface="Verdana" pitchFamily="34" charset="0"/>
+                          <a:ea typeface="Verdana" pitchFamily="34" charset="-122"/>
+                          <a:cs typeface="Verdana" pitchFamily="34" charset="-120"/>
                         </a:rPr>
                         <a:t>A copyleft license rides in on a transitive dependency</a:t>
                       </a:r>
-                      <a:endParaRPr lang="en-US" sz="1500" dirty="0">
-                        <a:latin typeface="IBM Plex Sans" charset="0"/>
-                        <a:ea typeface="IBM Plex Sans" charset="0"/>
-                        <a:cs typeface="IBM Plex Sans" charset="0"/>
+                      <a:endParaRPr lang="en-US" sz="1453" dirty="0">
+                        <a:latin typeface="Verdana" charset="0"/>
+                        <a:ea typeface="Verdana" charset="0"/>
+                        <a:cs typeface="Verdana" charset="0"/>
                       </a:endParaRPr>
                     </a:p>
                   </a:txBody>
-                  <a:tcPr marL="66675" marR="66675" marT="66675" marB="66675" anchor="t">
+                  <a:tcPr marL="64591" marR="64591" marT="64591" marB="64591" anchor="t">
                     <a:lnL w="0" cap="flat" cmpd="sng" algn="ctr">
                       <a:noFill/>
                     </a:lnL>
@@ -7867,29 +9378,29 @@
                     <a:p>
                       <a:pPr indent="0" marL="0">
                         <a:lnSpc>
-                          <a:spcPts val="2100"/>
+                          <a:spcPts val="2034"/>
                         </a:lnSpc>
                         <a:buNone/>
                       </a:pPr>
                       <a:r>
-                        <a:rPr lang="en-US" sz="1500" dirty="0">
+                        <a:rPr lang="en-US" sz="1453" dirty="0">
                           <a:solidFill>
                             <a:srgbClr val="10212B"/>
                           </a:solidFill>
-                          <a:latin typeface="IBM Plex Sans" pitchFamily="34" charset="0"/>
-                          <a:ea typeface="IBM Plex Sans" pitchFamily="34" charset="-122"/>
-                          <a:cs typeface="IBM Plex Sans" pitchFamily="34" charset="-120"/>
+                          <a:latin typeface="Verdana" pitchFamily="34" charset="0"/>
+                          <a:ea typeface="Verdana" pitchFamily="34" charset="-122"/>
+                          <a:cs typeface="Verdana" pitchFamily="34" charset="-120"/>
                         </a:rPr>
                         <a:t>The build stops before it ships</a:t>
                       </a:r>
-                      <a:endParaRPr lang="en-US" sz="1500" dirty="0">
-                        <a:latin typeface="IBM Plex Sans" charset="0"/>
-                        <a:ea typeface="IBM Plex Sans" charset="0"/>
-                        <a:cs typeface="IBM Plex Sans" charset="0"/>
+                      <a:endParaRPr lang="en-US" sz="1453" dirty="0">
+                        <a:latin typeface="Verdana" charset="0"/>
+                        <a:ea typeface="Verdana" charset="0"/>
+                        <a:cs typeface="Verdana" charset="0"/>
                       </a:endParaRPr>
                     </a:p>
                   </a:txBody>
-                  <a:tcPr marL="66675" marR="66675" marT="66675" marB="66675" anchor="t">
+                  <a:tcPr marL="64591" marR="64591" marT="64591" marB="64591" anchor="t">
                     <a:lnL w="12700" cap="flat" cmpd="sng" algn="ctr">
                       <a:solidFill>
                         <a:srgbClr val="BFC1BE"/>
@@ -7938,29 +9449,29 @@
                     <a:p>
                       <a:pPr indent="0" marL="0">
                         <a:lnSpc>
-                          <a:spcPts val="2100"/>
+                          <a:spcPts val="2034"/>
                         </a:lnSpc>
                         <a:buNone/>
                       </a:pPr>
                       <a:r>
-                        <a:rPr lang="en-US" sz="1500" dirty="0">
+                        <a:rPr lang="en-US" sz="1453" dirty="0">
                           <a:solidFill>
                             <a:srgbClr val="10212B"/>
                           </a:solidFill>
-                          <a:latin typeface="IBM Plex Sans" pitchFamily="34" charset="0"/>
-                          <a:ea typeface="IBM Plex Sans" pitchFamily="34" charset="-122"/>
-                          <a:cs typeface="IBM Plex Sans" pitchFamily="34" charset="-120"/>
+                          <a:latin typeface="Verdana" pitchFamily="34" charset="0"/>
+                          <a:ea typeface="Verdana" pitchFamily="34" charset="-122"/>
+                          <a:cs typeface="Verdana" pitchFamily="34" charset="-120"/>
                         </a:rPr>
                         <a:t>Exit 3</a:t>
                       </a:r>
-                      <a:endParaRPr lang="en-US" sz="1500" dirty="0">
-                        <a:latin typeface="IBM Plex Sans" charset="0"/>
-                        <a:ea typeface="IBM Plex Sans" charset="0"/>
-                        <a:cs typeface="IBM Plex Sans" charset="0"/>
+                      <a:endParaRPr lang="en-US" sz="1453" dirty="0">
+                        <a:latin typeface="Verdana" charset="0"/>
+                        <a:ea typeface="Verdana" charset="0"/>
+                        <a:cs typeface="Verdana" charset="0"/>
                       </a:endParaRPr>
                     </a:p>
                   </a:txBody>
-                  <a:tcPr marL="66675" marR="66675" marT="66675" marB="66675" anchor="t">
+                  <a:tcPr marL="64591" marR="64591" marT="64591" marB="64591" anchor="t">
                     <a:lnL w="12700" cap="flat" cmpd="sng" algn="ctr">
                       <a:solidFill>
                         <a:srgbClr val="BFC1BE"/>
@@ -8003,7 +9514,7 @@
                   </a:tcPr>
                 </a:tc>
               </a:tr>
-              <a:tr h="679450">
+              <a:tr h="659507">
                 <a:tc>
                   <a:txBody>
                     <a:bodyPr/>
@@ -8011,29 +9522,29 @@
                     <a:p>
                       <a:pPr indent="0" marL="0">
                         <a:lnSpc>
-                          <a:spcPts val="2100"/>
+                          <a:spcPts val="2034"/>
                         </a:lnSpc>
                         <a:buNone/>
                       </a:pPr>
                       <a:r>
-                        <a:rPr lang="en-US" sz="1500" dirty="0">
+                        <a:rPr lang="en-US" sz="1453" dirty="0">
                           <a:solidFill>
                             <a:srgbClr val="10212B"/>
                           </a:solidFill>
-                          <a:latin typeface="IBM Plex Sans" pitchFamily="34" charset="0"/>
-                          <a:ea typeface="IBM Plex Sans" pitchFamily="34" charset="-122"/>
-                          <a:cs typeface="IBM Plex Sans" pitchFamily="34" charset="-120"/>
+                          <a:latin typeface="Verdana" pitchFamily="34" charset="0"/>
+                          <a:ea typeface="Verdana" pitchFamily="34" charset="-122"/>
+                          <a:cs typeface="Verdana" pitchFamily="34" charset="-120"/>
                         </a:rPr>
-                        <a:t>A dependency has a known-exploited vulnerability</a:t>
+                        <a:t>A dependency is known exploited, or likely to be</a:t>
                       </a:r>
-                      <a:endParaRPr lang="en-US" sz="1500" dirty="0">
-                        <a:latin typeface="IBM Plex Sans" charset="0"/>
-                        <a:ea typeface="IBM Plex Sans" charset="0"/>
-                        <a:cs typeface="IBM Plex Sans" charset="0"/>
+                      <a:endParaRPr lang="en-US" sz="1453" dirty="0">
+                        <a:latin typeface="Verdana" charset="0"/>
+                        <a:ea typeface="Verdana" charset="0"/>
+                        <a:cs typeface="Verdana" charset="0"/>
                       </a:endParaRPr>
                     </a:p>
                   </a:txBody>
-                  <a:tcPr marL="66675" marR="66675" marT="66675" marB="66675" anchor="t">
+                  <a:tcPr marL="64591" marR="64591" marT="64591" marB="64591" anchor="t">
                     <a:lnL w="0" cap="flat" cmpd="sng" algn="ctr">
                       <a:noFill/>
                     </a:lnL>
@@ -8073,29 +9584,29 @@
                     <a:p>
                       <a:pPr indent="0" marL="0">
                         <a:lnSpc>
-                          <a:spcPts val="2100"/>
+                          <a:spcPts val="2034"/>
                         </a:lnSpc>
                         <a:buNone/>
                       </a:pPr>
                       <a:r>
-                        <a:rPr lang="en-US" sz="1500" dirty="0">
+                        <a:rPr lang="en-US" sz="1453" dirty="0">
                           <a:solidFill>
                             <a:srgbClr val="10212B"/>
                           </a:solidFill>
-                          <a:latin typeface="IBM Plex Sans" pitchFamily="34" charset="0"/>
-                          <a:ea typeface="IBM Plex Sans" pitchFamily="34" charset="-122"/>
-                          <a:cs typeface="IBM Plex Sans" pitchFamily="34" charset="-120"/>
+                          <a:latin typeface="Verdana" pitchFamily="34" charset="0"/>
+                          <a:ea typeface="Verdana" pitchFamily="34" charset="-122"/>
+                          <a:cs typeface="Verdana" pitchFamily="34" charset="-120"/>
                         </a:rPr>
-                        <a:t>The build stops and names the CISA entry</a:t>
+                        <a:t>The build stops and names the finding</a:t>
                       </a:r>
-                      <a:endParaRPr lang="en-US" sz="1500" dirty="0">
-                        <a:latin typeface="IBM Plex Sans" charset="0"/>
-                        <a:ea typeface="IBM Plex Sans" charset="0"/>
-                        <a:cs typeface="IBM Plex Sans" charset="0"/>
+                      <a:endParaRPr lang="en-US" sz="1453" dirty="0">
+                        <a:latin typeface="Verdana" charset="0"/>
+                        <a:ea typeface="Verdana" charset="0"/>
+                        <a:cs typeface="Verdana" charset="0"/>
                       </a:endParaRPr>
                     </a:p>
                   </a:txBody>
-                  <a:tcPr marL="66675" marR="66675" marT="66675" marB="66675" anchor="t">
+                  <a:tcPr marL="64591" marR="64591" marT="64591" marB="64591" anchor="t">
                     <a:lnL w="12700" cap="flat" cmpd="sng" algn="ctr">
                       <a:solidFill>
                         <a:srgbClr val="C5C6C4"/>
@@ -8141,29 +9652,29 @@
                     <a:p>
                       <a:pPr indent="0" marL="0">
                         <a:lnSpc>
-                          <a:spcPts val="2100"/>
+                          <a:spcPts val="2034"/>
                         </a:lnSpc>
                         <a:buNone/>
                       </a:pPr>
                       <a:r>
-                        <a:rPr lang="en-US" sz="1500" dirty="0">
+                        <a:rPr lang="en-US" sz="1453" dirty="0">
                           <a:solidFill>
                             <a:srgbClr val="10212B"/>
                           </a:solidFill>
-                          <a:latin typeface="IBM Plex Sans" pitchFamily="34" charset="0"/>
-                          <a:ea typeface="IBM Plex Sans" pitchFamily="34" charset="-122"/>
-                          <a:cs typeface="IBM Plex Sans" pitchFamily="34" charset="-120"/>
+                          <a:latin typeface="Verdana" pitchFamily="34" charset="0"/>
+                          <a:ea typeface="Verdana" pitchFamily="34" charset="-122"/>
+                          <a:cs typeface="Verdana" pitchFamily="34" charset="-120"/>
                         </a:rPr>
                         <a:t>Exit 4</a:t>
                       </a:r>
-                      <a:endParaRPr lang="en-US" sz="1500" dirty="0">
-                        <a:latin typeface="IBM Plex Sans" charset="0"/>
-                        <a:ea typeface="IBM Plex Sans" charset="0"/>
-                        <a:cs typeface="IBM Plex Sans" charset="0"/>
+                      <a:endParaRPr lang="en-US" sz="1453" dirty="0">
+                        <a:latin typeface="Verdana" charset="0"/>
+                        <a:ea typeface="Verdana" charset="0"/>
+                        <a:cs typeface="Verdana" charset="0"/>
                       </a:endParaRPr>
                     </a:p>
                   </a:txBody>
-                  <a:tcPr marL="66675" marR="66675" marT="66675" marB="66675" anchor="t">
+                  <a:tcPr marL="64591" marR="64591" marT="64591" marB="64591" anchor="t">
                     <a:lnL w="12700" cap="flat" cmpd="sng" algn="ctr">
                       <a:solidFill>
                         <a:srgbClr val="C5C6C4"/>
@@ -8203,7 +9714,7 @@
                   </a:tcPr>
                 </a:tc>
               </a:tr>
-              <a:tr h="412750">
+              <a:tr h="401141">
                 <a:tc>
                   <a:txBody>
                     <a:bodyPr/>
@@ -8211,29 +9722,29 @@
                     <a:p>
                       <a:pPr indent="0" marL="0">
                         <a:lnSpc>
-                          <a:spcPts val="2100"/>
+                          <a:spcPts val="2034"/>
                         </a:lnSpc>
                         <a:buNone/>
                       </a:pPr>
                       <a:r>
-                        <a:rPr lang="en-US" sz="1500" dirty="0">
+                        <a:rPr lang="en-US" sz="1453" dirty="0">
                           <a:solidFill>
                             <a:srgbClr val="10212B"/>
                           </a:solidFill>
-                          <a:latin typeface="IBM Plex Sans" pitchFamily="34" charset="0"/>
-                          <a:ea typeface="IBM Plex Sans" pitchFamily="34" charset="-122"/>
-                          <a:cs typeface="IBM Plex Sans" pitchFamily="34" charset="-120"/>
+                          <a:latin typeface="Verdana" pitchFamily="34" charset="0"/>
+                          <a:ea typeface="Verdana" pitchFamily="34" charset="-122"/>
+                          <a:cs typeface="Verdana" pitchFamily="34" charset="-120"/>
                         </a:rPr>
                         <a:t>Code imports a package nobody declared</a:t>
                       </a:r>
-                      <a:endParaRPr lang="en-US" sz="1500" dirty="0">
-                        <a:latin typeface="IBM Plex Sans" charset="0"/>
-                        <a:ea typeface="IBM Plex Sans" charset="0"/>
-                        <a:cs typeface="IBM Plex Sans" charset="0"/>
+                      <a:endParaRPr lang="en-US" sz="1453" dirty="0">
+                        <a:latin typeface="Verdana" charset="0"/>
+                        <a:ea typeface="Verdana" charset="0"/>
+                        <a:cs typeface="Verdana" charset="0"/>
                       </a:endParaRPr>
                     </a:p>
                   </a:txBody>
-                  <a:tcPr marL="66675" marR="66675" marT="66675" marB="66675" anchor="t">
+                  <a:tcPr marL="64591" marR="64591" marT="64591" marB="64591" anchor="t">
                     <a:lnL w="0" cap="flat" cmpd="sng" algn="ctr">
                       <a:noFill/>
                     </a:lnL>
@@ -8276,29 +9787,29 @@
                     <a:p>
                       <a:pPr indent="0" marL="0">
                         <a:lnSpc>
-                          <a:spcPts val="2100"/>
+                          <a:spcPts val="2034"/>
                         </a:lnSpc>
                         <a:buNone/>
                       </a:pPr>
                       <a:r>
-                        <a:rPr lang="en-US" sz="1500" dirty="0">
+                        <a:rPr lang="en-US" sz="1453" dirty="0">
                           <a:solidFill>
                             <a:srgbClr val="10212B"/>
                           </a:solidFill>
-                          <a:latin typeface="IBM Plex Sans" pitchFamily="34" charset="0"/>
-                          <a:ea typeface="IBM Plex Sans" pitchFamily="34" charset="-122"/>
-                          <a:cs typeface="IBM Plex Sans" pitchFamily="34" charset="-120"/>
+                          <a:latin typeface="Verdana" pitchFamily="34" charset="0"/>
+                          <a:ea typeface="Verdana" pitchFamily="34" charset="-122"/>
+                          <a:cs typeface="Verdana" pitchFamily="34" charset="-120"/>
                         </a:rPr>
                         <a:t>Reported against the manifest</a:t>
                       </a:r>
-                      <a:endParaRPr lang="en-US" sz="1500" dirty="0">
-                        <a:latin typeface="IBM Plex Sans" charset="0"/>
-                        <a:ea typeface="IBM Plex Sans" charset="0"/>
-                        <a:cs typeface="IBM Plex Sans" charset="0"/>
+                      <a:endParaRPr lang="en-US" sz="1453" dirty="0">
+                        <a:latin typeface="Verdana" charset="0"/>
+                        <a:ea typeface="Verdana" charset="0"/>
+                        <a:cs typeface="Verdana" charset="0"/>
                       </a:endParaRPr>
                     </a:p>
                   </a:txBody>
-                  <a:tcPr marL="66675" marR="66675" marT="66675" marB="66675" anchor="t">
+                  <a:tcPr marL="64591" marR="64591" marT="64591" marB="64591" anchor="t">
                     <a:lnL w="12700" cap="flat" cmpd="sng" algn="ctr">
                       <a:solidFill>
                         <a:srgbClr val="BFC1BE"/>
@@ -8347,29 +9858,29 @@
                     <a:p>
                       <a:pPr indent="0" marL="0">
                         <a:lnSpc>
-                          <a:spcPts val="2100"/>
+                          <a:spcPts val="2034"/>
                         </a:lnSpc>
                         <a:buNone/>
                       </a:pPr>
                       <a:r>
-                        <a:rPr lang="en-US" sz="1500" dirty="0">
+                        <a:rPr lang="en-US" sz="1453" dirty="0">
                           <a:solidFill>
                             <a:srgbClr val="10212B"/>
                           </a:solidFill>
-                          <a:latin typeface="IBM Plex Sans" pitchFamily="34" charset="0"/>
-                          <a:ea typeface="IBM Plex Sans" pitchFamily="34" charset="-122"/>
-                          <a:cs typeface="IBM Plex Sans" pitchFamily="34" charset="-120"/>
+                          <a:latin typeface="Verdana" pitchFamily="34" charset="0"/>
+                          <a:ea typeface="Verdana" pitchFamily="34" charset="-122"/>
+                          <a:cs typeface="Verdana" pitchFamily="34" charset="-120"/>
                         </a:rPr>
                         <a:t>Exit 8</a:t>
                       </a:r>
-                      <a:endParaRPr lang="en-US" sz="1500" dirty="0">
-                        <a:latin typeface="IBM Plex Sans" charset="0"/>
-                        <a:ea typeface="IBM Plex Sans" charset="0"/>
-                        <a:cs typeface="IBM Plex Sans" charset="0"/>
+                      <a:endParaRPr lang="en-US" sz="1453" dirty="0">
+                        <a:latin typeface="Verdana" charset="0"/>
+                        <a:ea typeface="Verdana" charset="0"/>
+                        <a:cs typeface="Verdana" charset="0"/>
                       </a:endParaRPr>
                     </a:p>
                   </a:txBody>
-                  <a:tcPr marL="66675" marR="66675" marT="66675" marB="66675" anchor="t">
+                  <a:tcPr marL="64591" marR="64591" marT="64591" marB="64591" anchor="t">
                     <a:lnL w="12700" cap="flat" cmpd="sng" algn="ctr">
                       <a:solidFill>
                         <a:srgbClr val="BFC1BE"/>
@@ -8412,7 +9923,7 @@
                   </a:tcPr>
                 </a:tc>
               </a:tr>
-              <a:tr h="412750">
+              <a:tr h="401141">
                 <a:tc>
                   <a:txBody>
                     <a:bodyPr/>
@@ -8420,29 +9931,29 @@
                     <a:p>
                       <a:pPr indent="0" marL="0">
                         <a:lnSpc>
-                          <a:spcPts val="2100"/>
+                          <a:spcPts val="2034"/>
                         </a:lnSpc>
                         <a:buNone/>
                       </a:pPr>
                       <a:r>
-                        <a:rPr lang="en-US" sz="1500" dirty="0">
+                        <a:rPr lang="en-US" sz="1453" dirty="0">
                           <a:solidFill>
                             <a:srgbClr val="10212B"/>
                           </a:solidFill>
-                          <a:latin typeface="IBM Plex Sans" pitchFamily="34" charset="0"/>
-                          <a:ea typeface="IBM Plex Sans" pitchFamily="34" charset="-122"/>
-                          <a:cs typeface="IBM Plex Sans" pitchFamily="34" charset="-120"/>
+                          <a:latin typeface="Verdana" pitchFamily="34" charset="0"/>
+                          <a:ea typeface="Verdana" pitchFamily="34" charset="-122"/>
+                          <a:cs typeface="Verdana" pitchFamily="34" charset="-120"/>
                         </a:rPr>
                         <a:t>"What changed since the last release?"</a:t>
                       </a:r>
-                      <a:endParaRPr lang="en-US" sz="1500" dirty="0">
-                        <a:latin typeface="IBM Plex Sans" charset="0"/>
-                        <a:ea typeface="IBM Plex Sans" charset="0"/>
-                        <a:cs typeface="IBM Plex Sans" charset="0"/>
+                      <a:endParaRPr lang="en-US" sz="1453" dirty="0">
+                        <a:latin typeface="Verdana" charset="0"/>
+                        <a:ea typeface="Verdana" charset="0"/>
+                        <a:cs typeface="Verdana" charset="0"/>
                       </a:endParaRPr>
                     </a:p>
                   </a:txBody>
-                  <a:tcPr marL="66675" marR="66675" marT="66675" marB="66675" anchor="t">
+                  <a:tcPr marL="64591" marR="64591" marT="64591" marB="64591" anchor="t">
                     <a:lnL w="0" cap="flat" cmpd="sng" algn="ctr">
                       <a:noFill/>
                     </a:lnL>
@@ -8482,29 +9993,29 @@
                     <a:p>
                       <a:pPr indent="0" marL="0">
                         <a:lnSpc>
-                          <a:spcPts val="2100"/>
+                          <a:spcPts val="2034"/>
                         </a:lnSpc>
                         <a:buNone/>
                       </a:pPr>
                       <a:r>
-                        <a:rPr lang="en-US" sz="1500" dirty="0">
+                        <a:rPr lang="en-US" sz="1453" dirty="0">
                           <a:solidFill>
                             <a:srgbClr val="10212B"/>
                           </a:solidFill>
-                          <a:latin typeface="IBM Plex Sans" pitchFamily="34" charset="0"/>
-                          <a:ea typeface="IBM Plex Sans" pitchFamily="34" charset="-122"/>
-                          <a:cs typeface="IBM Plex Sans" pitchFamily="34" charset="-120"/>
+                          <a:latin typeface="Verdana" pitchFamily="34" charset="0"/>
+                          <a:ea typeface="Verdana" pitchFamily="34" charset="-122"/>
+                          <a:cs typeface="Verdana" pitchFamily="34" charset="-120"/>
                         </a:rPr>
                         <a:t>A diff of the two documents</a:t>
                       </a:r>
-                      <a:endParaRPr lang="en-US" sz="1500" dirty="0">
-                        <a:latin typeface="IBM Plex Sans" charset="0"/>
-                        <a:ea typeface="IBM Plex Sans" charset="0"/>
-                        <a:cs typeface="IBM Plex Sans" charset="0"/>
+                      <a:endParaRPr lang="en-US" sz="1453" dirty="0">
+                        <a:latin typeface="Verdana" charset="0"/>
+                        <a:ea typeface="Verdana" charset="0"/>
+                        <a:cs typeface="Verdana" charset="0"/>
                       </a:endParaRPr>
                     </a:p>
                   </a:txBody>
-                  <a:tcPr marL="66675" marR="66675" marT="66675" marB="66675" anchor="t">
+                  <a:tcPr marL="64591" marR="64591" marT="64591" marB="64591" anchor="t">
                     <a:lnL w="12700" cap="flat" cmpd="sng" algn="ctr">
                       <a:solidFill>
                         <a:srgbClr val="C5C6C4"/>
@@ -8550,29 +10061,29 @@
                     <a:p>
                       <a:pPr indent="0" marL="0">
                         <a:lnSpc>
-                          <a:spcPts val="2100"/>
+                          <a:spcPts val="2034"/>
                         </a:lnSpc>
                         <a:buNone/>
                       </a:pPr>
                       <a:r>
-                        <a:rPr lang="en-US" sz="1500" dirty="0">
+                        <a:rPr lang="en-US" sz="1453" dirty="0">
                           <a:solidFill>
                             <a:srgbClr val="10212B"/>
                           </a:solidFill>
-                          <a:latin typeface="IBM Plex Sans" pitchFamily="34" charset="0"/>
-                          <a:ea typeface="IBM Plex Sans" pitchFamily="34" charset="-122"/>
-                          <a:cs typeface="IBM Plex Sans" pitchFamily="34" charset="-120"/>
+                          <a:latin typeface="Verdana" pitchFamily="34" charset="0"/>
+                          <a:ea typeface="Verdana" pitchFamily="34" charset="-122"/>
+                          <a:cs typeface="Verdana" pitchFamily="34" charset="-120"/>
                         </a:rPr>
                         <a:t>Exit 6, if we gate it</a:t>
                       </a:r>
-                      <a:endParaRPr lang="en-US" sz="1500" dirty="0">
-                        <a:latin typeface="IBM Plex Sans" charset="0"/>
-                        <a:ea typeface="IBM Plex Sans" charset="0"/>
-                        <a:cs typeface="IBM Plex Sans" charset="0"/>
+                      <a:endParaRPr lang="en-US" sz="1453" dirty="0">
+                        <a:latin typeface="Verdana" charset="0"/>
+                        <a:ea typeface="Verdana" charset="0"/>
+                        <a:cs typeface="Verdana" charset="0"/>
                       </a:endParaRPr>
                     </a:p>
                   </a:txBody>
-                  <a:tcPr marL="66675" marR="66675" marT="66675" marB="66675" anchor="t">
+                  <a:tcPr marL="64591" marR="64591" marT="64591" marB="64591" anchor="t">
                     <a:lnL w="12700" cap="flat" cmpd="sng" algn="ctr">
                       <a:solidFill>
                         <a:srgbClr val="C5C6C4"/>
@@ -8609,6 +10120,215 @@
                       <a:headEnd type="none" w="med" len="med"/>
                       <a:tailEnd type="none" w="med" len="med"/>
                     </a:lnB>
+                  </a:tcPr>
+                </a:tc>
+              </a:tr>
+              <a:tr h="401141">
+                <a:tc>
+                  <a:txBody>
+                    <a:bodyPr/>
+                    <a:lstStyle/>
+                    <a:p>
+                      <a:pPr indent="0" marL="0">
+                        <a:lnSpc>
+                          <a:spcPts val="2034"/>
+                        </a:lnSpc>
+                        <a:buNone/>
+                      </a:pPr>
+                      <a:r>
+                        <a:rPr lang="en-US" sz="1453" dirty="0">
+                          <a:solidFill>
+                            <a:srgbClr val="10212B"/>
+                          </a:solidFill>
+                          <a:latin typeface="Verdana" pitchFamily="34" charset="0"/>
+                          <a:ea typeface="Verdana" pitchFamily="34" charset="-122"/>
+                          <a:cs typeface="Verdana" pitchFamily="34" charset="-120"/>
+                        </a:rPr>
+                        <a:t>A supplier sends an SBOM too thin to check</a:t>
+                      </a:r>
+                      <a:endParaRPr lang="en-US" sz="1453" dirty="0">
+                        <a:latin typeface="Verdana" charset="0"/>
+                        <a:ea typeface="Verdana" charset="0"/>
+                        <a:cs typeface="Verdana" charset="0"/>
+                      </a:endParaRPr>
+                    </a:p>
+                  </a:txBody>
+                  <a:tcPr marL="64591" marR="64591" marT="64591" marB="64591" anchor="t">
+                    <a:lnL w="0" cap="flat" cmpd="sng" algn="ctr">
+                      <a:noFill/>
+                    </a:lnL>
+                    <a:lnR w="12700" cap="flat" cmpd="sng" algn="ctr">
+                      <a:solidFill>
+                        <a:srgbClr val="BFC1BE"/>
+                      </a:solidFill>
+                      <a:prstDash val="solid"/>
+                      <a:round/>
+                      <a:headEnd type="none" w="med" len="med"/>
+                      <a:tailEnd type="none" w="med" len="med"/>
+                    </a:lnR>
+                    <a:lnT w="12700" cap="flat" cmpd="sng" algn="ctr">
+                      <a:solidFill>
+                        <a:srgbClr val="C5C6C4"/>
+                      </a:solidFill>
+                      <a:prstDash val="solid"/>
+                      <a:round/>
+                      <a:headEnd type="none" w="med" len="med"/>
+                      <a:tailEnd type="none" w="med" len="med"/>
+                    </a:lnT>
+                    <a:lnB w="12700" cap="flat" cmpd="sng" algn="ctr">
+                      <a:solidFill>
+                        <a:srgbClr val="BFC1BE"/>
+                      </a:solidFill>
+                      <a:prstDash val="solid"/>
+                      <a:round/>
+                      <a:headEnd type="none" w="med" len="med"/>
+                      <a:tailEnd type="none" w="med" len="med"/>
+                    </a:lnB>
+                    <a:solidFill>
+                      <a:srgbClr val="EFF2EE"/>
+                    </a:solidFill>
+                  </a:tcPr>
+                </a:tc>
+                <a:tc>
+                  <a:txBody>
+                    <a:bodyPr/>
+                    <a:lstStyle/>
+                    <a:p>
+                      <a:pPr indent="0" marL="0">
+                        <a:lnSpc>
+                          <a:spcPts val="2034"/>
+                        </a:lnSpc>
+                        <a:buNone/>
+                      </a:pPr>
+                      <a:r>
+                        <a:rPr lang="en-US" sz="1453" dirty="0">
+                          <a:solidFill>
+                            <a:srgbClr val="10212B"/>
+                          </a:solidFill>
+                          <a:latin typeface="Verdana" pitchFamily="34" charset="0"/>
+                          <a:ea typeface="Verdana" pitchFamily="34" charset="-122"/>
+                          <a:cs typeface="Verdana" pitchFamily="34" charset="-120"/>
+                        </a:rPr>
+                        <a:t>Graded before anyone trusts it</a:t>
+                      </a:r>
+                      <a:endParaRPr lang="en-US" sz="1453" dirty="0">
+                        <a:latin typeface="Verdana" charset="0"/>
+                        <a:ea typeface="Verdana" charset="0"/>
+                        <a:cs typeface="Verdana" charset="0"/>
+                      </a:endParaRPr>
+                    </a:p>
+                  </a:txBody>
+                  <a:tcPr marL="64591" marR="64591" marT="64591" marB="64591" anchor="t">
+                    <a:lnL w="12700" cap="flat" cmpd="sng" algn="ctr">
+                      <a:solidFill>
+                        <a:srgbClr val="BFC1BE"/>
+                      </a:solidFill>
+                      <a:prstDash val="solid"/>
+                      <a:round/>
+                      <a:headEnd type="none" w="med" len="med"/>
+                      <a:tailEnd type="none" w="med" len="med"/>
+                    </a:lnL>
+                    <a:lnR w="12700" cap="flat" cmpd="sng" algn="ctr">
+                      <a:solidFill>
+                        <a:srgbClr val="BFC1BE"/>
+                      </a:solidFill>
+                      <a:prstDash val="solid"/>
+                      <a:round/>
+                      <a:headEnd type="none" w="med" len="med"/>
+                      <a:tailEnd type="none" w="med" len="med"/>
+                    </a:lnR>
+                    <a:lnT w="12700" cap="flat" cmpd="sng" algn="ctr">
+                      <a:solidFill>
+                        <a:srgbClr val="C5C6C4"/>
+                      </a:solidFill>
+                      <a:prstDash val="solid"/>
+                      <a:round/>
+                      <a:headEnd type="none" w="med" len="med"/>
+                      <a:tailEnd type="none" w="med" len="med"/>
+                    </a:lnT>
+                    <a:lnB w="12700" cap="flat" cmpd="sng" algn="ctr">
+                      <a:solidFill>
+                        <a:srgbClr val="BFC1BE"/>
+                      </a:solidFill>
+                      <a:prstDash val="solid"/>
+                      <a:round/>
+                      <a:headEnd type="none" w="med" len="med"/>
+                      <a:tailEnd type="none" w="med" len="med"/>
+                    </a:lnB>
+                    <a:solidFill>
+                      <a:srgbClr val="EFF2EE"/>
+                    </a:solidFill>
+                  </a:tcPr>
+                </a:tc>
+                <a:tc>
+                  <a:txBody>
+                    <a:bodyPr/>
+                    <a:lstStyle/>
+                    <a:p>
+                      <a:pPr indent="0" marL="0">
+                        <a:lnSpc>
+                          <a:spcPts val="2034"/>
+                        </a:lnSpc>
+                        <a:buNone/>
+                      </a:pPr>
+                      <a:r>
+                        <a:rPr lang="en-US" sz="1453" dirty="0">
+                          <a:solidFill>
+                            <a:srgbClr val="10212B"/>
+                          </a:solidFill>
+                          <a:latin typeface="Verdana" pitchFamily="34" charset="0"/>
+                          <a:ea typeface="Verdana" pitchFamily="34" charset="-122"/>
+                          <a:cs typeface="Verdana" pitchFamily="34" charset="-120"/>
+                        </a:rPr>
+                        <a:t>Exit 10</a:t>
+                      </a:r>
+                      <a:endParaRPr lang="en-US" sz="1453" dirty="0">
+                        <a:latin typeface="Verdana" charset="0"/>
+                        <a:ea typeface="Verdana" charset="0"/>
+                        <a:cs typeface="Verdana" charset="0"/>
+                      </a:endParaRPr>
+                    </a:p>
+                  </a:txBody>
+                  <a:tcPr marL="64591" marR="64591" marT="64591" marB="64591" anchor="t">
+                    <a:lnL w="12700" cap="flat" cmpd="sng" algn="ctr">
+                      <a:solidFill>
+                        <a:srgbClr val="BFC1BE"/>
+                      </a:solidFill>
+                      <a:prstDash val="solid"/>
+                      <a:round/>
+                      <a:headEnd type="none" w="med" len="med"/>
+                      <a:tailEnd type="none" w="med" len="med"/>
+                    </a:lnL>
+                    <a:lnR w="12700" cap="flat" cmpd="sng" algn="ctr">
+                      <a:solidFill>
+                        <a:srgbClr val="BFC1BE"/>
+                      </a:solidFill>
+                      <a:prstDash val="solid"/>
+                      <a:round/>
+                      <a:headEnd type="none" w="med" len="med"/>
+                      <a:tailEnd type="none" w="med" len="med"/>
+                    </a:lnR>
+                    <a:lnT w="12700" cap="flat" cmpd="sng" algn="ctr">
+                      <a:solidFill>
+                        <a:srgbClr val="C5C6C4"/>
+                      </a:solidFill>
+                      <a:prstDash val="solid"/>
+                      <a:round/>
+                      <a:headEnd type="none" w="med" len="med"/>
+                      <a:tailEnd type="none" w="med" len="med"/>
+                    </a:lnT>
+                    <a:lnB w="12700" cap="flat" cmpd="sng" algn="ctr">
+                      <a:solidFill>
+                        <a:srgbClr val="BFC1BE"/>
+                      </a:solidFill>
+                      <a:prstDash val="solid"/>
+                      <a:round/>
+                      <a:headEnd type="none" w="med" len="med"/>
+                      <a:tailEnd type="none" w="med" len="med"/>
+                    </a:lnB>
+                    <a:solidFill>
+                      <a:srgbClr val="EFF2EE"/>
+                    </a:solidFill>
                   </a:tcPr>
                 </a:tc>
               </a:tr>
@@ -8624,8 +10344,8 @@
         </p:nvSpPr>
         <p:spPr>
           <a:xfrm>
-            <a:off x="812800" y="5074890"/>
-            <a:ext cx="10595610" cy="292100"/>
+            <a:off x="812800" y="5600452"/>
+            <a:ext cx="10595610" cy="266948"/>
           </a:xfrm>
           <a:prstGeom prst="rect">
             <a:avLst/>
@@ -8641,22 +10361,22 @@
           <a:p>
             <a:pPr algn="l" indent="0" marL="0">
               <a:lnSpc>
-                <a:spcPts val="2100"/>
+                <a:spcPts val="1923"/>
               </a:lnSpc>
               <a:buNone/>
             </a:pPr>
             <a:r>
-              <a:rPr lang="en-US" sz="1500" dirty="0">
+              <a:rPr lang="en-US" sz="1373" dirty="0">
                 <a:solidFill>
                   <a:srgbClr val="4A5568"/>
                 </a:solidFill>
-                <a:latin typeface="IBM Plex Sans" pitchFamily="34" charset="0"/>
-                <a:ea typeface="IBM Plex Sans" pitchFamily="34" charset="-122"/>
-                <a:cs typeface="IBM Plex Sans" pitchFamily="34" charset="-120"/>
+                <a:latin typeface="Verdana" pitchFamily="34" charset="0"/>
+                <a:ea typeface="Verdana" pitchFamily="34" charset="-122"/>
+                <a:cs typeface="Verdana" pitchFamily="34" charset="-120"/>
               </a:rPr>
               <a:t>Every gate is off by default. Leave them off and it writes the document and exits clean.</a:t>
             </a:r>
-            <a:endParaRPr lang="en-US" sz="1500" dirty="0"/>
+            <a:endParaRPr lang="en-US" sz="1373" dirty="0"/>
           </a:p>
         </p:txBody>
       </p:sp>
@@ -8669,38 +10389,38 @@
 </file>
 
 <file path=ppt/theme/theme1.xml><?xml version="1.0" encoding="utf-8"?>
-<a:theme xmlns:a="http://schemas.openxmlformats.org/drawingml/2006/main" name="Office Theme">
+<a:theme xmlns:a="http://schemas.openxmlformats.org/drawingml/2006/main" name="The pixi-sbom Case">
   <a:themeElements>
-    <a:clrScheme name="Office">
+    <a:clrScheme name="The pixi-sbom Case">
       <a:dk1>
-        <a:sysClr val="windowText" lastClr="000000"/>
+        <a:srgbClr val="10212B"/>
       </a:dk1>
       <a:lt1>
-        <a:sysClr val="window" lastClr="FFFFFF"/>
+        <a:srgbClr val="F7F8F6"/>
       </a:lt1>
       <a:dk2>
-        <a:srgbClr val="44546A"/>
+        <a:srgbClr val="4A575E"/>
       </a:dk2>
       <a:lt2>
-        <a:srgbClr val="E7E6E6"/>
+        <a:srgbClr val="E0E3E2"/>
       </a:lt2>
       <a:accent1>
-        <a:srgbClr val="4472C4"/>
+        <a:srgbClr val="6FBFAE"/>
       </a:accent1>
       <a:accent2>
-        <a:srgbClr val="ED7D31"/>
+        <a:srgbClr val="1F7A6C"/>
       </a:accent2>
       <a:accent3>
-        <a:srgbClr val="A5A5A5"/>
+        <a:srgbClr val="C2571A"/>
       </a:accent3>
       <a:accent4>
-        <a:srgbClr val="FFC000"/>
+        <a:srgbClr val="4A5568"/>
       </a:accent4>
       <a:accent5>
-        <a:srgbClr val="5B9BD5"/>
+        <a:srgbClr val="B5C4CA"/>
       </a:accent5>
       <a:accent6>
-        <a:srgbClr val="70AD47"/>
+        <a:srgbClr val="6A7179"/>
       </a:accent6>
       <a:hlink>
         <a:srgbClr val="0563C1"/>
@@ -8709,9 +10429,9 @@
         <a:srgbClr val="954F72"/>
       </a:folHlink>
     </a:clrScheme>
-    <a:fontScheme name="Office">
+    <a:fontScheme name="The pixi-sbom Case">
       <a:majorFont>
-        <a:latin typeface="Calibri Light" panose="020F0302020204030204"/>
+        <a:latin typeface="Verdana"/>
         <a:ea typeface=""/>
         <a:cs typeface=""/>
         <a:font script="Jpan" typeface="游ゴシック Light"/>
@@ -8763,7 +10483,7 @@
         <a:font script="Tfng" typeface="Ebrima"/>
       </a:majorFont>
       <a:minorFont>
-        <a:latin typeface="Calibri" panose="020F0502020204030204"/>
+        <a:latin typeface="Verdana"/>
         <a:ea typeface=""/>
         <a:cs typeface=""/>
         <a:font script="Jpan" typeface="游ゴシック"/>
@@ -8955,10 +10675,5 @@
   </a:themeElements>
   <a:objectDefaults/>
   <a:extraClrSchemeLst/>
-  <a:extLst>
-    <a:ext uri="{05A4C25C-085E-4340-85A3-A5531E510DB2}">
-      <thm15:themeFamily xmlns:thm15="http://schemas.microsoft.com/office/thememl/2012/main" name="Office Theme" id="{62F939B6-93AF-4DB8-9C6B-D6C7DFDC589F}" vid="{4A3C46E8-61CC-4603-A589-7422A47A8E4A}"/>
-    </a:ext>
-  </a:extLst>
 </a:theme>
 </file>